--- a/figures/Fig9_species_level_v2.pptx
+++ b/figures/Fig9_species_level_v2.pptx
@@ -2272,7 +2272,7 @@
           <p:spPr>
             <a:xfrm>
               <a:off x="182880" y="182880"/>
-              <a:ext cx="11338559" cy="7680960"/>
+              <a:ext cx="11338559" cy="7680959"/>
             </a:xfrm>
             <a:prstGeom prst="rect">
               <a:avLst/>
@@ -2307,7 +2307,7 @@
           <p:spPr>
             <a:xfrm>
               <a:off x="252469" y="252469"/>
-              <a:ext cx="5525395" cy="3648646"/>
+              <a:ext cx="5516663" cy="3593595"/>
             </a:xfrm>
             <a:prstGeom prst="rect">
               <a:avLst/>
@@ -2317,7 +2317,7 @@
                 <a:alpha val="100000"/>
               </a:srgbClr>
             </a:solidFill>
-            <a:ln w="11086" cap="rnd">
+            <a:ln w="12318" cap="rnd">
               <a:solidFill>
                 <a:srgbClr val="FFFFFF">
                   <a:alpha val="100000"/>
@@ -2341,8 +2341,8 @@
           </p:nvSpPr>
           <p:spPr>
             <a:xfrm>
-              <a:off x="5777865" y="252469"/>
-              <a:ext cx="5673985" cy="3648646"/>
+              <a:off x="5769132" y="252469"/>
+              <a:ext cx="5682718" cy="3593595"/>
             </a:xfrm>
             <a:prstGeom prst="rect">
               <a:avLst/>
@@ -2352,7 +2352,7 @@
                 <a:alpha val="100000"/>
               </a:srgbClr>
             </a:solidFill>
-            <a:ln w="11086" cap="rnd">
+            <a:ln w="12318" cap="rnd">
               <a:solidFill>
                 <a:srgbClr val="FFFFFF">
                   <a:alpha val="100000"/>
@@ -2376,8 +2376,8 @@
           </p:nvSpPr>
           <p:spPr>
             <a:xfrm>
-              <a:off x="1728709" y="768698"/>
-              <a:ext cx="3947935" cy="2444885"/>
+              <a:off x="1884455" y="818749"/>
+              <a:ext cx="3783456" cy="2284040"/>
             </a:xfrm>
             <a:prstGeom prst="rect">
               <a:avLst/>
@@ -2402,15 +2402,15 @@
           </p:nvSpPr>
           <p:spPr>
             <a:xfrm>
-              <a:off x="3279742" y="768698"/>
-              <a:ext cx="0" cy="2444885"/>
+              <a:off x="3370869" y="818749"/>
+              <a:ext cx="0" cy="2284040"/>
             </a:xfrm>
             <a:custGeom>
               <a:avLst/>
               <a:pathLst>
-                <a:path w="0" h="2444885">
+                <a:path w="0" h="2284040">
                   <a:moveTo>
-                    <a:pt x="0" y="2444885"/>
+                    <a:pt x="0" y="2284040"/>
                   </a:moveTo>
                   <a:lnTo>
                     <a:pt x="0" y="0"/>
@@ -2445,18 +2445,18 @@
           </p:nvSpPr>
           <p:spPr>
             <a:xfrm>
-              <a:off x="2189731" y="2400885"/>
-              <a:ext cx="1931905" cy="0"/>
+              <a:off x="2326271" y="2343558"/>
+              <a:ext cx="1851418" cy="0"/>
             </a:xfrm>
             <a:custGeom>
               <a:avLst/>
               <a:pathLst>
-                <a:path w="1931905" h="0">
+                <a:path w="1851418" h="0">
                   <a:moveTo>
                     <a:pt x="0" y="0"/>
                   </a:moveTo>
                   <a:lnTo>
-                    <a:pt x="1931905" y="0"/>
+                    <a:pt x="1851418" y="0"/>
                   </a:lnTo>
                 </a:path>
               </a:pathLst>
@@ -2485,18 +2485,18 @@
           </p:nvSpPr>
           <p:spPr>
             <a:xfrm>
-              <a:off x="1908160" y="2061318"/>
-              <a:ext cx="2159832" cy="0"/>
+              <a:off x="2056431" y="2026330"/>
+              <a:ext cx="2069849" cy="0"/>
             </a:xfrm>
             <a:custGeom>
               <a:avLst/>
               <a:pathLst>
-                <a:path w="2159832" h="0">
+                <a:path w="2069849" h="0">
                   <a:moveTo>
                     <a:pt x="0" y="0"/>
                   </a:moveTo>
                   <a:lnTo>
-                    <a:pt x="2159832" y="0"/>
+                    <a:pt x="2069849" y="0"/>
                   </a:lnTo>
                 </a:path>
               </a:pathLst>
@@ -2525,18 +2525,18 @@
           </p:nvSpPr>
           <p:spPr>
             <a:xfrm>
-              <a:off x="3446553" y="1042615"/>
-              <a:ext cx="1513584" cy="0"/>
+              <a:off x="3530731" y="1074646"/>
+              <a:ext cx="1450525" cy="0"/>
             </a:xfrm>
             <a:custGeom>
               <a:avLst/>
               <a:pathLst>
-                <a:path w="1513584" h="0">
+                <a:path w="1450525" h="0">
                   <a:moveTo>
                     <a:pt x="0" y="0"/>
                   </a:moveTo>
                   <a:lnTo>
-                    <a:pt x="1513584" y="0"/>
+                    <a:pt x="1450525" y="0"/>
                   </a:lnTo>
                 </a:path>
               </a:pathLst>
@@ -2565,18 +2565,18 @@
           </p:nvSpPr>
           <p:spPr>
             <a:xfrm>
-              <a:off x="2884644" y="1382183"/>
-              <a:ext cx="1283273" cy="0"/>
+              <a:off x="2992232" y="1391874"/>
+              <a:ext cx="1229809" cy="0"/>
             </a:xfrm>
             <a:custGeom>
               <a:avLst/>
               <a:pathLst>
-                <a:path w="1283273" h="0">
+                <a:path w="1229809" h="0">
                   <a:moveTo>
                     <a:pt x="0" y="0"/>
                   </a:moveTo>
                   <a:lnTo>
-                    <a:pt x="1283273" y="0"/>
+                    <a:pt x="1229809" y="0"/>
                   </a:lnTo>
                 </a:path>
               </a:pathLst>
@@ -2605,18 +2605,18 @@
           </p:nvSpPr>
           <p:spPr>
             <a:xfrm>
-              <a:off x="2483637" y="1721750"/>
-              <a:ext cx="1186913" cy="0"/>
+              <a:off x="2607932" y="1709102"/>
+              <a:ext cx="1137464" cy="0"/>
             </a:xfrm>
             <a:custGeom>
               <a:avLst/>
               <a:pathLst>
-                <a:path w="1186913" h="0">
+                <a:path w="1137464" h="0">
                   <a:moveTo>
                     <a:pt x="0" y="0"/>
                   </a:moveTo>
                   <a:lnTo>
-                    <a:pt x="1186913" y="0"/>
+                    <a:pt x="1137464" y="0"/>
                   </a:lnTo>
                 </a:path>
               </a:pathLst>
@@ -2645,18 +2645,18 @@
           </p:nvSpPr>
           <p:spPr>
             <a:xfrm>
-              <a:off x="2260557" y="3080020"/>
-              <a:ext cx="1171647" cy="0"/>
+              <a:off x="2394146" y="2978014"/>
+              <a:ext cx="1122834" cy="0"/>
             </a:xfrm>
             <a:custGeom>
               <a:avLst/>
               <a:pathLst>
-                <a:path w="1171647" h="0">
+                <a:path w="1122834" h="0">
                   <a:moveTo>
                     <a:pt x="0" y="0"/>
                   </a:moveTo>
                   <a:lnTo>
-                    <a:pt x="1171647" y="0"/>
+                    <a:pt x="1122834" y="0"/>
                   </a:lnTo>
                 </a:path>
               </a:pathLst>
@@ -2685,18 +2685,18 @@
           </p:nvSpPr>
           <p:spPr>
             <a:xfrm>
-              <a:off x="2297264" y="2740453"/>
-              <a:ext cx="1282064" cy="0"/>
+              <a:off x="2429323" y="2660786"/>
+              <a:ext cx="1228651" cy="0"/>
             </a:xfrm>
             <a:custGeom>
               <a:avLst/>
               <a:pathLst>
-                <a:path w="1282064" h="0">
+                <a:path w="1228651" h="0">
                   <a:moveTo>
                     <a:pt x="0" y="0"/>
                   </a:moveTo>
                   <a:lnTo>
-                    <a:pt x="1282064" y="0"/>
+                    <a:pt x="1228651" y="0"/>
                   </a:lnTo>
                 </a:path>
               </a:pathLst>
@@ -2725,18 +2725,18 @@
           </p:nvSpPr>
           <p:spPr>
             <a:xfrm>
-              <a:off x="1986413" y="2330708"/>
-              <a:ext cx="2068688" cy="0"/>
+              <a:off x="2131423" y="2277998"/>
+              <a:ext cx="1982502" cy="0"/>
             </a:xfrm>
             <a:custGeom>
               <a:avLst/>
               <a:pathLst>
-                <a:path w="2068688" h="0">
+                <a:path w="1982502" h="0">
                   <a:moveTo>
                     <a:pt x="0" y="0"/>
                   </a:moveTo>
                   <a:lnTo>
-                    <a:pt x="2068688" y="0"/>
+                    <a:pt x="1982502" y="0"/>
                   </a:lnTo>
                 </a:path>
               </a:pathLst>
@@ -2765,18 +2765,18 @@
           </p:nvSpPr>
           <p:spPr>
             <a:xfrm>
-              <a:off x="2288071" y="1991140"/>
-              <a:ext cx="1701048" cy="0"/>
+              <a:off x="2420514" y="1960770"/>
+              <a:ext cx="1630179" cy="0"/>
             </a:xfrm>
             <a:custGeom>
               <a:avLst/>
               <a:pathLst>
-                <a:path w="1701048" h="0">
+                <a:path w="1630179" h="0">
                   <a:moveTo>
                     <a:pt x="0" y="0"/>
                   </a:moveTo>
                   <a:lnTo>
-                    <a:pt x="1701048" y="0"/>
+                    <a:pt x="1630179" y="0"/>
                   </a:lnTo>
                 </a:path>
               </a:pathLst>
@@ -2805,18 +2805,18 @@
           </p:nvSpPr>
           <p:spPr>
             <a:xfrm>
-              <a:off x="3365886" y="972438"/>
-              <a:ext cx="1475742" cy="0"/>
+              <a:off x="3453424" y="1009086"/>
+              <a:ext cx="1414259" cy="0"/>
             </a:xfrm>
             <a:custGeom>
               <a:avLst/>
               <a:pathLst>
-                <a:path w="1475742" h="0">
+                <a:path w="1414259" h="0">
                   <a:moveTo>
                     <a:pt x="0" y="0"/>
                   </a:moveTo>
                   <a:lnTo>
-                    <a:pt x="1475742" y="0"/>
+                    <a:pt x="1414259" y="0"/>
                   </a:lnTo>
                 </a:path>
               </a:pathLst>
@@ -2845,18 +2845,18 @@
           </p:nvSpPr>
           <p:spPr>
             <a:xfrm>
-              <a:off x="3107316" y="1312006"/>
-              <a:ext cx="1247736" cy="0"/>
+              <a:off x="3205627" y="1326314"/>
+              <a:ext cx="1195752" cy="0"/>
             </a:xfrm>
             <a:custGeom>
               <a:avLst/>
               <a:pathLst>
-                <a:path w="1247736" h="0">
+                <a:path w="1195752" h="0">
                   <a:moveTo>
                     <a:pt x="0" y="0"/>
                   </a:moveTo>
                   <a:lnTo>
-                    <a:pt x="1247736" y="0"/>
+                    <a:pt x="1195752" y="0"/>
                   </a:lnTo>
                 </a:path>
               </a:pathLst>
@@ -2885,18 +2885,18 @@
           </p:nvSpPr>
           <p:spPr>
             <a:xfrm>
-              <a:off x="2534125" y="1651573"/>
-              <a:ext cx="1133855" cy="0"/>
+              <a:off x="2656316" y="1643542"/>
+              <a:ext cx="1086616" cy="0"/>
             </a:xfrm>
             <a:custGeom>
               <a:avLst/>
               <a:pathLst>
-                <a:path w="1133855" h="0">
+                <a:path w="1086616" h="0">
                   <a:moveTo>
                     <a:pt x="0" y="0"/>
                   </a:moveTo>
                   <a:lnTo>
-                    <a:pt x="1133855" y="0"/>
+                    <a:pt x="1086616" y="0"/>
                   </a:lnTo>
                 </a:path>
               </a:pathLst>
@@ -2925,18 +2925,18 @@
           </p:nvSpPr>
           <p:spPr>
             <a:xfrm>
-              <a:off x="2354462" y="3009843"/>
-              <a:ext cx="1154636" cy="0"/>
+              <a:off x="2484138" y="2912453"/>
+              <a:ext cx="1106532" cy="0"/>
             </a:xfrm>
             <a:custGeom>
               <a:avLst/>
               <a:pathLst>
-                <a:path w="1154636" h="0">
+                <a:path w="1106532" h="0">
                   <a:moveTo>
                     <a:pt x="0" y="0"/>
                   </a:moveTo>
                   <a:lnTo>
-                    <a:pt x="1154636" y="0"/>
+                    <a:pt x="1106532" y="0"/>
                   </a:lnTo>
                 </a:path>
               </a:pathLst>
@@ -2965,18 +2965,18 @@
           </p:nvSpPr>
           <p:spPr>
             <a:xfrm>
-              <a:off x="2285272" y="2670275"/>
-              <a:ext cx="1251692" cy="0"/>
+              <a:off x="2417831" y="2595225"/>
+              <a:ext cx="1199544" cy="0"/>
             </a:xfrm>
             <a:custGeom>
               <a:avLst/>
               <a:pathLst>
-                <a:path w="1251692" h="0">
+                <a:path w="1199544" h="0">
                   <a:moveTo>
                     <a:pt x="0" y="0"/>
                   </a:moveTo>
                   <a:lnTo>
-                    <a:pt x="1251692" y="0"/>
+                    <a:pt x="1199544" y="0"/>
                   </a:lnTo>
                 </a:path>
               </a:pathLst>
@@ -3005,18 +3005,18 @@
           </p:nvSpPr>
           <p:spPr>
             <a:xfrm>
-              <a:off x="2317321" y="2260531"/>
-              <a:ext cx="1614280" cy="0"/>
+              <a:off x="2448544" y="2212437"/>
+              <a:ext cx="1547026" cy="0"/>
             </a:xfrm>
             <a:custGeom>
               <a:avLst/>
               <a:pathLst>
-                <a:path w="1614280" h="0">
+                <a:path w="1547026" h="0">
                   <a:moveTo>
                     <a:pt x="0" y="0"/>
                   </a:moveTo>
                   <a:lnTo>
-                    <a:pt x="1614280" y="0"/>
+                    <a:pt x="1547026" y="0"/>
                   </a:lnTo>
                 </a:path>
               </a:pathLst>
@@ -3045,18 +3045,18 @@
           </p:nvSpPr>
           <p:spPr>
             <a:xfrm>
-              <a:off x="2443825" y="1920963"/>
-              <a:ext cx="1524790" cy="0"/>
+              <a:off x="2569778" y="1895209"/>
+              <a:ext cx="1461264" cy="0"/>
             </a:xfrm>
             <a:custGeom>
               <a:avLst/>
               <a:pathLst>
-                <a:path w="1524790" h="0">
+                <a:path w="1461264" h="0">
                   <a:moveTo>
                     <a:pt x="0" y="0"/>
                   </a:moveTo>
                   <a:lnTo>
-                    <a:pt x="1524790" y="0"/>
+                    <a:pt x="1461264" y="0"/>
                   </a:lnTo>
                 </a:path>
               </a:pathLst>
@@ -3085,18 +3085,18 @@
           </p:nvSpPr>
           <p:spPr>
             <a:xfrm>
-              <a:off x="4006276" y="902261"/>
-              <a:ext cx="1490916" cy="0"/>
+              <a:off x="4067135" y="943525"/>
+              <a:ext cx="1428801" cy="0"/>
             </a:xfrm>
             <a:custGeom>
               <a:avLst/>
               <a:pathLst>
-                <a:path w="1490916" h="0">
+                <a:path w="1428801" h="0">
                   <a:moveTo>
                     <a:pt x="0" y="0"/>
                   </a:moveTo>
                   <a:lnTo>
-                    <a:pt x="1490916" y="0"/>
+                    <a:pt x="1428801" y="0"/>
                   </a:lnTo>
                 </a:path>
               </a:pathLst>
@@ -3125,18 +3125,18 @@
           </p:nvSpPr>
           <p:spPr>
             <a:xfrm>
-              <a:off x="3068505" y="1241828"/>
-              <a:ext cx="1118365" cy="0"/>
+              <a:off x="3168433" y="1260753"/>
+              <a:ext cx="1071772" cy="0"/>
             </a:xfrm>
             <a:custGeom>
               <a:avLst/>
               <a:pathLst>
-                <a:path w="1118365" h="0">
+                <a:path w="1071772" h="0">
                   <a:moveTo>
                     <a:pt x="0" y="0"/>
                   </a:moveTo>
                   <a:lnTo>
-                    <a:pt x="1118365" y="0"/>
+                    <a:pt x="1071772" y="0"/>
                   </a:lnTo>
                 </a:path>
               </a:pathLst>
@@ -3165,18 +3165,18 @@
           </p:nvSpPr>
           <p:spPr>
             <a:xfrm>
-              <a:off x="2907164" y="1581396"/>
-              <a:ext cx="1119822" cy="0"/>
+              <a:off x="3013814" y="1577981"/>
+              <a:ext cx="1073168" cy="0"/>
             </a:xfrm>
             <a:custGeom>
               <a:avLst/>
               <a:pathLst>
-                <a:path w="1119822" h="0">
+                <a:path w="1073168" h="0">
                   <a:moveTo>
                     <a:pt x="0" y="0"/>
                   </a:moveTo>
                   <a:lnTo>
-                    <a:pt x="1119822" y="0"/>
+                    <a:pt x="1073168" y="0"/>
                   </a:lnTo>
                 </a:path>
               </a:pathLst>
@@ -3205,18 +3205,18 @@
           </p:nvSpPr>
           <p:spPr>
             <a:xfrm>
-              <a:off x="2220298" y="2939666"/>
-              <a:ext cx="1105054" cy="0"/>
+              <a:off x="2355564" y="2846893"/>
+              <a:ext cx="1059015" cy="0"/>
             </a:xfrm>
             <a:custGeom>
               <a:avLst/>
               <a:pathLst>
-                <a:path w="1105054" h="0">
+                <a:path w="1059015" h="0">
                   <a:moveTo>
                     <a:pt x="0" y="0"/>
                   </a:moveTo>
                   <a:lnTo>
-                    <a:pt x="1105054" y="0"/>
+                    <a:pt x="1059015" y="0"/>
                   </a:lnTo>
                 </a:path>
               </a:pathLst>
@@ -3245,18 +3245,18 @@
           </p:nvSpPr>
           <p:spPr>
             <a:xfrm>
-              <a:off x="2223275" y="2600098"/>
-              <a:ext cx="1195540" cy="0"/>
+              <a:off x="2358417" y="2529665"/>
+              <a:ext cx="1145731" cy="0"/>
             </a:xfrm>
             <a:custGeom>
               <a:avLst/>
               <a:pathLst>
-                <a:path w="1195540" h="0">
+                <a:path w="1145731" h="0">
                   <a:moveTo>
                     <a:pt x="0" y="0"/>
                   </a:moveTo>
                   <a:lnTo>
-                    <a:pt x="1195540" y="0"/>
+                    <a:pt x="1145731" y="0"/>
                   </a:lnTo>
                 </a:path>
               </a:pathLst>
@@ -3285,13 +3285,13 @@
           </p:nvSpPr>
           <p:spPr>
             <a:xfrm>
-              <a:off x="3124901" y="2370102"/>
-              <a:ext cx="61566" cy="61566"/>
+              <a:off x="3220788" y="2312366"/>
+              <a:ext cx="62384" cy="62384"/>
             </a:xfrm>
             <a:prstGeom prst="ellipse">
               <a:avLst/>
             </a:prstGeom>
-            <a:ln w="7363" cap="rnd">
+            <a:ln w="8181" cap="rnd">
               <a:solidFill>
                 <a:srgbClr val="0072B2">
                   <a:alpha val="100000"/>
@@ -3315,13 +3315,13 @@
           </p:nvSpPr>
           <p:spPr>
             <a:xfrm>
-              <a:off x="2957294" y="2030535"/>
-              <a:ext cx="61566" cy="61566"/>
+              <a:off x="3060163" y="1995138"/>
+              <a:ext cx="62384" cy="62384"/>
             </a:xfrm>
             <a:prstGeom prst="ellipse">
               <a:avLst/>
             </a:prstGeom>
-            <a:ln w="7363" cap="rnd">
+            <a:ln w="8181" cap="rnd">
               <a:solidFill>
                 <a:srgbClr val="0072B2">
                   <a:alpha val="100000"/>
@@ -3345,8 +3345,8 @@
           </p:nvSpPr>
           <p:spPr>
             <a:xfrm>
-              <a:off x="4172562" y="1011832"/>
-              <a:ext cx="61566" cy="61566"/>
+              <a:off x="4224801" y="1043454"/>
+              <a:ext cx="62384" cy="62384"/>
             </a:xfrm>
             <a:prstGeom prst="ellipse">
               <a:avLst/>
@@ -3371,13 +3371,13 @@
           </p:nvSpPr>
           <p:spPr>
             <a:xfrm>
-              <a:off x="3495497" y="1351400"/>
-              <a:ext cx="61566" cy="61566"/>
+              <a:off x="3575944" y="1360682"/>
+              <a:ext cx="62384" cy="62384"/>
             </a:xfrm>
             <a:prstGeom prst="ellipse">
               <a:avLst/>
             </a:prstGeom>
-            <a:ln w="7363" cap="rnd">
+            <a:ln w="8181" cap="rnd">
               <a:solidFill>
                 <a:srgbClr val="0072B2">
                   <a:alpha val="100000"/>
@@ -3401,13 +3401,13 @@
           </p:nvSpPr>
           <p:spPr>
             <a:xfrm>
-              <a:off x="3046311" y="1690967"/>
-              <a:ext cx="61566" cy="61566"/>
+              <a:off x="3145472" y="1677910"/>
+              <a:ext cx="62384" cy="62384"/>
             </a:xfrm>
             <a:prstGeom prst="ellipse">
               <a:avLst/>
             </a:prstGeom>
-            <a:ln w="7363" cap="rnd">
+            <a:ln w="8181" cap="rnd">
               <a:solidFill>
                 <a:srgbClr val="0072B2">
                   <a:alpha val="100000"/>
@@ -3431,13 +3431,13 @@
           </p:nvSpPr>
           <p:spPr>
             <a:xfrm>
-              <a:off x="2815598" y="3049237"/>
-              <a:ext cx="61566" cy="61566"/>
+              <a:off x="2924371" y="2946822"/>
+              <a:ext cx="62384" cy="62384"/>
             </a:xfrm>
             <a:prstGeom prst="ellipse">
               <a:avLst/>
             </a:prstGeom>
-            <a:ln w="7363" cap="rnd">
+            <a:ln w="8181" cap="rnd">
               <a:solidFill>
                 <a:srgbClr val="0072B2">
                   <a:alpha val="100000"/>
@@ -3461,13 +3461,13 @@
           </p:nvSpPr>
           <p:spPr>
             <a:xfrm>
-              <a:off x="2907513" y="2709670"/>
-              <a:ext cx="61566" cy="61566"/>
+              <a:off x="3012457" y="2629594"/>
+              <a:ext cx="62384" cy="62384"/>
             </a:xfrm>
             <a:prstGeom prst="ellipse">
               <a:avLst/>
             </a:prstGeom>
-            <a:ln w="7363" cap="rnd">
+            <a:ln w="8181" cap="rnd">
               <a:solidFill>
                 <a:srgbClr val="0072B2">
                   <a:alpha val="100000"/>
@@ -3491,13 +3491,13 @@
           </p:nvSpPr>
           <p:spPr>
             <a:xfrm>
-              <a:off x="2989974" y="2299925"/>
-              <a:ext cx="61566" cy="61566"/>
+              <a:off x="3091483" y="2246805"/>
+              <a:ext cx="62384" cy="62384"/>
             </a:xfrm>
             <a:prstGeom prst="ellipse">
               <a:avLst/>
             </a:prstGeom>
-            <a:ln w="7363" cap="rnd">
+            <a:ln w="8181" cap="rnd">
               <a:solidFill>
                 <a:srgbClr val="009E73">
                   <a:alpha val="100000"/>
@@ -3521,13 +3521,13 @@
           </p:nvSpPr>
           <p:spPr>
             <a:xfrm>
-              <a:off x="3107812" y="1960357"/>
-              <a:ext cx="61566" cy="61566"/>
+              <a:off x="3204411" y="1929577"/>
+              <a:ext cx="62384" cy="62384"/>
             </a:xfrm>
             <a:prstGeom prst="ellipse">
               <a:avLst/>
             </a:prstGeom>
-            <a:ln w="7363" cap="rnd">
+            <a:ln w="8181" cap="rnd">
               <a:solidFill>
                 <a:srgbClr val="009E73">
                   <a:alpha val="100000"/>
@@ -3551,8 +3551,8 @@
           </p:nvSpPr>
           <p:spPr>
             <a:xfrm>
-              <a:off x="4072974" y="941655"/>
-              <a:ext cx="61566" cy="61566"/>
+              <a:off x="4129362" y="977894"/>
+              <a:ext cx="62384" cy="62384"/>
             </a:xfrm>
             <a:prstGeom prst="ellipse">
               <a:avLst/>
@@ -3577,13 +3577,13 @@
           </p:nvSpPr>
           <p:spPr>
             <a:xfrm>
-              <a:off x="3700401" y="1281222"/>
-              <a:ext cx="61566" cy="61566"/>
+              <a:off x="3772311" y="1295122"/>
+              <a:ext cx="62384" cy="62384"/>
             </a:xfrm>
             <a:prstGeom prst="ellipse">
               <a:avLst/>
             </a:prstGeom>
-            <a:ln w="7363" cap="rnd">
+            <a:ln w="8181" cap="rnd">
               <a:solidFill>
                 <a:srgbClr val="009E73">
                   <a:alpha val="100000"/>
@@ -3607,13 +3607,13 @@
           </p:nvSpPr>
           <p:spPr>
             <a:xfrm>
-              <a:off x="3070270" y="1620790"/>
-              <a:ext cx="61566" cy="61566"/>
+              <a:off x="3168433" y="1612350"/>
+              <a:ext cx="62384" cy="62384"/>
             </a:xfrm>
             <a:prstGeom prst="ellipse">
               <a:avLst/>
             </a:prstGeom>
-            <a:ln w="7363" cap="rnd">
+            <a:ln w="8181" cap="rnd">
               <a:solidFill>
                 <a:srgbClr val="009E73">
                   <a:alpha val="100000"/>
@@ -3637,13 +3637,13 @@
           </p:nvSpPr>
           <p:spPr>
             <a:xfrm>
-              <a:off x="2900997" y="2979060"/>
-              <a:ext cx="61566" cy="61566"/>
+              <a:off x="3006212" y="2881261"/>
+              <a:ext cx="62384" cy="62384"/>
             </a:xfrm>
             <a:prstGeom prst="ellipse">
               <a:avLst/>
             </a:prstGeom>
-            <a:ln w="7363" cap="rnd">
+            <a:ln w="8181" cap="rnd">
               <a:solidFill>
                 <a:srgbClr val="009E73">
                   <a:alpha val="100000"/>
@@ -3667,13 +3667,13 @@
           </p:nvSpPr>
           <p:spPr>
             <a:xfrm>
-              <a:off x="2880335" y="2639492"/>
-              <a:ext cx="61566" cy="61566"/>
+              <a:off x="2986411" y="2564033"/>
+              <a:ext cx="62384" cy="62384"/>
             </a:xfrm>
             <a:prstGeom prst="ellipse">
               <a:avLst/>
             </a:prstGeom>
-            <a:ln w="7363" cap="rnd">
+            <a:ln w="8181" cap="rnd">
               <a:solidFill>
                 <a:srgbClr val="009E73">
                   <a:alpha val="100000"/>
@@ -3697,13 +3697,13 @@
           </p:nvSpPr>
           <p:spPr>
             <a:xfrm>
-              <a:off x="3093678" y="2229748"/>
-              <a:ext cx="61566" cy="61566"/>
+              <a:off x="3190865" y="2181245"/>
+              <a:ext cx="62384" cy="62384"/>
             </a:xfrm>
             <a:prstGeom prst="ellipse">
               <a:avLst/>
             </a:prstGeom>
-            <a:ln w="7363" cap="rnd">
+            <a:ln w="8181" cap="rnd">
               <a:solidFill>
                 <a:srgbClr val="E69F00">
                   <a:alpha val="100000"/>
@@ -3727,13 +3727,13 @@
           </p:nvSpPr>
           <p:spPr>
             <a:xfrm>
-              <a:off x="3175437" y="1890180"/>
-              <a:ext cx="61566" cy="61566"/>
+              <a:off x="3269218" y="1864017"/>
+              <a:ext cx="62384" cy="62384"/>
             </a:xfrm>
             <a:prstGeom prst="ellipse">
               <a:avLst/>
             </a:prstGeom>
-            <a:ln w="7363" cap="rnd">
+            <a:ln w="8181" cap="rnd">
               <a:solidFill>
                 <a:srgbClr val="E69F00">
                   <a:alpha val="100000"/>
@@ -3757,8 +3757,8 @@
           </p:nvSpPr>
           <p:spPr>
             <a:xfrm>
-              <a:off x="4720951" y="871478"/>
-              <a:ext cx="61566" cy="61566"/>
+              <a:off x="4750343" y="912333"/>
+              <a:ext cx="62384" cy="62384"/>
             </a:xfrm>
             <a:prstGeom prst="ellipse">
               <a:avLst/>
@@ -3783,13 +3783,13 @@
           </p:nvSpPr>
           <p:spPr>
             <a:xfrm>
-              <a:off x="3596905" y="1211045"/>
-              <a:ext cx="61566" cy="61566"/>
+              <a:off x="3673127" y="1229561"/>
+              <a:ext cx="62384" cy="62384"/>
             </a:xfrm>
             <a:prstGeom prst="ellipse">
               <a:avLst/>
             </a:prstGeom>
-            <a:ln w="7363" cap="rnd">
+            <a:ln w="8181" cap="rnd">
               <a:solidFill>
                 <a:srgbClr val="E69F00">
                   <a:alpha val="100000"/>
@@ -3813,13 +3813,13 @@
           </p:nvSpPr>
           <p:spPr>
             <a:xfrm>
-              <a:off x="3436292" y="1550613"/>
-              <a:ext cx="61566" cy="61566"/>
+              <a:off x="3519206" y="1546789"/>
+              <a:ext cx="62384" cy="62384"/>
             </a:xfrm>
             <a:prstGeom prst="ellipse">
               <a:avLst/>
             </a:prstGeom>
-            <a:ln w="7363" cap="rnd">
+            <a:ln w="8181" cap="rnd">
               <a:solidFill>
                 <a:srgbClr val="E69F00">
                   <a:alpha val="100000"/>
@@ -3843,13 +3843,13 @@
           </p:nvSpPr>
           <p:spPr>
             <a:xfrm>
-              <a:off x="2742042" y="2908882"/>
-              <a:ext cx="61566" cy="61566"/>
+              <a:off x="2853879" y="2815701"/>
+              <a:ext cx="62384" cy="62384"/>
             </a:xfrm>
             <a:prstGeom prst="ellipse">
               <a:avLst/>
             </a:prstGeom>
-            <a:ln w="7363" cap="rnd">
+            <a:ln w="8181" cap="rnd">
               <a:solidFill>
                 <a:srgbClr val="E69F00">
                   <a:alpha val="100000"/>
@@ -3873,13 +3873,13 @@
           </p:nvSpPr>
           <p:spPr>
             <a:xfrm>
-              <a:off x="2790262" y="2569315"/>
-              <a:ext cx="61566" cy="61566"/>
+              <a:off x="2900090" y="2498473"/>
+              <a:ext cx="62384" cy="62384"/>
             </a:xfrm>
             <a:prstGeom prst="ellipse">
               <a:avLst/>
             </a:prstGeom>
-            <a:ln w="7363" cap="rnd">
+            <a:ln w="8181" cap="rnd">
               <a:solidFill>
                 <a:srgbClr val="E69F00">
                   <a:alpha val="100000"/>
@@ -3903,15 +3903,15 @@
           </p:nvSpPr>
           <p:spPr>
             <a:xfrm>
-              <a:off x="1728709" y="768698"/>
-              <a:ext cx="0" cy="2444885"/>
+              <a:off x="1884455" y="818749"/>
+              <a:ext cx="0" cy="2284040"/>
             </a:xfrm>
             <a:custGeom>
               <a:avLst/>
               <a:pathLst>
-                <a:path w="0" h="2444885">
+                <a:path w="0" h="2284040">
                   <a:moveTo>
-                    <a:pt x="0" y="2444885"/>
+                    <a:pt x="0" y="2284040"/>
                   </a:moveTo>
                   <a:lnTo>
                     <a:pt x="0" y="0"/>
@@ -3943,8 +3943,8 @@
           </p:nvSpPr>
           <p:spPr>
             <a:xfrm>
-              <a:off x="353689" y="2977153"/>
-              <a:ext cx="1323776" cy="65379"/>
+              <a:off x="353689" y="2876060"/>
+              <a:ext cx="1473829" cy="72786"/>
             </a:xfrm>
             <a:prstGeom prst="rect">
               <a:avLst/>
@@ -3964,7 +3964,7 @@
                 </a:spcAft>
               </a:pPr>
               <a:r>
-                <a:rPr sz="720" i="0" b="0">
+                <a:rPr sz="800" i="0" b="0">
                   <a:solidFill>
                     <a:srgbClr val="262626">
                       <a:alpha val="100000"/>
@@ -3986,8 +3986,8 @@
           </p:nvSpPr>
           <p:spPr>
             <a:xfrm>
-              <a:off x="480516" y="2637586"/>
-              <a:ext cx="1196949" cy="65379"/>
+              <a:off x="494964" y="2558832"/>
+              <a:ext cx="1332555" cy="72786"/>
             </a:xfrm>
             <a:prstGeom prst="rect">
               <a:avLst/>
@@ -4007,7 +4007,7 @@
                 </a:spcAft>
               </a:pPr>
               <a:r>
-                <a:rPr sz="720" i="0" b="0">
+                <a:rPr sz="800" i="0" b="0">
                   <a:solidFill>
                     <a:srgbClr val="262626">
                       <a:alpha val="100000"/>
@@ -4029,8 +4029,8 @@
           </p:nvSpPr>
           <p:spPr>
             <a:xfrm>
-              <a:off x="1226118" y="2298018"/>
-              <a:ext cx="451347" cy="65379"/>
+              <a:off x="1324873" y="2241604"/>
+              <a:ext cx="502645" cy="72786"/>
             </a:xfrm>
             <a:prstGeom prst="rect">
               <a:avLst/>
@@ -4050,7 +4050,7 @@
                 </a:spcAft>
               </a:pPr>
               <a:r>
-                <a:rPr sz="720" i="0" b="0">
+                <a:rPr sz="800" i="0" b="0">
                   <a:solidFill>
                     <a:srgbClr val="262626">
                       <a:alpha val="100000"/>
@@ -4072,8 +4072,8 @@
           </p:nvSpPr>
           <p:spPr>
             <a:xfrm>
-              <a:off x="546444" y="1958451"/>
-              <a:ext cx="1131021" cy="65379"/>
+              <a:off x="568024" y="1924377"/>
+              <a:ext cx="1259494" cy="72786"/>
             </a:xfrm>
             <a:prstGeom prst="rect">
               <a:avLst/>
@@ -4093,7 +4093,7 @@
                 </a:spcAft>
               </a:pPr>
               <a:r>
-                <a:rPr sz="720" i="0" b="0">
+                <a:rPr sz="800" i="0" b="0">
                   <a:solidFill>
                     <a:srgbClr val="262626">
                       <a:alpha val="100000"/>
@@ -4115,8 +4115,8 @@
           </p:nvSpPr>
           <p:spPr>
             <a:xfrm>
-              <a:off x="800099" y="1618883"/>
-              <a:ext cx="877366" cy="65379"/>
+              <a:off x="850391" y="1607149"/>
+              <a:ext cx="977127" cy="72786"/>
             </a:xfrm>
             <a:prstGeom prst="rect">
               <a:avLst/>
@@ -4136,7 +4136,7 @@
                 </a:spcAft>
               </a:pPr>
               <a:r>
-                <a:rPr sz="720" i="0" b="0">
+                <a:rPr sz="800" i="0" b="0">
                   <a:solidFill>
                     <a:srgbClr val="262626">
                       <a:alpha val="100000"/>
@@ -4158,8 +4158,8 @@
           </p:nvSpPr>
           <p:spPr>
             <a:xfrm>
-              <a:off x="1231147" y="1279316"/>
-              <a:ext cx="446318" cy="65379"/>
+              <a:off x="1330451" y="1289921"/>
+              <a:ext cx="497067" cy="72786"/>
             </a:xfrm>
             <a:prstGeom prst="rect">
               <a:avLst/>
@@ -4179,7 +4179,7 @@
                 </a:spcAft>
               </a:pPr>
               <a:r>
-                <a:rPr sz="720" i="0" b="0">
+                <a:rPr sz="800" i="0" b="0">
                   <a:solidFill>
                     <a:srgbClr val="262626">
                       <a:alpha val="100000"/>
@@ -4201,8 +4201,8 @@
           </p:nvSpPr>
           <p:spPr>
             <a:xfrm>
-              <a:off x="967343" y="939748"/>
-              <a:ext cx="710123" cy="65379"/>
+              <a:off x="1036654" y="972693"/>
+              <a:ext cx="790864" cy="72786"/>
             </a:xfrm>
             <a:prstGeom prst="rect">
               <a:avLst/>
@@ -4222,7 +4222,7 @@
                 </a:spcAft>
               </a:pPr>
               <a:r>
-                <a:rPr sz="720" i="0" b="0">
+                <a:rPr sz="800" i="0" b="0">
                   <a:solidFill>
                     <a:srgbClr val="262626">
                       <a:alpha val="100000"/>
@@ -4244,18 +4244,18 @@
           </p:nvSpPr>
           <p:spPr>
             <a:xfrm>
-              <a:off x="1700240" y="3009843"/>
-              <a:ext cx="28468" cy="0"/>
+              <a:off x="1852824" y="2912453"/>
+              <a:ext cx="31631" cy="0"/>
             </a:xfrm>
             <a:custGeom>
               <a:avLst/>
               <a:pathLst>
-                <a:path w="28468" h="0">
+                <a:path w="31631" h="0">
                   <a:moveTo>
                     <a:pt x="0" y="0"/>
                   </a:moveTo>
                   <a:lnTo>
-                    <a:pt x="28468" y="0"/>
+                    <a:pt x="31631" y="0"/>
                   </a:lnTo>
                 </a:path>
               </a:pathLst>
@@ -4284,18 +4284,18 @@
           </p:nvSpPr>
           <p:spPr>
             <a:xfrm>
-              <a:off x="1700240" y="2670275"/>
-              <a:ext cx="28468" cy="0"/>
+              <a:off x="1852824" y="2595225"/>
+              <a:ext cx="31631" cy="0"/>
             </a:xfrm>
             <a:custGeom>
               <a:avLst/>
               <a:pathLst>
-                <a:path w="28468" h="0">
+                <a:path w="31631" h="0">
                   <a:moveTo>
                     <a:pt x="0" y="0"/>
                   </a:moveTo>
                   <a:lnTo>
-                    <a:pt x="28468" y="0"/>
+                    <a:pt x="31631" y="0"/>
                   </a:lnTo>
                 </a:path>
               </a:pathLst>
@@ -4324,18 +4324,18 @@
           </p:nvSpPr>
           <p:spPr>
             <a:xfrm>
-              <a:off x="1700240" y="2330708"/>
-              <a:ext cx="28468" cy="0"/>
+              <a:off x="1852824" y="2277998"/>
+              <a:ext cx="31631" cy="0"/>
             </a:xfrm>
             <a:custGeom>
               <a:avLst/>
               <a:pathLst>
-                <a:path w="28468" h="0">
+                <a:path w="31631" h="0">
                   <a:moveTo>
                     <a:pt x="0" y="0"/>
                   </a:moveTo>
                   <a:lnTo>
-                    <a:pt x="28468" y="0"/>
+                    <a:pt x="31631" y="0"/>
                   </a:lnTo>
                 </a:path>
               </a:pathLst>
@@ -4364,18 +4364,18 @@
           </p:nvSpPr>
           <p:spPr>
             <a:xfrm>
-              <a:off x="1700240" y="1991140"/>
-              <a:ext cx="28468" cy="0"/>
+              <a:off x="1852824" y="1960770"/>
+              <a:ext cx="31631" cy="0"/>
             </a:xfrm>
             <a:custGeom>
               <a:avLst/>
               <a:pathLst>
-                <a:path w="28468" h="0">
+                <a:path w="31631" h="0">
                   <a:moveTo>
                     <a:pt x="0" y="0"/>
                   </a:moveTo>
                   <a:lnTo>
-                    <a:pt x="28468" y="0"/>
+                    <a:pt x="31631" y="0"/>
                   </a:lnTo>
                 </a:path>
               </a:pathLst>
@@ -4404,18 +4404,18 @@
           </p:nvSpPr>
           <p:spPr>
             <a:xfrm>
-              <a:off x="1700240" y="1651573"/>
-              <a:ext cx="28468" cy="0"/>
+              <a:off x="1852824" y="1643542"/>
+              <a:ext cx="31631" cy="0"/>
             </a:xfrm>
             <a:custGeom>
               <a:avLst/>
               <a:pathLst>
-                <a:path w="28468" h="0">
+                <a:path w="31631" h="0">
                   <a:moveTo>
                     <a:pt x="0" y="0"/>
                   </a:moveTo>
                   <a:lnTo>
-                    <a:pt x="28468" y="0"/>
+                    <a:pt x="31631" y="0"/>
                   </a:lnTo>
                 </a:path>
               </a:pathLst>
@@ -4444,18 +4444,18 @@
           </p:nvSpPr>
           <p:spPr>
             <a:xfrm>
-              <a:off x="1700240" y="1312006"/>
-              <a:ext cx="28468" cy="0"/>
+              <a:off x="1852824" y="1326314"/>
+              <a:ext cx="31631" cy="0"/>
             </a:xfrm>
             <a:custGeom>
               <a:avLst/>
               <a:pathLst>
-                <a:path w="28468" h="0">
+                <a:path w="31631" h="0">
                   <a:moveTo>
                     <a:pt x="0" y="0"/>
                   </a:moveTo>
                   <a:lnTo>
-                    <a:pt x="28468" y="0"/>
+                    <a:pt x="31631" y="0"/>
                   </a:lnTo>
                 </a:path>
               </a:pathLst>
@@ -4484,18 +4484,18 @@
           </p:nvSpPr>
           <p:spPr>
             <a:xfrm>
-              <a:off x="1700240" y="972438"/>
-              <a:ext cx="28468" cy="0"/>
+              <a:off x="1852824" y="1009086"/>
+              <a:ext cx="31631" cy="0"/>
             </a:xfrm>
             <a:custGeom>
               <a:avLst/>
               <a:pathLst>
-                <a:path w="28468" h="0">
+                <a:path w="31631" h="0">
                   <a:moveTo>
                     <a:pt x="0" y="0"/>
                   </a:moveTo>
                   <a:lnTo>
-                    <a:pt x="28468" y="0"/>
+                    <a:pt x="31631" y="0"/>
                   </a:lnTo>
                 </a:path>
               </a:pathLst>
@@ -4524,18 +4524,18 @@
           </p:nvSpPr>
           <p:spPr>
             <a:xfrm>
-              <a:off x="1728709" y="3213583"/>
-              <a:ext cx="3947935" cy="0"/>
+              <a:off x="1884455" y="3102790"/>
+              <a:ext cx="3783456" cy="0"/>
             </a:xfrm>
             <a:custGeom>
               <a:avLst/>
               <a:pathLst>
-                <a:path w="3947935" h="0">
+                <a:path w="3783456" h="0">
                   <a:moveTo>
                     <a:pt x="0" y="0"/>
                   </a:moveTo>
                   <a:lnTo>
-                    <a:pt x="3947935" y="0"/>
+                    <a:pt x="3783456" y="0"/>
                   </a:lnTo>
                 </a:path>
               </a:pathLst>
@@ -4564,15 +4564,15 @@
           </p:nvSpPr>
           <p:spPr>
             <a:xfrm>
-              <a:off x="1883229" y="3213583"/>
-              <a:ext cx="0" cy="28468"/>
+              <a:off x="2032538" y="3102790"/>
+              <a:ext cx="0" cy="31631"/>
             </a:xfrm>
             <a:custGeom>
               <a:avLst/>
               <a:pathLst>
-                <a:path w="0" h="28468">
+                <a:path w="0" h="31631">
                   <a:moveTo>
-                    <a:pt x="0" y="28468"/>
+                    <a:pt x="0" y="31631"/>
                   </a:moveTo>
                   <a:lnTo>
                     <a:pt x="0" y="0"/>
@@ -4604,15 +4604,15 @@
           </p:nvSpPr>
           <p:spPr>
             <a:xfrm>
-              <a:off x="2406053" y="3213583"/>
-              <a:ext cx="0" cy="28468"/>
+              <a:off x="2533580" y="3102790"/>
+              <a:ext cx="0" cy="31631"/>
             </a:xfrm>
             <a:custGeom>
               <a:avLst/>
               <a:pathLst>
-                <a:path w="0" h="28468">
+                <a:path w="0" h="31631">
                   <a:moveTo>
-                    <a:pt x="0" y="28468"/>
+                    <a:pt x="0" y="31631"/>
                   </a:moveTo>
                   <a:lnTo>
                     <a:pt x="0" y="0"/>
@@ -4644,15 +4644,15 @@
           </p:nvSpPr>
           <p:spPr>
             <a:xfrm>
-              <a:off x="3279742" y="3213583"/>
-              <a:ext cx="0" cy="28468"/>
+              <a:off x="3370869" y="3102790"/>
+              <a:ext cx="0" cy="31631"/>
             </a:xfrm>
             <a:custGeom>
               <a:avLst/>
               <a:pathLst>
-                <a:path w="0" h="28468">
+                <a:path w="0" h="31631">
                   <a:moveTo>
-                    <a:pt x="0" y="28468"/>
+                    <a:pt x="0" y="31631"/>
                   </a:moveTo>
                   <a:lnTo>
                     <a:pt x="0" y="0"/>
@@ -4684,8 +4684,8 @@
           </p:nvSpPr>
           <p:spPr>
             <a:xfrm>
-              <a:off x="1819815" y="3264826"/>
-              <a:ext cx="126827" cy="65379"/>
+              <a:off x="1961900" y="3159727"/>
+              <a:ext cx="141274" cy="72786"/>
             </a:xfrm>
             <a:prstGeom prst="rect">
               <a:avLst/>
@@ -4705,7 +4705,7 @@
                 </a:spcAft>
               </a:pPr>
               <a:r>
-                <a:rPr sz="720" i="0" b="0">
+                <a:rPr sz="800" i="0" b="0">
                   <a:solidFill>
                     <a:srgbClr val="262626">
                       <a:alpha val="100000"/>
@@ -4727,8 +4727,8 @@
           </p:nvSpPr>
           <p:spPr>
             <a:xfrm>
-              <a:off x="2342639" y="3264826"/>
-              <a:ext cx="126827" cy="65379"/>
+              <a:off x="2462943" y="3159727"/>
+              <a:ext cx="141274" cy="72786"/>
             </a:xfrm>
             <a:prstGeom prst="rect">
               <a:avLst/>
@@ -4748,7 +4748,7 @@
                 </a:spcAft>
               </a:pPr>
               <a:r>
-                <a:rPr sz="720" i="0" b="0">
+                <a:rPr sz="800" i="0" b="0">
                   <a:solidFill>
                     <a:srgbClr val="262626">
                       <a:alpha val="100000"/>
@@ -4770,8 +4770,8 @@
           </p:nvSpPr>
           <p:spPr>
             <a:xfrm>
-              <a:off x="3216328" y="3264826"/>
-              <a:ext cx="126827" cy="65379"/>
+              <a:off x="3300232" y="3159727"/>
+              <a:ext cx="141274" cy="72786"/>
             </a:xfrm>
             <a:prstGeom prst="rect">
               <a:avLst/>
@@ -4791,7 +4791,7 @@
                 </a:spcAft>
               </a:pPr>
               <a:r>
-                <a:rPr sz="720" i="0" b="0">
+                <a:rPr sz="800" i="0" b="0">
                   <a:solidFill>
                     <a:srgbClr val="262626">
                       <a:alpha val="100000"/>
@@ -4813,8 +4813,8 @@
           </p:nvSpPr>
           <p:spPr>
             <a:xfrm>
-              <a:off x="2956480" y="3377785"/>
-              <a:ext cx="1492392" cy="81838"/>
+              <a:off x="2946457" y="3285541"/>
+              <a:ext cx="1659453" cy="90982"/>
             </a:xfrm>
             <a:prstGeom prst="rect">
               <a:avLst/>
@@ -4834,7 +4834,7 @@
                 </a:spcAft>
               </a:pPr>
               <a:r>
-                <a:rPr sz="900" i="0" b="0">
+                <a:rPr sz="1000" i="0" b="0">
                   <a:solidFill>
                     <a:srgbClr val="0D0D0D">
                       <a:alpha val="100000"/>
@@ -4856,8 +4856,8 @@
           </p:nvSpPr>
           <p:spPr>
             <a:xfrm>
-              <a:off x="1878099" y="3597454"/>
-              <a:ext cx="3649155" cy="227745"/>
+              <a:off x="1748321" y="3529750"/>
+              <a:ext cx="4055724" cy="240398"/>
             </a:xfrm>
             <a:prstGeom prst="rect">
               <a:avLst/>
@@ -4882,7 +4882,7 @@
           </p:nvSpPr>
           <p:spPr>
             <a:xfrm>
-              <a:off x="1935035" y="3654390"/>
+              <a:off x="1811584" y="3593013"/>
               <a:ext cx="113872" cy="113872"/>
             </a:xfrm>
             <a:prstGeom prst="rect">
@@ -4908,7 +4908,7 @@
           </p:nvSpPr>
           <p:spPr>
             <a:xfrm>
-              <a:off x="1946423" y="3711327"/>
+              <a:off x="1822971" y="3649949"/>
               <a:ext cx="91098" cy="0"/>
             </a:xfrm>
             <a:custGeom>
@@ -4948,8 +4948,8 @@
           </p:nvSpPr>
           <p:spPr>
             <a:xfrm>
-              <a:off x="1961189" y="3680544"/>
-              <a:ext cx="61566" cy="61566"/>
+              <a:off x="1837328" y="3618757"/>
+              <a:ext cx="62384" cy="62384"/>
             </a:xfrm>
             <a:prstGeom prst="ellipse">
               <a:avLst/>
@@ -4959,7 +4959,7 @@
                 <a:alpha val="100000"/>
               </a:srgbClr>
             </a:solidFill>
-            <a:ln w="7363" cap="rnd">
+            <a:ln w="8181" cap="rnd">
               <a:solidFill>
                 <a:srgbClr val="0072B2">
                   <a:alpha val="100000"/>
@@ -4983,7 +4983,7 @@
           </p:nvSpPr>
           <p:spPr>
             <a:xfrm>
-              <a:off x="3151248" y="3654390"/>
+              <a:off x="3163527" y="3593013"/>
               <a:ext cx="113872" cy="113872"/>
             </a:xfrm>
             <a:prstGeom prst="rect">
@@ -5009,7 +5009,7 @@
           </p:nvSpPr>
           <p:spPr>
             <a:xfrm>
-              <a:off x="3162635" y="3711327"/>
+              <a:off x="3174915" y="3649949"/>
               <a:ext cx="91098" cy="0"/>
             </a:xfrm>
             <a:custGeom>
@@ -5049,8 +5049,8 @@
           </p:nvSpPr>
           <p:spPr>
             <a:xfrm>
-              <a:off x="3177401" y="3680544"/>
-              <a:ext cx="61566" cy="61566"/>
+              <a:off x="3189272" y="3618757"/>
+              <a:ext cx="62384" cy="62384"/>
             </a:xfrm>
             <a:prstGeom prst="ellipse">
               <a:avLst/>
@@ -5060,7 +5060,7 @@
                 <a:alpha val="100000"/>
               </a:srgbClr>
             </a:solidFill>
-            <a:ln w="7363" cap="rnd">
+            <a:ln w="8181" cap="rnd">
               <a:solidFill>
                 <a:srgbClr val="009E73">
                   <a:alpha val="100000"/>
@@ -5084,7 +5084,7 @@
           </p:nvSpPr>
           <p:spPr>
             <a:xfrm>
-              <a:off x="4723527" y="3654390"/>
+              <a:off x="4915795" y="3593013"/>
               <a:ext cx="113872" cy="113872"/>
             </a:xfrm>
             <a:prstGeom prst="rect">
@@ -5110,7 +5110,7 @@
           </p:nvSpPr>
           <p:spPr>
             <a:xfrm>
-              <a:off x="4734915" y="3711327"/>
+              <a:off x="4927182" y="3649949"/>
               <a:ext cx="91098" cy="0"/>
             </a:xfrm>
             <a:custGeom>
@@ -5150,8 +5150,8 @@
           </p:nvSpPr>
           <p:spPr>
             <a:xfrm>
-              <a:off x="4749681" y="3680544"/>
-              <a:ext cx="61566" cy="61566"/>
+              <a:off x="4941539" y="3618757"/>
+              <a:ext cx="62384" cy="62384"/>
             </a:xfrm>
             <a:prstGeom prst="ellipse">
               <a:avLst/>
@@ -5161,7 +5161,7 @@
                 <a:alpha val="100000"/>
               </a:srgbClr>
             </a:solidFill>
-            <a:ln w="7363" cap="rnd">
+            <a:ln w="8181" cap="rnd">
               <a:solidFill>
                 <a:srgbClr val="E69F00">
                   <a:alpha val="100000"/>
@@ -5185,8 +5185,8 @@
           </p:nvSpPr>
           <p:spPr>
             <a:xfrm>
-              <a:off x="2105845" y="3674934"/>
-              <a:ext cx="988466" cy="72786"/>
+              <a:off x="1988720" y="3609030"/>
+              <a:ext cx="1111544" cy="81838"/>
             </a:xfrm>
             <a:prstGeom prst="rect">
               <a:avLst/>
@@ -5206,7 +5206,7 @@
                 </a:spcAft>
               </a:pPr>
               <a:r>
-                <a:rPr sz="800" i="0" b="0">
+                <a:rPr sz="900" i="0" b="0">
                   <a:solidFill>
                     <a:srgbClr val="000000">
                       <a:alpha val="100000"/>
@@ -5228,8 +5228,8 @@
           </p:nvSpPr>
           <p:spPr>
             <a:xfrm>
-              <a:off x="3322057" y="3674934"/>
-              <a:ext cx="1344533" cy="72786"/>
+              <a:off x="3340663" y="3609030"/>
+              <a:ext cx="1511868" cy="81838"/>
             </a:xfrm>
             <a:prstGeom prst="rect">
               <a:avLst/>
@@ -5249,7 +5249,7 @@
                 </a:spcAft>
               </a:pPr>
               <a:r>
-                <a:rPr sz="800" i="0" b="0">
+                <a:rPr sz="900" i="0" b="0">
                   <a:solidFill>
                     <a:srgbClr val="000000">
                       <a:alpha val="100000"/>
@@ -5271,8 +5271,8 @@
           </p:nvSpPr>
           <p:spPr>
             <a:xfrm>
-              <a:off x="4894337" y="3674934"/>
-              <a:ext cx="575980" cy="72786"/>
+              <a:off x="5092930" y="3609030"/>
+              <a:ext cx="647852" cy="81838"/>
             </a:xfrm>
             <a:prstGeom prst="rect">
               <a:avLst/>
@@ -5292,7 +5292,7 @@
                 </a:spcAft>
               </a:pPr>
               <a:r>
-                <a:rPr sz="800" i="0" b="0">
+                <a:rPr sz="900" i="0" b="0">
                   <a:solidFill>
                     <a:srgbClr val="000000">
                       <a:alpha val="100000"/>
@@ -5314,8 +5314,8 @@
           </p:nvSpPr>
           <p:spPr>
             <a:xfrm>
-              <a:off x="1728709" y="503004"/>
-              <a:ext cx="4126412" cy="74432"/>
+              <a:off x="1884455" y="521126"/>
+              <a:ext cx="4632076" cy="83576"/>
             </a:xfrm>
             <a:prstGeom prst="rect">
               <a:avLst/>
@@ -5335,7 +5335,7 @@
                 </a:spcAft>
               </a:pPr>
               <a:r>
-                <a:rPr sz="819" i="0" b="0">
+                <a:rPr sz="919" i="0" b="0">
                   <a:solidFill>
                     <a:srgbClr val="4D4D4D">
                       <a:alpha val="100000"/>
@@ -5357,8 +5357,8 @@
           </p:nvSpPr>
           <p:spPr>
             <a:xfrm>
-              <a:off x="1728709" y="615475"/>
-              <a:ext cx="3851452" cy="74432"/>
+              <a:off x="1884455" y="647313"/>
+              <a:ext cx="4324471" cy="83576"/>
             </a:xfrm>
             <a:prstGeom prst="rect">
               <a:avLst/>
@@ -5378,7 +5378,7 @@
                 </a:spcAft>
               </a:pPr>
               <a:r>
-                <a:rPr sz="819" i="0" b="0">
+                <a:rPr sz="919" i="0" b="0">
                   <a:solidFill>
                     <a:srgbClr val="4D4D4D">
                       <a:alpha val="100000"/>
@@ -5400,8 +5400,8 @@
           </p:nvSpPr>
           <p:spPr>
             <a:xfrm>
-              <a:off x="1728709" y="328384"/>
-              <a:ext cx="3007187" cy="90982"/>
+              <a:off x="1884455" y="328384"/>
+              <a:ext cx="3308116" cy="100035"/>
             </a:xfrm>
             <a:prstGeom prst="rect">
               <a:avLst/>
@@ -5421,7 +5421,7 @@
                 </a:spcAft>
               </a:pPr>
               <a:r>
-                <a:rPr sz="1000" i="0" b="1">
+                <a:rPr sz="1100" i="0" b="1">
                   <a:solidFill>
                     <a:srgbClr val="000000">
                       <a:alpha val="100000"/>
@@ -5443,8 +5443,8 @@
           </p:nvSpPr>
           <p:spPr>
             <a:xfrm>
-              <a:off x="337921" y="326246"/>
-              <a:ext cx="84764" cy="109179"/>
+              <a:off x="334357" y="320894"/>
+              <a:ext cx="91805" cy="118231"/>
             </a:xfrm>
             <a:prstGeom prst="rect">
               <a:avLst/>
@@ -5464,7 +5464,7 @@
                 </a:spcAft>
               </a:pPr>
               <a:r>
-                <a:rPr sz="1200" i="0" b="1">
+                <a:rPr sz="1300" i="0" b="1">
                   <a:solidFill>
                     <a:srgbClr val="000000">
                       <a:alpha val="100000"/>
@@ -5486,8 +5486,8 @@
           </p:nvSpPr>
           <p:spPr>
             <a:xfrm>
-              <a:off x="7402695" y="768698"/>
-              <a:ext cx="3947935" cy="2444885"/>
+              <a:off x="7567174" y="818749"/>
+              <a:ext cx="3783456" cy="2284040"/>
             </a:xfrm>
             <a:prstGeom prst="rect">
               <a:avLst/>
@@ -5512,15 +5512,15 @@
           </p:nvSpPr>
           <p:spPr>
             <a:xfrm>
-              <a:off x="9300620" y="768698"/>
-              <a:ext cx="0" cy="2444885"/>
+              <a:off x="9386028" y="818749"/>
+              <a:ext cx="0" cy="2284040"/>
             </a:xfrm>
             <a:custGeom>
               <a:avLst/>
               <a:pathLst>
-                <a:path w="0" h="2444885">
+                <a:path w="0" h="2284040">
                   <a:moveTo>
-                    <a:pt x="0" y="2444885"/>
+                    <a:pt x="0" y="2284040"/>
                   </a:moveTo>
                   <a:lnTo>
                     <a:pt x="0" y="0"/>
@@ -5555,18 +5555,18 @@
           </p:nvSpPr>
           <p:spPr>
             <a:xfrm>
-              <a:off x="10023225" y="918107"/>
-              <a:ext cx="1147953" cy="0"/>
+              <a:off x="10078528" y="958329"/>
+              <a:ext cx="1100127" cy="0"/>
             </a:xfrm>
             <a:custGeom>
               <a:avLst/>
               <a:pathLst>
-                <a:path w="1147953" h="0">
+                <a:path w="1100127" h="0">
                   <a:moveTo>
                     <a:pt x="0" y="0"/>
                   </a:moveTo>
                   <a:lnTo>
-                    <a:pt x="1147953" y="0"/>
+                    <a:pt x="1100127" y="0"/>
                   </a:lnTo>
                 </a:path>
               </a:pathLst>
@@ -5595,18 +5595,18 @@
           </p:nvSpPr>
           <p:spPr>
             <a:xfrm>
-              <a:off x="9228321" y="1288545"/>
-              <a:ext cx="1164297" cy="0"/>
+              <a:off x="9316740" y="1304396"/>
+              <a:ext cx="1115790" cy="0"/>
             </a:xfrm>
             <a:custGeom>
               <a:avLst/>
               <a:pathLst>
-                <a:path w="1164297" h="0">
+                <a:path w="1115790" h="0">
                   <a:moveTo>
                     <a:pt x="0" y="0"/>
                   </a:moveTo>
                   <a:lnTo>
-                    <a:pt x="1164297" y="0"/>
+                    <a:pt x="1115790" y="0"/>
                   </a:lnTo>
                 </a:path>
               </a:pathLst>
@@ -5635,18 +5635,18 @@
           </p:nvSpPr>
           <p:spPr>
             <a:xfrm>
-              <a:off x="8578265" y="2585075"/>
-              <a:ext cx="1293845" cy="0"/>
+              <a:off x="8693768" y="2515630"/>
+              <a:ext cx="1239941" cy="0"/>
             </a:xfrm>
             <a:custGeom>
               <a:avLst/>
               <a:pathLst>
-                <a:path w="1293845" h="0">
+                <a:path w="1239941" h="0">
                   <a:moveTo>
                     <a:pt x="0" y="0"/>
                   </a:moveTo>
                   <a:lnTo>
-                    <a:pt x="1293845" y="0"/>
+                    <a:pt x="1239941" y="0"/>
                   </a:lnTo>
                 </a:path>
               </a:pathLst>
@@ -5675,18 +5675,18 @@
           </p:nvSpPr>
           <p:spPr>
             <a:xfrm>
-              <a:off x="8338675" y="2399856"/>
-              <a:ext cx="1725930" cy="0"/>
+              <a:off x="8464160" y="2342597"/>
+              <a:ext cx="1654024" cy="0"/>
             </a:xfrm>
             <a:custGeom>
               <a:avLst/>
               <a:pathLst>
-                <a:path w="1725930" h="0">
+                <a:path w="1654024" h="0">
                   <a:moveTo>
                     <a:pt x="0" y="0"/>
                   </a:moveTo>
                   <a:lnTo>
-                    <a:pt x="1725930" y="0"/>
+                    <a:pt x="1654024" y="0"/>
                   </a:lnTo>
                 </a:path>
               </a:pathLst>
@@ -5715,18 +5715,18 @@
           </p:nvSpPr>
           <p:spPr>
             <a:xfrm>
-              <a:off x="7910123" y="2214638"/>
-              <a:ext cx="1811573" cy="0"/>
+              <a:off x="8053461" y="2169563"/>
+              <a:ext cx="1736099" cy="0"/>
             </a:xfrm>
             <a:custGeom>
               <a:avLst/>
               <a:pathLst>
-                <a:path w="1811573" h="0">
+                <a:path w="1736099" h="0">
                   <a:moveTo>
                     <a:pt x="0" y="0"/>
                   </a:moveTo>
                   <a:lnTo>
-                    <a:pt x="1811573" y="0"/>
+                    <a:pt x="1736099" y="0"/>
                   </a:lnTo>
                 </a:path>
               </a:pathLst>
@@ -5755,18 +5755,18 @@
           </p:nvSpPr>
           <p:spPr>
             <a:xfrm>
-              <a:off x="8312222" y="2029419"/>
-              <a:ext cx="2385469" cy="0"/>
+              <a:off x="8438809" y="1996530"/>
+              <a:ext cx="2286085" cy="0"/>
             </a:xfrm>
             <a:custGeom>
               <a:avLst/>
               <a:pathLst>
-                <a:path w="2385469" h="0">
+                <a:path w="2286085" h="0">
                   <a:moveTo>
                     <a:pt x="0" y="0"/>
                   </a:moveTo>
                   <a:lnTo>
-                    <a:pt x="2385469" y="0"/>
+                    <a:pt x="2286085" y="0"/>
                   </a:lnTo>
                 </a:path>
               </a:pathLst>
@@ -5795,18 +5795,18 @@
           </p:nvSpPr>
           <p:spPr>
             <a:xfrm>
-              <a:off x="7855275" y="2955512"/>
-              <a:ext cx="2170941" cy="0"/>
+              <a:off x="8000898" y="2861697"/>
+              <a:ext cx="2080495" cy="0"/>
             </a:xfrm>
             <a:custGeom>
               <a:avLst/>
               <a:pathLst>
-                <a:path w="2170941" h="0">
+                <a:path w="2080495" h="0">
                   <a:moveTo>
                     <a:pt x="0" y="0"/>
                   </a:moveTo>
                   <a:lnTo>
-                    <a:pt x="2170941" y="0"/>
+                    <a:pt x="2080495" y="0"/>
                   </a:lnTo>
                 </a:path>
               </a:pathLst>
@@ -5835,18 +5835,18 @@
           </p:nvSpPr>
           <p:spPr>
             <a:xfrm>
-              <a:off x="8083416" y="2770293"/>
-              <a:ext cx="2590469" cy="0"/>
+              <a:off x="8219535" y="2688664"/>
+              <a:ext cx="2482545" cy="0"/>
             </a:xfrm>
             <a:custGeom>
               <a:avLst/>
               <a:pathLst>
-                <a:path w="2590469" h="0">
+                <a:path w="2482545" h="0">
                   <a:moveTo>
                     <a:pt x="0" y="0"/>
                   </a:moveTo>
                   <a:lnTo>
-                    <a:pt x="2590469" y="0"/>
+                    <a:pt x="2482545" y="0"/>
                   </a:lnTo>
                 </a:path>
               </a:pathLst>
@@ -5875,18 +5875,18 @@
           </p:nvSpPr>
           <p:spPr>
             <a:xfrm>
-              <a:off x="8979564" y="1844200"/>
-              <a:ext cx="961192" cy="0"/>
+              <a:off x="9078348" y="1823496"/>
+              <a:ext cx="921147" cy="0"/>
             </a:xfrm>
             <a:custGeom>
               <a:avLst/>
               <a:pathLst>
-                <a:path w="961192" h="0">
+                <a:path w="921147" h="0">
                   <a:moveTo>
                     <a:pt x="0" y="0"/>
                   </a:moveTo>
                   <a:lnTo>
-                    <a:pt x="961192" y="0"/>
+                    <a:pt x="921147" y="0"/>
                   </a:lnTo>
                 </a:path>
               </a:pathLst>
@@ -5915,18 +5915,18 @@
           </p:nvSpPr>
           <p:spPr>
             <a:xfrm>
-              <a:off x="8379130" y="3140731"/>
-              <a:ext cx="1187490" cy="0"/>
+              <a:off x="8502929" y="3034730"/>
+              <a:ext cx="1138017" cy="0"/>
             </a:xfrm>
             <a:custGeom>
               <a:avLst/>
               <a:pathLst>
-                <a:path w="1187490" h="0">
+                <a:path w="1138017" h="0">
                   <a:moveTo>
                     <a:pt x="0" y="0"/>
                   </a:moveTo>
                   <a:lnTo>
-                    <a:pt x="1187490" y="0"/>
+                    <a:pt x="1138017" y="0"/>
                   </a:lnTo>
                 </a:path>
               </a:pathLst>
@@ -5955,18 +5955,18 @@
           </p:nvSpPr>
           <p:spPr>
             <a:xfrm>
-              <a:off x="8458935" y="1103326"/>
-              <a:ext cx="1790123" cy="0"/>
+              <a:off x="8579409" y="1131363"/>
+              <a:ext cx="1715543" cy="0"/>
             </a:xfrm>
             <a:custGeom>
               <a:avLst/>
               <a:pathLst>
-                <a:path w="1790123" h="0">
+                <a:path w="1715543" h="0">
                   <a:moveTo>
                     <a:pt x="0" y="0"/>
                   </a:moveTo>
                   <a:lnTo>
-                    <a:pt x="1790123" y="0"/>
+                    <a:pt x="1715543" y="0"/>
                   </a:lnTo>
                 </a:path>
               </a:pathLst>
@@ -5995,18 +5995,18 @@
           </p:nvSpPr>
           <p:spPr>
             <a:xfrm>
-              <a:off x="8825390" y="1473763"/>
-              <a:ext cx="1578709" cy="0"/>
+              <a:off x="8930596" y="1477430"/>
+              <a:ext cx="1512937" cy="0"/>
             </a:xfrm>
             <a:custGeom>
               <a:avLst/>
               <a:pathLst>
-                <a:path w="1578709" h="0">
+                <a:path w="1512937" h="0">
                   <a:moveTo>
                     <a:pt x="0" y="0"/>
                   </a:moveTo>
                   <a:lnTo>
-                    <a:pt x="1578709" y="0"/>
+                    <a:pt x="1512937" y="0"/>
                   </a:lnTo>
                 </a:path>
               </a:pathLst>
@@ -6035,18 +6035,18 @@
           </p:nvSpPr>
           <p:spPr>
             <a:xfrm>
-              <a:off x="8346212" y="1658982"/>
-              <a:ext cx="1941814" cy="0"/>
+              <a:off x="8471383" y="1650463"/>
+              <a:ext cx="1860914" cy="0"/>
             </a:xfrm>
             <a:custGeom>
               <a:avLst/>
               <a:pathLst>
-                <a:path w="1941814" h="0">
+                <a:path w="1860914" h="0">
                   <a:moveTo>
                     <a:pt x="0" y="0"/>
                   </a:moveTo>
                   <a:lnTo>
-                    <a:pt x="1941814" y="0"/>
+                    <a:pt x="1860914" y="0"/>
                   </a:lnTo>
                 </a:path>
               </a:pathLst>
@@ -6075,18 +6075,18 @@
           </p:nvSpPr>
           <p:spPr>
             <a:xfrm>
-              <a:off x="10039173" y="879829"/>
-              <a:ext cx="1127197" cy="0"/>
+              <a:off x="10093811" y="922569"/>
+              <a:ext cx="1080236" cy="0"/>
             </a:xfrm>
             <a:custGeom>
               <a:avLst/>
               <a:pathLst>
-                <a:path w="1127197" h="0">
+                <a:path w="1080236" h="0">
                   <a:moveTo>
                     <a:pt x="0" y="0"/>
                   </a:moveTo>
                   <a:lnTo>
-                    <a:pt x="1127197" y="0"/>
+                    <a:pt x="1080236" y="0"/>
                   </a:lnTo>
                 </a:path>
               </a:pathLst>
@@ -6115,18 +6115,18 @@
           </p:nvSpPr>
           <p:spPr>
             <a:xfrm>
-              <a:off x="9314444" y="1250266"/>
-              <a:ext cx="1120175" cy="0"/>
+              <a:off x="9399275" y="1268636"/>
+              <a:ext cx="1073506" cy="0"/>
             </a:xfrm>
             <a:custGeom>
               <a:avLst/>
               <a:pathLst>
-                <a:path w="1120175" h="0">
+                <a:path w="1073506" h="0">
                   <a:moveTo>
                     <a:pt x="0" y="0"/>
                   </a:moveTo>
                   <a:lnTo>
-                    <a:pt x="1120175" y="0"/>
+                    <a:pt x="1073506" y="0"/>
                   </a:lnTo>
                 </a:path>
               </a:pathLst>
@@ -6155,18 +6155,18 @@
           </p:nvSpPr>
           <p:spPr>
             <a:xfrm>
-              <a:off x="8715396" y="2546796"/>
-              <a:ext cx="1249210" cy="0"/>
+              <a:off x="8825186" y="2479870"/>
+              <a:ext cx="1197166" cy="0"/>
             </a:xfrm>
             <a:custGeom>
               <a:avLst/>
               <a:pathLst>
-                <a:path w="1249210" h="0">
+                <a:path w="1197166" h="0">
                   <a:moveTo>
                     <a:pt x="0" y="0"/>
                   </a:moveTo>
                   <a:lnTo>
-                    <a:pt x="1249210" y="0"/>
+                    <a:pt x="1197166" y="0"/>
                   </a:lnTo>
                 </a:path>
               </a:pathLst>
@@ -6195,18 +6195,18 @@
           </p:nvSpPr>
           <p:spPr>
             <a:xfrm>
-              <a:off x="8748383" y="2361578"/>
-              <a:ext cx="1852563" cy="0"/>
+              <a:off x="8856798" y="2306836"/>
+              <a:ext cx="1775382" cy="0"/>
             </a:xfrm>
             <a:custGeom>
               <a:avLst/>
               <a:pathLst>
-                <a:path w="1852563" h="0">
+                <a:path w="1775382" h="0">
                   <a:moveTo>
                     <a:pt x="0" y="0"/>
                   </a:moveTo>
                   <a:lnTo>
-                    <a:pt x="1852563" y="0"/>
+                    <a:pt x="1775382" y="0"/>
                   </a:lnTo>
                 </a:path>
               </a:pathLst>
@@ -6235,18 +6235,18 @@
           </p:nvSpPr>
           <p:spPr>
             <a:xfrm>
-              <a:off x="7989367" y="2176359"/>
-              <a:ext cx="1682014" cy="0"/>
+              <a:off x="8129404" y="2133803"/>
+              <a:ext cx="1611938" cy="0"/>
             </a:xfrm>
             <a:custGeom>
               <a:avLst/>
               <a:pathLst>
-                <a:path w="1682014" h="0">
+                <a:path w="1611938" h="0">
                   <a:moveTo>
                     <a:pt x="0" y="0"/>
                   </a:moveTo>
                   <a:lnTo>
-                    <a:pt x="1682014" y="0"/>
+                    <a:pt x="1611938" y="0"/>
                   </a:lnTo>
                 </a:path>
               </a:pathLst>
@@ -6275,18 +6275,18 @@
           </p:nvSpPr>
           <p:spPr>
             <a:xfrm>
-              <a:off x="7582146" y="1991140"/>
-              <a:ext cx="2757766" cy="0"/>
+              <a:off x="7739149" y="1960770"/>
+              <a:ext cx="2642872" cy="0"/>
             </a:xfrm>
             <a:custGeom>
               <a:avLst/>
               <a:pathLst>
-                <a:path w="2757766" h="0">
+                <a:path w="2642872" h="0">
                   <a:moveTo>
                     <a:pt x="0" y="0"/>
                   </a:moveTo>
                   <a:lnTo>
-                    <a:pt x="2757766" y="0"/>
+                    <a:pt x="2642872" y="0"/>
                   </a:lnTo>
                 </a:path>
               </a:pathLst>
@@ -6315,18 +6315,18 @@
           </p:nvSpPr>
           <p:spPr>
             <a:xfrm>
-              <a:off x="8029411" y="2917233"/>
-              <a:ext cx="2134428" cy="0"/>
+              <a:off x="8167780" y="2825937"/>
+              <a:ext cx="2045503" cy="0"/>
             </a:xfrm>
             <a:custGeom>
               <a:avLst/>
               <a:pathLst>
-                <a:path w="2134428" h="0">
+                <a:path w="2045503" h="0">
                   <a:moveTo>
                     <a:pt x="0" y="0"/>
                   </a:moveTo>
                   <a:lnTo>
-                    <a:pt x="2134428" y="0"/>
+                    <a:pt x="2045503" y="0"/>
                   </a:lnTo>
                 </a:path>
               </a:pathLst>
@@ -6355,18 +6355,18 @@
           </p:nvSpPr>
           <p:spPr>
             <a:xfrm>
-              <a:off x="8202073" y="2732015"/>
-              <a:ext cx="2898572" cy="0"/>
+              <a:off x="8333249" y="2652903"/>
+              <a:ext cx="2777811" cy="0"/>
             </a:xfrm>
             <a:custGeom>
               <a:avLst/>
               <a:pathLst>
-                <a:path w="2898572" h="0">
+                <a:path w="2777811" h="0">
                   <a:moveTo>
                     <a:pt x="0" y="0"/>
                   </a:moveTo>
                   <a:lnTo>
-                    <a:pt x="2898572" y="0"/>
+                    <a:pt x="2777811" y="0"/>
                   </a:lnTo>
                 </a:path>
               </a:pathLst>
@@ -6395,18 +6395,18 @@
           </p:nvSpPr>
           <p:spPr>
             <a:xfrm>
-              <a:off x="8998927" y="1805922"/>
-              <a:ext cx="937089" cy="0"/>
+              <a:off x="9096904" y="1787736"/>
+              <a:ext cx="898048" cy="0"/>
             </a:xfrm>
             <a:custGeom>
               <a:avLst/>
               <a:pathLst>
-                <a:path w="937089" h="0">
+                <a:path w="898048" h="0">
                   <a:moveTo>
                     <a:pt x="0" y="0"/>
                   </a:moveTo>
                   <a:lnTo>
-                    <a:pt x="937089" y="0"/>
+                    <a:pt x="898048" y="0"/>
                   </a:lnTo>
                 </a:path>
               </a:pathLst>
@@ -6435,18 +6435,18 @@
           </p:nvSpPr>
           <p:spPr>
             <a:xfrm>
-              <a:off x="8376088" y="3102452"/>
-              <a:ext cx="1170676" cy="0"/>
+              <a:off x="8500014" y="2998970"/>
+              <a:ext cx="1121904" cy="0"/>
             </a:xfrm>
             <a:custGeom>
               <a:avLst/>
               <a:pathLst>
-                <a:path w="1170676" h="0">
+                <a:path w="1121904" h="0">
                   <a:moveTo>
                     <a:pt x="0" y="0"/>
                   </a:moveTo>
                   <a:lnTo>
-                    <a:pt x="1170676" y="0"/>
+                    <a:pt x="1121904" y="0"/>
                   </a:lnTo>
                 </a:path>
               </a:pathLst>
@@ -6475,18 +6475,18 @@
           </p:nvSpPr>
           <p:spPr>
             <a:xfrm>
-              <a:off x="8522112" y="1065047"/>
-              <a:ext cx="1765060" cy="0"/>
+              <a:off x="8639954" y="1095603"/>
+              <a:ext cx="1691524" cy="0"/>
             </a:xfrm>
             <a:custGeom>
               <a:avLst/>
               <a:pathLst>
-                <a:path w="1765060" h="0">
+                <a:path w="1691524" h="0">
                   <a:moveTo>
                     <a:pt x="0" y="0"/>
                   </a:moveTo>
                   <a:lnTo>
-                    <a:pt x="1765060" y="0"/>
+                    <a:pt x="1691524" y="0"/>
                   </a:lnTo>
                 </a:path>
               </a:pathLst>
@@ -6515,18 +6515,18 @@
           </p:nvSpPr>
           <p:spPr>
             <a:xfrm>
-              <a:off x="8831872" y="1435485"/>
-              <a:ext cx="1575377" cy="0"/>
+              <a:off x="8936809" y="1441669"/>
+              <a:ext cx="1509743" cy="0"/>
             </a:xfrm>
             <a:custGeom>
               <a:avLst/>
               <a:pathLst>
-                <a:path w="1575377" h="0">
+                <a:path w="1509743" h="0">
                   <a:moveTo>
                     <a:pt x="0" y="0"/>
                   </a:moveTo>
                   <a:lnTo>
-                    <a:pt x="1575377" y="0"/>
+                    <a:pt x="1509743" y="0"/>
                   </a:lnTo>
                 </a:path>
               </a:pathLst>
@@ -6555,18 +6555,18 @@
           </p:nvSpPr>
           <p:spPr>
             <a:xfrm>
-              <a:off x="8333794" y="1620703"/>
-              <a:ext cx="1923810" cy="0"/>
+              <a:off x="8459481" y="1614703"/>
+              <a:ext cx="1843660" cy="0"/>
             </a:xfrm>
             <a:custGeom>
               <a:avLst/>
               <a:pathLst>
-                <a:path w="1923810" h="0">
+                <a:path w="1843660" h="0">
                   <a:moveTo>
                     <a:pt x="0" y="0"/>
                   </a:moveTo>
                   <a:lnTo>
-                    <a:pt x="1923810" y="0"/>
+                    <a:pt x="1843660" y="0"/>
                   </a:lnTo>
                 </a:path>
               </a:pathLst>
@@ -6595,18 +6595,18 @@
           </p:nvSpPr>
           <p:spPr>
             <a:xfrm>
-              <a:off x="9667806" y="841550"/>
-              <a:ext cx="1073801" cy="0"/>
+              <a:off x="9737916" y="886809"/>
+              <a:ext cx="1029065" cy="0"/>
             </a:xfrm>
             <a:custGeom>
               <a:avLst/>
               <a:pathLst>
-                <a:path w="1073801" h="0">
+                <a:path w="1029065" h="0">
                   <a:moveTo>
                     <a:pt x="0" y="0"/>
                   </a:moveTo>
                   <a:lnTo>
-                    <a:pt x="1073801" y="0"/>
+                    <a:pt x="1029065" y="0"/>
                   </a:lnTo>
                 </a:path>
               </a:pathLst>
@@ -6635,18 +6635,18 @@
           </p:nvSpPr>
           <p:spPr>
             <a:xfrm>
-              <a:off x="9079005" y="1211988"/>
-              <a:ext cx="1052101" cy="0"/>
+              <a:off x="9173646" y="1232876"/>
+              <a:ext cx="1008268" cy="0"/>
             </a:xfrm>
             <a:custGeom>
               <a:avLst/>
               <a:pathLst>
-                <a:path w="1052101" h="0">
+                <a:path w="1008268" h="0">
                   <a:moveTo>
                     <a:pt x="0" y="0"/>
                   </a:moveTo>
                   <a:lnTo>
-                    <a:pt x="1052101" y="0"/>
+                    <a:pt x="1008268" y="0"/>
                   </a:lnTo>
                 </a:path>
               </a:pathLst>
@@ -6675,18 +6675,18 @@
           </p:nvSpPr>
           <p:spPr>
             <a:xfrm>
-              <a:off x="8320905" y="2508518"/>
-              <a:ext cx="1207786" cy="0"/>
+              <a:off x="8447130" y="2444110"/>
+              <a:ext cx="1157467" cy="0"/>
             </a:xfrm>
             <a:custGeom>
               <a:avLst/>
               <a:pathLst>
-                <a:path w="1207786" h="0">
+                <a:path w="1157467" h="0">
                   <a:moveTo>
                     <a:pt x="0" y="0"/>
                   </a:moveTo>
                   <a:lnTo>
-                    <a:pt x="1207786" y="0"/>
+                    <a:pt x="1157467" y="0"/>
                   </a:lnTo>
                 </a:path>
               </a:pathLst>
@@ -6715,18 +6715,18 @@
           </p:nvSpPr>
           <p:spPr>
             <a:xfrm>
-              <a:off x="8272369" y="2323299"/>
-              <a:ext cx="1445968" cy="0"/>
+              <a:off x="8400615" y="2271076"/>
+              <a:ext cx="1385726" cy="0"/>
             </a:xfrm>
             <a:custGeom>
               <a:avLst/>
               <a:pathLst>
-                <a:path w="1445968" h="0">
+                <a:path w="1385726" h="0">
                   <a:moveTo>
                     <a:pt x="0" y="0"/>
                   </a:moveTo>
                   <a:lnTo>
-                    <a:pt x="1445968" y="0"/>
+                    <a:pt x="1385726" y="0"/>
                   </a:lnTo>
                 </a:path>
               </a:pathLst>
@@ -6755,18 +6755,18 @@
           </p:nvSpPr>
           <p:spPr>
             <a:xfrm>
-              <a:off x="8217890" y="2138081"/>
-              <a:ext cx="1611995" cy="0"/>
+              <a:off x="8348406" y="2098043"/>
+              <a:ext cx="1544836" cy="0"/>
             </a:xfrm>
             <a:custGeom>
               <a:avLst/>
               <a:pathLst>
-                <a:path w="1611995" h="0">
+                <a:path w="1544836" h="0">
                   <a:moveTo>
                     <a:pt x="0" y="0"/>
                   </a:moveTo>
                   <a:lnTo>
-                    <a:pt x="1611995" y="0"/>
+                    <a:pt x="1544836" y="0"/>
                   </a:lnTo>
                 </a:path>
               </a:pathLst>
@@ -6795,18 +6795,18 @@
           </p:nvSpPr>
           <p:spPr>
             <a:xfrm>
-              <a:off x="8239582" y="1952862"/>
-              <a:ext cx="1988820" cy="0"/>
+              <a:off x="8369195" y="1925009"/>
+              <a:ext cx="1905962" cy="0"/>
             </a:xfrm>
             <a:custGeom>
               <a:avLst/>
               <a:pathLst>
-                <a:path w="1988820" h="0">
+                <a:path w="1905962" h="0">
                   <a:moveTo>
                     <a:pt x="0" y="0"/>
                   </a:moveTo>
                   <a:lnTo>
-                    <a:pt x="1988820" y="0"/>
+                    <a:pt x="1905962" y="0"/>
                   </a:lnTo>
                 </a:path>
               </a:pathLst>
@@ -6835,18 +6835,18 @@
           </p:nvSpPr>
           <p:spPr>
             <a:xfrm>
-              <a:off x="7866051" y="2878955"/>
-              <a:ext cx="1944199" cy="0"/>
+              <a:off x="8011226" y="2790176"/>
+              <a:ext cx="1863199" cy="0"/>
             </a:xfrm>
             <a:custGeom>
               <a:avLst/>
               <a:pathLst>
-                <a:path w="1944199" h="0">
+                <a:path w="1863199" h="0">
                   <a:moveTo>
                     <a:pt x="0" y="0"/>
                   </a:moveTo>
                   <a:lnTo>
-                    <a:pt x="1944199" y="0"/>
+                    <a:pt x="1863199" y="0"/>
                   </a:lnTo>
                 </a:path>
               </a:pathLst>
@@ -6875,18 +6875,18 @@
           </p:nvSpPr>
           <p:spPr>
             <a:xfrm>
-              <a:off x="7618627" y="2693736"/>
-              <a:ext cx="2465586" cy="0"/>
+              <a:off x="7774110" y="2617143"/>
+              <a:ext cx="2362864" cy="0"/>
             </a:xfrm>
             <a:custGeom>
               <a:avLst/>
               <a:pathLst>
-                <a:path w="2465586" h="0">
+                <a:path w="2362864" h="0">
                   <a:moveTo>
                     <a:pt x="0" y="0"/>
                   </a:moveTo>
                   <a:lnTo>
-                    <a:pt x="2465586" y="0"/>
+                    <a:pt x="2362864" y="0"/>
                   </a:lnTo>
                 </a:path>
               </a:pathLst>
@@ -6915,18 +6915,18 @@
           </p:nvSpPr>
           <p:spPr>
             <a:xfrm>
-              <a:off x="8837275" y="1767643"/>
-              <a:ext cx="898175" cy="0"/>
+              <a:off x="8941986" y="1751976"/>
+              <a:ext cx="860755" cy="0"/>
             </a:xfrm>
             <a:custGeom>
               <a:avLst/>
               <a:pathLst>
-                <a:path w="898175" h="0">
+                <a:path w="860755" h="0">
                   <a:moveTo>
                     <a:pt x="0" y="0"/>
                   </a:moveTo>
                   <a:lnTo>
-                    <a:pt x="898175" y="0"/>
+                    <a:pt x="860755" y="0"/>
                   </a:lnTo>
                 </a:path>
               </a:pathLst>
@@ -6955,18 +6955,18 @@
           </p:nvSpPr>
           <p:spPr>
             <a:xfrm>
-              <a:off x="7870502" y="3064174"/>
-              <a:ext cx="1113467" cy="0"/>
+              <a:off x="8015492" y="2963210"/>
+              <a:ext cx="1067078" cy="0"/>
             </a:xfrm>
             <a:custGeom>
               <a:avLst/>
               <a:pathLst>
-                <a:path w="1113467" h="0">
+                <a:path w="1067078" h="0">
                   <a:moveTo>
                     <a:pt x="0" y="0"/>
                   </a:moveTo>
                   <a:lnTo>
-                    <a:pt x="1113467" y="0"/>
+                    <a:pt x="1067078" y="0"/>
                   </a:lnTo>
                 </a:path>
               </a:pathLst>
@@ -6995,18 +6995,18 @@
           </p:nvSpPr>
           <p:spPr>
             <a:xfrm>
-              <a:off x="8802644" y="1026769"/>
-              <a:ext cx="1620838" cy="0"/>
+              <a:off x="8908798" y="1059842"/>
+              <a:ext cx="1553311" cy="0"/>
             </a:xfrm>
             <a:custGeom>
               <a:avLst/>
               <a:pathLst>
-                <a:path w="1620838" h="0">
+                <a:path w="1553311" h="0">
                   <a:moveTo>
                     <a:pt x="0" y="0"/>
                   </a:moveTo>
                   <a:lnTo>
-                    <a:pt x="1620838" y="0"/>
+                    <a:pt x="1553311" y="0"/>
                   </a:lnTo>
                 </a:path>
               </a:pathLst>
@@ -7035,18 +7035,18 @@
           </p:nvSpPr>
           <p:spPr>
             <a:xfrm>
-              <a:off x="8714618" y="1397206"/>
-              <a:ext cx="1536120" cy="0"/>
+              <a:off x="8824440" y="1405909"/>
+              <a:ext cx="1472122" cy="0"/>
             </a:xfrm>
             <a:custGeom>
               <a:avLst/>
               <a:pathLst>
-                <a:path w="1536120" h="0">
+                <a:path w="1472122" h="0">
                   <a:moveTo>
                     <a:pt x="0" y="0"/>
                   </a:moveTo>
                   <a:lnTo>
-                    <a:pt x="1536120" y="0"/>
+                    <a:pt x="1472122" y="0"/>
                   </a:lnTo>
                 </a:path>
               </a:pathLst>
@@ -7075,18 +7075,18 @@
           </p:nvSpPr>
           <p:spPr>
             <a:xfrm>
-              <a:off x="8416346" y="1582425"/>
-              <a:ext cx="1817006" cy="0"/>
+              <a:off x="8538594" y="1578943"/>
+              <a:ext cx="1741306" cy="0"/>
             </a:xfrm>
             <a:custGeom>
               <a:avLst/>
               <a:pathLst>
-                <a:path w="1817006" h="0">
+                <a:path w="1741306" h="0">
                   <a:moveTo>
                     <a:pt x="0" y="0"/>
                   </a:moveTo>
                   <a:lnTo>
-                    <a:pt x="1817006" y="0"/>
+                    <a:pt x="1741306" y="0"/>
                   </a:lnTo>
                 </a:path>
               </a:pathLst>
@@ -7115,8 +7115,8 @@
           </p:nvSpPr>
           <p:spPr>
             <a:xfrm>
-              <a:off x="10566419" y="887324"/>
-              <a:ext cx="61566" cy="61566"/>
+              <a:off x="10597399" y="927137"/>
+              <a:ext cx="62384" cy="62384"/>
             </a:xfrm>
             <a:prstGeom prst="ellipse">
               <a:avLst/>
@@ -7141,13 +7141,13 @@
           </p:nvSpPr>
           <p:spPr>
             <a:xfrm>
-              <a:off x="9779686" y="1257761"/>
-              <a:ext cx="61566" cy="61566"/>
+              <a:off x="9843444" y="1273204"/>
+              <a:ext cx="62384" cy="62384"/>
             </a:xfrm>
             <a:prstGeom prst="ellipse">
               <a:avLst/>
             </a:prstGeom>
-            <a:ln w="7363" cap="rnd">
+            <a:ln w="8181" cap="rnd">
               <a:solidFill>
                 <a:srgbClr val="0072B2">
                   <a:alpha val="100000"/>
@@ -7171,13 +7171,13 @@
           </p:nvSpPr>
           <p:spPr>
             <a:xfrm>
-              <a:off x="9194405" y="2554292"/>
-              <a:ext cx="61566" cy="61566"/>
+              <a:off x="9282546" y="2484438"/>
+              <a:ext cx="62384" cy="62384"/>
             </a:xfrm>
             <a:prstGeom prst="ellipse">
               <a:avLst/>
             </a:prstGeom>
-            <a:ln w="7363" cap="rnd">
+            <a:ln w="8181" cap="rnd">
               <a:solidFill>
                 <a:srgbClr val="0072B2">
                   <a:alpha val="100000"/>
@@ -7201,13 +7201,13 @@
           </p:nvSpPr>
           <p:spPr>
             <a:xfrm>
-              <a:off x="9170858" y="2369073"/>
-              <a:ext cx="61566" cy="61566"/>
+              <a:off x="9259980" y="2311405"/>
+              <a:ext cx="62384" cy="62384"/>
             </a:xfrm>
             <a:prstGeom prst="ellipse">
               <a:avLst/>
             </a:prstGeom>
-            <a:ln w="7363" cap="rnd">
+            <a:ln w="8181" cap="rnd">
               <a:solidFill>
                 <a:srgbClr val="0072B2">
                   <a:alpha val="100000"/>
@@ -7231,13 +7231,13 @@
           </p:nvSpPr>
           <p:spPr>
             <a:xfrm>
-              <a:off x="8785126" y="2183854"/>
-              <a:ext cx="61566" cy="61566"/>
+              <a:off x="8890319" y="2138371"/>
+              <a:ext cx="62384" cy="62384"/>
             </a:xfrm>
             <a:prstGeom prst="ellipse">
               <a:avLst/>
             </a:prstGeom>
-            <a:ln w="7363" cap="rnd">
+            <a:ln w="8181" cap="rnd">
               <a:solidFill>
                 <a:srgbClr val="0072B2">
                   <a:alpha val="100000"/>
@@ -7261,13 +7261,13 @@
           </p:nvSpPr>
           <p:spPr>
             <a:xfrm>
-              <a:off x="9474174" y="1998636"/>
-              <a:ext cx="61566" cy="61566"/>
+              <a:off x="9550659" y="1965338"/>
+              <a:ext cx="62384" cy="62384"/>
             </a:xfrm>
             <a:prstGeom prst="ellipse">
               <a:avLst/>
             </a:prstGeom>
-            <a:ln w="7363" cap="rnd">
+            <a:ln w="8181" cap="rnd">
               <a:solidFill>
                 <a:srgbClr val="0072B2">
                   <a:alpha val="100000"/>
@@ -7291,13 +7291,13 @@
           </p:nvSpPr>
           <p:spPr>
             <a:xfrm>
-              <a:off x="8909962" y="2924729"/>
-              <a:ext cx="61566" cy="61566"/>
+              <a:off x="9009954" y="2830505"/>
+              <a:ext cx="62384" cy="62384"/>
             </a:xfrm>
             <a:prstGeom prst="ellipse">
               <a:avLst/>
             </a:prstGeom>
-            <a:ln w="7363" cap="rnd">
+            <a:ln w="8181" cap="rnd">
               <a:solidFill>
                 <a:srgbClr val="0072B2">
                   <a:alpha val="100000"/>
@@ -7321,13 +7321,13 @@
           </p:nvSpPr>
           <p:spPr>
             <a:xfrm>
-              <a:off x="9347867" y="2739510"/>
-              <a:ext cx="61566" cy="61566"/>
+              <a:off x="9429615" y="2657471"/>
+              <a:ext cx="62384" cy="62384"/>
             </a:xfrm>
             <a:prstGeom prst="ellipse">
               <a:avLst/>
             </a:prstGeom>
-            <a:ln w="7363" cap="rnd">
+            <a:ln w="8181" cap="rnd">
               <a:solidFill>
                 <a:srgbClr val="0072B2">
                   <a:alpha val="100000"/>
@@ -7351,13 +7351,13 @@
           </p:nvSpPr>
           <p:spPr>
             <a:xfrm>
-              <a:off x="9429378" y="1813417"/>
-              <a:ext cx="61566" cy="61566"/>
+              <a:off x="9507730" y="1792304"/>
+              <a:ext cx="62384" cy="62384"/>
             </a:xfrm>
             <a:prstGeom prst="ellipse">
               <a:avLst/>
             </a:prstGeom>
-            <a:ln w="7363" cap="rnd">
+            <a:ln w="8181" cap="rnd">
               <a:solidFill>
                 <a:srgbClr val="0072B2">
                   <a:alpha val="100000"/>
@@ -7381,13 +7381,13 @@
           </p:nvSpPr>
           <p:spPr>
             <a:xfrm>
-              <a:off x="8942092" y="3109948"/>
-              <a:ext cx="61566" cy="61566"/>
+              <a:off x="9040745" y="3003538"/>
+              <a:ext cx="62384" cy="62384"/>
             </a:xfrm>
             <a:prstGeom prst="ellipse">
               <a:avLst/>
             </a:prstGeom>
-            <a:ln w="7363" cap="rnd">
+            <a:ln w="8181" cap="rnd">
               <a:solidFill>
                 <a:srgbClr val="0072B2">
                   <a:alpha val="100000"/>
@@ -7411,13 +7411,13 @@
           </p:nvSpPr>
           <p:spPr>
             <a:xfrm>
-              <a:off x="9323214" y="1072543"/>
-              <a:ext cx="61566" cy="61566"/>
+              <a:off x="9405989" y="1100171"/>
+              <a:ext cx="62384" cy="62384"/>
             </a:xfrm>
             <a:prstGeom prst="ellipse">
               <a:avLst/>
             </a:prstGeom>
-            <a:ln w="7363" cap="rnd">
+            <a:ln w="8181" cap="rnd">
               <a:solidFill>
                 <a:srgbClr val="0072B2">
                   <a:alpha val="100000"/>
@@ -7441,13 +7441,13 @@
           </p:nvSpPr>
           <p:spPr>
             <a:xfrm>
-              <a:off x="9583961" y="1442980"/>
-              <a:ext cx="61566" cy="61566"/>
+              <a:off x="9655873" y="1446237"/>
+              <a:ext cx="62384" cy="62384"/>
             </a:xfrm>
             <a:prstGeom prst="ellipse">
               <a:avLst/>
             </a:prstGeom>
-            <a:ln w="7363" cap="rnd">
+            <a:ln w="8181" cap="rnd">
               <a:solidFill>
                 <a:srgbClr val="0072B2">
                   <a:alpha val="100000"/>
@@ -7471,13 +7471,13 @@
           </p:nvSpPr>
           <p:spPr>
             <a:xfrm>
-              <a:off x="9286337" y="1628199"/>
-              <a:ext cx="61566" cy="61566"/>
+              <a:off x="9370648" y="1619271"/>
+              <a:ext cx="62384" cy="62384"/>
             </a:xfrm>
             <a:prstGeom prst="ellipse">
               <a:avLst/>
             </a:prstGeom>
-            <a:ln w="7363" cap="rnd">
+            <a:ln w="8181" cap="rnd">
               <a:solidFill>
                 <a:srgbClr val="0072B2">
                   <a:alpha val="100000"/>
@@ -7501,8 +7501,8 @@
           </p:nvSpPr>
           <p:spPr>
             <a:xfrm>
-              <a:off x="10571988" y="849046"/>
-              <a:ext cx="61566" cy="61566"/>
+              <a:off x="10602737" y="891377"/>
+              <a:ext cx="62384" cy="62384"/>
             </a:xfrm>
             <a:prstGeom prst="ellipse">
               <a:avLst/>
@@ -7527,8 +7527,8 @@
           </p:nvSpPr>
           <p:spPr>
             <a:xfrm>
-              <a:off x="9843748" y="1181204"/>
-              <a:ext cx="61566" cy="61566"/>
+              <a:off x="9904837" y="1201684"/>
+              <a:ext cx="62384" cy="62384"/>
             </a:xfrm>
             <a:prstGeom prst="ellipse">
               <a:avLst/>
@@ -7553,13 +7553,13 @@
           </p:nvSpPr>
           <p:spPr>
             <a:xfrm>
-              <a:off x="9309219" y="2516013"/>
-              <a:ext cx="61566" cy="61566"/>
+              <a:off x="9392577" y="2448678"/>
+              <a:ext cx="62384" cy="62384"/>
             </a:xfrm>
             <a:prstGeom prst="ellipse">
               <a:avLst/>
             </a:prstGeom>
-            <a:ln w="7363" cap="rnd">
+            <a:ln w="8181" cap="rnd">
               <a:solidFill>
                 <a:srgbClr val="009E73">
                   <a:alpha val="100000"/>
@@ -7583,13 +7583,13 @@
           </p:nvSpPr>
           <p:spPr>
             <a:xfrm>
-              <a:off x="9643881" y="2330795"/>
-              <a:ext cx="61566" cy="61566"/>
+              <a:off x="9713296" y="2275644"/>
+              <a:ext cx="62384" cy="62384"/>
             </a:xfrm>
             <a:prstGeom prst="ellipse">
               <a:avLst/>
             </a:prstGeom>
-            <a:ln w="7363" cap="rnd">
+            <a:ln w="8181" cap="rnd">
               <a:solidFill>
                 <a:srgbClr val="009E73">
                   <a:alpha val="100000"/>
@@ -7613,13 +7613,13 @@
           </p:nvSpPr>
           <p:spPr>
             <a:xfrm>
-              <a:off x="8799591" y="2145576"/>
-              <a:ext cx="61566" cy="61566"/>
+              <a:off x="8904181" y="2102611"/>
+              <a:ext cx="62384" cy="62384"/>
             </a:xfrm>
             <a:prstGeom prst="ellipse">
               <a:avLst/>
             </a:prstGeom>
-            <a:ln w="7363" cap="rnd">
+            <a:ln w="8181" cap="rnd">
               <a:solidFill>
                 <a:srgbClr val="009E73">
                   <a:alpha val="100000"/>
@@ -7643,13 +7643,13 @@
           </p:nvSpPr>
           <p:spPr>
             <a:xfrm>
-              <a:off x="8930247" y="1960357"/>
-              <a:ext cx="61566" cy="61566"/>
+              <a:off x="9029393" y="1929577"/>
+              <a:ext cx="62384" cy="62384"/>
             </a:xfrm>
             <a:prstGeom prst="ellipse">
               <a:avLst/>
             </a:prstGeom>
-            <a:ln w="7363" cap="rnd">
+            <a:ln w="8181" cap="rnd">
               <a:solidFill>
                 <a:srgbClr val="009E73">
                   <a:alpha val="100000"/>
@@ -7673,13 +7673,13 @@
           </p:nvSpPr>
           <p:spPr>
             <a:xfrm>
-              <a:off x="9065842" y="2886450"/>
-              <a:ext cx="61566" cy="61566"/>
+              <a:off x="9159340" y="2794745"/>
+              <a:ext cx="62384" cy="62384"/>
             </a:xfrm>
             <a:prstGeom prst="ellipse">
               <a:avLst/>
             </a:prstGeom>
-            <a:ln w="7363" cap="rnd">
+            <a:ln w="8181" cap="rnd">
               <a:solidFill>
                 <a:srgbClr val="009E73">
                   <a:alpha val="100000"/>
@@ -7703,13 +7703,13 @@
           </p:nvSpPr>
           <p:spPr>
             <a:xfrm>
-              <a:off x="9620576" y="2701232"/>
-              <a:ext cx="61566" cy="61566"/>
+              <a:off x="9690962" y="2621711"/>
+              <a:ext cx="62384" cy="62384"/>
             </a:xfrm>
             <a:prstGeom prst="ellipse">
               <a:avLst/>
             </a:prstGeom>
-            <a:ln w="7363" cap="rnd">
+            <a:ln w="8181" cap="rnd">
               <a:solidFill>
                 <a:srgbClr val="009E73">
                   <a:alpha val="100000"/>
@@ -7733,13 +7733,13 @@
           </p:nvSpPr>
           <p:spPr>
             <a:xfrm>
-              <a:off x="9436688" y="1775139"/>
-              <a:ext cx="61566" cy="61566"/>
+              <a:off x="9514736" y="1756544"/>
+              <a:ext cx="62384" cy="62384"/>
             </a:xfrm>
             <a:prstGeom prst="ellipse">
               <a:avLst/>
             </a:prstGeom>
-            <a:ln w="7363" cap="rnd">
+            <a:ln w="8181" cap="rnd">
               <a:solidFill>
                 <a:srgbClr val="009E73">
                   <a:alpha val="100000"/>
@@ -7763,13 +7763,13 @@
           </p:nvSpPr>
           <p:spPr>
             <a:xfrm>
-              <a:off x="8930643" y="3071669"/>
-              <a:ext cx="61566" cy="61566"/>
+              <a:off x="9029774" y="2967778"/>
+              <a:ext cx="62384" cy="62384"/>
             </a:xfrm>
             <a:prstGeom prst="ellipse">
               <a:avLst/>
             </a:prstGeom>
-            <a:ln w="7363" cap="rnd">
+            <a:ln w="8181" cap="rnd">
               <a:solidFill>
                 <a:srgbClr val="009E73">
                   <a:alpha val="100000"/>
@@ -7793,13 +7793,13 @@
           </p:nvSpPr>
           <p:spPr>
             <a:xfrm>
-              <a:off x="9373859" y="1034264"/>
-              <a:ext cx="61566" cy="61566"/>
+              <a:off x="9454524" y="1064410"/>
+              <a:ext cx="62384" cy="62384"/>
             </a:xfrm>
             <a:prstGeom prst="ellipse">
               <a:avLst/>
             </a:prstGeom>
-            <a:ln w="7363" cap="rnd">
+            <a:ln w="8181" cap="rnd">
               <a:solidFill>
                 <a:srgbClr val="009E73">
                   <a:alpha val="100000"/>
@@ -7823,13 +7823,13 @@
           </p:nvSpPr>
           <p:spPr>
             <a:xfrm>
-              <a:off x="9588778" y="1404702"/>
-              <a:ext cx="61566" cy="61566"/>
+              <a:off x="9660488" y="1410477"/>
+              <a:ext cx="62384" cy="62384"/>
             </a:xfrm>
             <a:prstGeom prst="ellipse">
               <a:avLst/>
             </a:prstGeom>
-            <a:ln w="7363" cap="rnd">
+            <a:ln w="8181" cap="rnd">
               <a:solidFill>
                 <a:srgbClr val="009E73">
                   <a:alpha val="100000"/>
@@ -7853,13 +7853,13 @@
           </p:nvSpPr>
           <p:spPr>
             <a:xfrm>
-              <a:off x="9264916" y="1589920"/>
-              <a:ext cx="61566" cy="61566"/>
+              <a:off x="9350119" y="1583511"/>
+              <a:ext cx="62384" cy="62384"/>
             </a:xfrm>
             <a:prstGeom prst="ellipse">
               <a:avLst/>
             </a:prstGeom>
-            <a:ln w="7363" cap="rnd">
+            <a:ln w="8181" cap="rnd">
               <a:solidFill>
                 <a:srgbClr val="009E73">
                   <a:alpha val="100000"/>
@@ -7883,8 +7883,8 @@
           </p:nvSpPr>
           <p:spPr>
             <a:xfrm>
-              <a:off x="10173924" y="810767"/>
-              <a:ext cx="61566" cy="61566"/>
+              <a:off x="10221256" y="855617"/>
+              <a:ext cx="62384" cy="62384"/>
             </a:xfrm>
             <a:prstGeom prst="ellipse">
               <a:avLst/>
@@ -7909,13 +7909,13 @@
           </p:nvSpPr>
           <p:spPr>
             <a:xfrm>
-              <a:off x="9574272" y="1219483"/>
-              <a:ext cx="61566" cy="61566"/>
+              <a:off x="9646588" y="1237444"/>
+              <a:ext cx="62384" cy="62384"/>
             </a:xfrm>
             <a:prstGeom prst="ellipse">
               <a:avLst/>
             </a:prstGeom>
-            <a:ln w="7363" cap="rnd">
+            <a:ln w="8181" cap="rnd">
               <a:solidFill>
                 <a:srgbClr val="E69F00">
                   <a:alpha val="100000"/>
@@ -7939,13 +7939,13 @@
           </p:nvSpPr>
           <p:spPr>
             <a:xfrm>
-              <a:off x="8894015" y="2477735"/>
-              <a:ext cx="61566" cy="61566"/>
+              <a:off x="8994671" y="2412917"/>
+              <a:ext cx="62384" cy="62384"/>
             </a:xfrm>
             <a:prstGeom prst="ellipse">
               <a:avLst/>
             </a:prstGeom>
-            <a:ln w="7363" cap="rnd">
+            <a:ln w="8181" cap="rnd">
               <a:solidFill>
                 <a:srgbClr val="E69F00">
                   <a:alpha val="100000"/>
@@ -7969,13 +7969,13 @@
           </p:nvSpPr>
           <p:spPr>
             <a:xfrm>
-              <a:off x="8964570" y="2292516"/>
-              <a:ext cx="61566" cy="61566"/>
+              <a:off x="9062286" y="2239884"/>
+              <a:ext cx="62384" cy="62384"/>
             </a:xfrm>
             <a:prstGeom prst="ellipse">
               <a:avLst/>
             </a:prstGeom>
-            <a:ln w="7363" cap="rnd">
+            <a:ln w="8181" cap="rnd">
               <a:solidFill>
                 <a:srgbClr val="E69F00">
                   <a:alpha val="100000"/>
@@ -7999,13 +7999,13 @@
           </p:nvSpPr>
           <p:spPr>
             <a:xfrm>
-              <a:off x="8993104" y="2107297"/>
-              <a:ext cx="61566" cy="61566"/>
+              <a:off x="9089632" y="2066851"/>
+              <a:ext cx="62384" cy="62384"/>
             </a:xfrm>
             <a:prstGeom prst="ellipse">
               <a:avLst/>
             </a:prstGeom>
-            <a:ln w="7363" cap="rnd">
+            <a:ln w="8181" cap="rnd">
               <a:solidFill>
                 <a:srgbClr val="E69F00">
                   <a:alpha val="100000"/>
@@ -8029,13 +8029,13 @@
           </p:nvSpPr>
           <p:spPr>
             <a:xfrm>
-              <a:off x="9203209" y="1922079"/>
-              <a:ext cx="61566" cy="61566"/>
+              <a:off x="9290983" y="1893817"/>
+              <a:ext cx="62384" cy="62384"/>
             </a:xfrm>
             <a:prstGeom prst="ellipse">
               <a:avLst/>
             </a:prstGeom>
-            <a:ln w="7363" cap="rnd">
+            <a:ln w="8181" cap="rnd">
               <a:solidFill>
                 <a:srgbClr val="E69F00">
                   <a:alpha val="100000"/>
@@ -8059,13 +8059,13 @@
           </p:nvSpPr>
           <p:spPr>
             <a:xfrm>
-              <a:off x="8807367" y="2848172"/>
-              <a:ext cx="61566" cy="61566"/>
+              <a:off x="8911633" y="2758984"/>
+              <a:ext cx="62384" cy="62384"/>
             </a:xfrm>
             <a:prstGeom prst="ellipse">
               <a:avLst/>
             </a:prstGeom>
-            <a:ln w="7363" cap="rnd">
+            <a:ln w="8181" cap="rnd">
               <a:solidFill>
                 <a:srgbClr val="E69F00">
                   <a:alpha val="100000"/>
@@ -8089,13 +8089,13 @@
           </p:nvSpPr>
           <p:spPr>
             <a:xfrm>
-              <a:off x="8820637" y="2662953"/>
-              <a:ext cx="61566" cy="61566"/>
+              <a:off x="8924350" y="2585951"/>
+              <a:ext cx="62384" cy="62384"/>
             </a:xfrm>
             <a:prstGeom prst="ellipse">
               <a:avLst/>
             </a:prstGeom>
-            <a:ln w="7363" cap="rnd">
+            <a:ln w="8181" cap="rnd">
               <a:solidFill>
                 <a:srgbClr val="E69F00">
                   <a:alpha val="100000"/>
@@ -8119,13 +8119,13 @@
           </p:nvSpPr>
           <p:spPr>
             <a:xfrm>
-              <a:off x="9255579" y="1736860"/>
-              <a:ext cx="61566" cy="61566"/>
+              <a:off x="9341172" y="1720784"/>
+              <a:ext cx="62384" cy="62384"/>
             </a:xfrm>
             <a:prstGeom prst="ellipse">
               <a:avLst/>
             </a:prstGeom>
-            <a:ln w="7363" cap="rnd">
+            <a:ln w="8181" cap="rnd">
               <a:solidFill>
                 <a:srgbClr val="E69F00">
                   <a:alpha val="100000"/>
@@ -8149,8 +8149,8 @@
           </p:nvSpPr>
           <p:spPr>
             <a:xfrm>
-              <a:off x="8396453" y="3033391"/>
-              <a:ext cx="61566" cy="61566"/>
+              <a:off x="8517838" y="2932018"/>
+              <a:ext cx="62384" cy="62384"/>
             </a:xfrm>
             <a:prstGeom prst="ellipse">
               <a:avLst/>
@@ -8175,13 +8175,13 @@
           </p:nvSpPr>
           <p:spPr>
             <a:xfrm>
-              <a:off x="9582280" y="995986"/>
-              <a:ext cx="61566" cy="61566"/>
+              <a:off x="9654262" y="1028650"/>
+              <a:ext cx="62384" cy="62384"/>
             </a:xfrm>
             <a:prstGeom prst="ellipse">
               <a:avLst/>
             </a:prstGeom>
-            <a:ln w="7363" cap="rnd">
+            <a:ln w="8181" cap="rnd">
               <a:solidFill>
                 <a:srgbClr val="E69F00">
                   <a:alpha val="100000"/>
@@ -8205,13 +8205,13 @@
           </p:nvSpPr>
           <p:spPr>
             <a:xfrm>
-              <a:off x="9451895" y="1366423"/>
-              <a:ext cx="61566" cy="61566"/>
+              <a:off x="9529308" y="1374717"/>
+              <a:ext cx="62384" cy="62384"/>
             </a:xfrm>
             <a:prstGeom prst="ellipse">
               <a:avLst/>
             </a:prstGeom>
-            <a:ln w="7363" cap="rnd">
+            <a:ln w="8181" cap="rnd">
               <a:solidFill>
                 <a:srgbClr val="E69F00">
                   <a:alpha val="100000"/>
@@ -8235,13 +8235,13 @@
           </p:nvSpPr>
           <p:spPr>
             <a:xfrm>
-              <a:off x="9294066" y="1551642"/>
-              <a:ext cx="61566" cy="61566"/>
+              <a:off x="9378055" y="1547750"/>
+              <a:ext cx="62384" cy="62384"/>
             </a:xfrm>
             <a:prstGeom prst="ellipse">
               <a:avLst/>
             </a:prstGeom>
-            <a:ln w="7363" cap="rnd">
+            <a:ln w="8181" cap="rnd">
               <a:solidFill>
                 <a:srgbClr val="E69F00">
                   <a:alpha val="100000"/>
@@ -8265,15 +8265,15 @@
           </p:nvSpPr>
           <p:spPr>
             <a:xfrm>
-              <a:off x="7402695" y="768698"/>
-              <a:ext cx="0" cy="2444885"/>
+              <a:off x="7567174" y="818749"/>
+              <a:ext cx="0" cy="2284040"/>
             </a:xfrm>
             <a:custGeom>
               <a:avLst/>
               <a:pathLst>
-                <a:path w="0" h="2444885">
+                <a:path w="0" h="2284040">
                   <a:moveTo>
-                    <a:pt x="0" y="2444885"/>
+                    <a:pt x="0" y="2284040"/>
                   </a:moveTo>
                   <a:lnTo>
                     <a:pt x="0" y="0"/>
@@ -8305,8 +8305,8 @@
           </p:nvSpPr>
           <p:spPr>
             <a:xfrm>
-              <a:off x="6473994" y="3069762"/>
-              <a:ext cx="877458" cy="65379"/>
+              <a:off x="6532927" y="2962577"/>
+              <a:ext cx="977310" cy="72786"/>
             </a:xfrm>
             <a:prstGeom prst="rect">
               <a:avLst/>
@@ -8326,7 +8326,7 @@
                 </a:spcAft>
               </a:pPr>
               <a:r>
-                <a:rPr sz="720" i="0" b="0">
+                <a:rPr sz="800" i="0" b="0">
                   <a:solidFill>
                     <a:srgbClr val="262626">
                       <a:alpha val="100000"/>
@@ -8348,8 +8348,8 @@
           </p:nvSpPr>
           <p:spPr>
             <a:xfrm>
-              <a:off x="5879085" y="2884544"/>
-              <a:ext cx="1472366" cy="65379"/>
+              <a:off x="5870352" y="2789544"/>
+              <a:ext cx="1639884" cy="72786"/>
             </a:xfrm>
             <a:prstGeom prst="rect">
               <a:avLst/>
@@ -8369,7 +8369,7 @@
                 </a:spcAft>
               </a:pPr>
               <a:r>
-                <a:rPr sz="720" i="0" b="0">
+                <a:rPr sz="800" i="0" b="0">
                   <a:solidFill>
                     <a:srgbClr val="262626">
                       <a:alpha val="100000"/>
@@ -8391,8 +8391,8 @@
           </p:nvSpPr>
           <p:spPr>
             <a:xfrm>
-              <a:off x="6360791" y="2699325"/>
-              <a:ext cx="990660" cy="65379"/>
+              <a:off x="6406922" y="2616510"/>
+              <a:ext cx="1103315" cy="72786"/>
             </a:xfrm>
             <a:prstGeom prst="rect">
               <a:avLst/>
@@ -8412,7 +8412,7 @@
                 </a:spcAft>
               </a:pPr>
               <a:r>
-                <a:rPr sz="720" i="0" b="0">
+                <a:rPr sz="800" i="0" b="0">
                   <a:solidFill>
                     <a:srgbClr val="262626">
                       <a:alpha val="100000"/>
@@ -8434,8 +8434,8 @@
           </p:nvSpPr>
           <p:spPr>
             <a:xfrm>
-              <a:off x="6360882" y="2514106"/>
-              <a:ext cx="990569" cy="65379"/>
+              <a:off x="6407014" y="2443477"/>
+              <a:ext cx="1103223" cy="72786"/>
             </a:xfrm>
             <a:prstGeom prst="rect">
               <a:avLst/>
@@ -8455,7 +8455,7 @@
                 </a:spcAft>
               </a:pPr>
               <a:r>
-                <a:rPr sz="720" i="0" b="0">
+                <a:rPr sz="800" i="0" b="0">
                   <a:solidFill>
                     <a:srgbClr val="262626">
                       <a:alpha val="100000"/>
@@ -8477,8 +8477,8 @@
           </p:nvSpPr>
           <p:spPr>
             <a:xfrm>
-              <a:off x="6091866" y="2328888"/>
-              <a:ext cx="1259586" cy="65379"/>
+              <a:off x="6107273" y="2270443"/>
+              <a:ext cx="1402963" cy="72786"/>
             </a:xfrm>
             <a:prstGeom prst="rect">
               <a:avLst/>
@@ -8498,7 +8498,7 @@
                 </a:spcAft>
               </a:pPr>
               <a:r>
-                <a:rPr sz="720" i="0" b="0">
+                <a:rPr sz="800" i="0" b="0">
                   <a:solidFill>
                     <a:srgbClr val="262626">
                       <a:alpha val="100000"/>
@@ -8520,8 +8520,8 @@
           </p:nvSpPr>
           <p:spPr>
             <a:xfrm>
-              <a:off x="6355762" y="2143669"/>
-              <a:ext cx="995690" cy="65379"/>
+              <a:off x="6401253" y="2097410"/>
+              <a:ext cx="1108984" cy="72786"/>
             </a:xfrm>
             <a:prstGeom prst="rect">
               <a:avLst/>
@@ -8541,7 +8541,7 @@
                 </a:spcAft>
               </a:pPr>
               <a:r>
-                <a:rPr sz="720" i="0" b="0">
+                <a:rPr sz="800" i="0" b="0">
                   <a:solidFill>
                     <a:srgbClr val="262626">
                       <a:alpha val="100000"/>
@@ -8563,8 +8563,8 @@
           </p:nvSpPr>
           <p:spPr>
             <a:xfrm>
-              <a:off x="5934680" y="1958451"/>
-              <a:ext cx="1416771" cy="65379"/>
+              <a:off x="5932257" y="1924377"/>
+              <a:ext cx="1577980" cy="72786"/>
             </a:xfrm>
             <a:prstGeom prst="rect">
               <a:avLst/>
@@ -8584,7 +8584,7 @@
                 </a:spcAft>
               </a:pPr>
               <a:r>
-                <a:rPr sz="720" i="0" b="0">
+                <a:rPr sz="800" i="0" b="0">
                   <a:solidFill>
                     <a:srgbClr val="262626">
                       <a:alpha val="100000"/>
@@ -8606,8 +8606,8 @@
           </p:nvSpPr>
           <p:spPr>
             <a:xfrm>
-              <a:off x="6255909" y="1773232"/>
-              <a:ext cx="1095542" cy="65379"/>
+              <a:off x="6290153" y="1751343"/>
+              <a:ext cx="1220083" cy="72786"/>
             </a:xfrm>
             <a:prstGeom prst="rect">
               <a:avLst/>
@@ -8627,7 +8627,7 @@
                 </a:spcAft>
               </a:pPr>
               <a:r>
-                <a:rPr sz="720" i="0" b="0">
+                <a:rPr sz="800" i="0" b="0">
                   <a:solidFill>
                     <a:srgbClr val="262626">
                       <a:alpha val="100000"/>
@@ -8649,8 +8649,8 @@
           </p:nvSpPr>
           <p:spPr>
             <a:xfrm>
-              <a:off x="6514684" y="1588013"/>
-              <a:ext cx="836767" cy="65379"/>
+              <a:off x="6578555" y="1578310"/>
+              <a:ext cx="931682" cy="72786"/>
             </a:xfrm>
             <a:prstGeom prst="rect">
               <a:avLst/>
@@ -8670,7 +8670,7 @@
                 </a:spcAft>
               </a:pPr>
               <a:r>
-                <a:rPr sz="720" i="0" b="0">
+                <a:rPr sz="800" i="0" b="0">
                   <a:solidFill>
                     <a:srgbClr val="262626">
                       <a:alpha val="100000"/>
@@ -8692,8 +8692,8 @@
           </p:nvSpPr>
           <p:spPr>
             <a:xfrm>
-              <a:off x="6343874" y="1402795"/>
-              <a:ext cx="1007577" cy="65379"/>
+              <a:off x="6388086" y="1405276"/>
+              <a:ext cx="1122151" cy="72786"/>
             </a:xfrm>
             <a:prstGeom prst="rect">
               <a:avLst/>
@@ -8713,7 +8713,7 @@
                 </a:spcAft>
               </a:pPr>
               <a:r>
-                <a:rPr sz="720" i="0" b="0">
+                <a:rPr sz="800" i="0" b="0">
                   <a:solidFill>
                     <a:srgbClr val="262626">
                       <a:alpha val="100000"/>
@@ -8735,8 +8735,8 @@
           </p:nvSpPr>
           <p:spPr>
             <a:xfrm>
-              <a:off x="6545317" y="1217576"/>
-              <a:ext cx="806135" cy="65379"/>
+              <a:off x="6612388" y="1232243"/>
+              <a:ext cx="897849" cy="72786"/>
             </a:xfrm>
             <a:prstGeom prst="rect">
               <a:avLst/>
@@ -8756,7 +8756,7 @@
                 </a:spcAft>
               </a:pPr>
               <a:r>
-                <a:rPr sz="720" i="0" b="0">
+                <a:rPr sz="800" i="0" b="0">
                   <a:solidFill>
                     <a:srgbClr val="262626">
                       <a:alpha val="100000"/>
@@ -8778,8 +8778,8 @@
           </p:nvSpPr>
           <p:spPr>
             <a:xfrm>
-              <a:off x="6120761" y="1032358"/>
-              <a:ext cx="1230690" cy="65379"/>
+              <a:off x="6139643" y="1059209"/>
+              <a:ext cx="1370594" cy="72786"/>
             </a:xfrm>
             <a:prstGeom prst="rect">
               <a:avLst/>
@@ -8799,7 +8799,7 @@
                 </a:spcAft>
               </a:pPr>
               <a:r>
-                <a:rPr sz="720" i="0" b="0">
+                <a:rPr sz="800" i="0" b="0">
                   <a:solidFill>
                     <a:srgbClr val="262626">
                       <a:alpha val="100000"/>
@@ -8821,8 +8821,8 @@
           </p:nvSpPr>
           <p:spPr>
             <a:xfrm>
-              <a:off x="6337291" y="847139"/>
-              <a:ext cx="1014161" cy="65379"/>
+              <a:off x="6380770" y="886176"/>
+              <a:ext cx="1129466" cy="72786"/>
             </a:xfrm>
             <a:prstGeom prst="rect">
               <a:avLst/>
@@ -8842,7 +8842,7 @@
                 </a:spcAft>
               </a:pPr>
               <a:r>
-                <a:rPr sz="720" i="0" b="0">
+                <a:rPr sz="800" i="0" b="0">
                   <a:solidFill>
                     <a:srgbClr val="262626">
                       <a:alpha val="100000"/>
@@ -8864,18 +8864,18 @@
           </p:nvSpPr>
           <p:spPr>
             <a:xfrm>
-              <a:off x="7374226" y="3102452"/>
-              <a:ext cx="28468" cy="0"/>
+              <a:off x="7535542" y="2998970"/>
+              <a:ext cx="31631" cy="0"/>
             </a:xfrm>
             <a:custGeom>
               <a:avLst/>
               <a:pathLst>
-                <a:path w="28468" h="0">
+                <a:path w="31631" h="0">
                   <a:moveTo>
                     <a:pt x="0" y="0"/>
                   </a:moveTo>
                   <a:lnTo>
-                    <a:pt x="28468" y="0"/>
+                    <a:pt x="31631" y="0"/>
                   </a:lnTo>
                 </a:path>
               </a:pathLst>
@@ -8904,18 +8904,18 @@
           </p:nvSpPr>
           <p:spPr>
             <a:xfrm>
-              <a:off x="7374226" y="2917233"/>
-              <a:ext cx="28468" cy="0"/>
+              <a:off x="7535542" y="2825937"/>
+              <a:ext cx="31631" cy="0"/>
             </a:xfrm>
             <a:custGeom>
               <a:avLst/>
               <a:pathLst>
-                <a:path w="28468" h="0">
+                <a:path w="31631" h="0">
                   <a:moveTo>
                     <a:pt x="0" y="0"/>
                   </a:moveTo>
                   <a:lnTo>
-                    <a:pt x="28468" y="0"/>
+                    <a:pt x="31631" y="0"/>
                   </a:lnTo>
                 </a:path>
               </a:pathLst>
@@ -8944,18 +8944,18 @@
           </p:nvSpPr>
           <p:spPr>
             <a:xfrm>
-              <a:off x="7374226" y="2732015"/>
-              <a:ext cx="28468" cy="0"/>
+              <a:off x="7535542" y="2652903"/>
+              <a:ext cx="31631" cy="0"/>
             </a:xfrm>
             <a:custGeom>
               <a:avLst/>
               <a:pathLst>
-                <a:path w="28468" h="0">
+                <a:path w="31631" h="0">
                   <a:moveTo>
                     <a:pt x="0" y="0"/>
                   </a:moveTo>
                   <a:lnTo>
-                    <a:pt x="28468" y="0"/>
+                    <a:pt x="31631" y="0"/>
                   </a:lnTo>
                 </a:path>
               </a:pathLst>
@@ -8984,18 +8984,18 @@
           </p:nvSpPr>
           <p:spPr>
             <a:xfrm>
-              <a:off x="7374226" y="2546796"/>
-              <a:ext cx="28468" cy="0"/>
+              <a:off x="7535542" y="2479870"/>
+              <a:ext cx="31631" cy="0"/>
             </a:xfrm>
             <a:custGeom>
               <a:avLst/>
               <a:pathLst>
-                <a:path w="28468" h="0">
+                <a:path w="31631" h="0">
                   <a:moveTo>
                     <a:pt x="0" y="0"/>
                   </a:moveTo>
                   <a:lnTo>
-                    <a:pt x="28468" y="0"/>
+                    <a:pt x="31631" y="0"/>
                   </a:lnTo>
                 </a:path>
               </a:pathLst>
@@ -9024,18 +9024,18 @@
           </p:nvSpPr>
           <p:spPr>
             <a:xfrm>
-              <a:off x="7374226" y="2361578"/>
-              <a:ext cx="28468" cy="0"/>
+              <a:off x="7535542" y="2306836"/>
+              <a:ext cx="31631" cy="0"/>
             </a:xfrm>
             <a:custGeom>
               <a:avLst/>
               <a:pathLst>
-                <a:path w="28468" h="0">
+                <a:path w="31631" h="0">
                   <a:moveTo>
                     <a:pt x="0" y="0"/>
                   </a:moveTo>
                   <a:lnTo>
-                    <a:pt x="28468" y="0"/>
+                    <a:pt x="31631" y="0"/>
                   </a:lnTo>
                 </a:path>
               </a:pathLst>
@@ -9064,18 +9064,18 @@
           </p:nvSpPr>
           <p:spPr>
             <a:xfrm>
-              <a:off x="7374226" y="2176359"/>
-              <a:ext cx="28468" cy="0"/>
+              <a:off x="7535542" y="2133803"/>
+              <a:ext cx="31631" cy="0"/>
             </a:xfrm>
             <a:custGeom>
               <a:avLst/>
               <a:pathLst>
-                <a:path w="28468" h="0">
+                <a:path w="31631" h="0">
                   <a:moveTo>
                     <a:pt x="0" y="0"/>
                   </a:moveTo>
                   <a:lnTo>
-                    <a:pt x="28468" y="0"/>
+                    <a:pt x="31631" y="0"/>
                   </a:lnTo>
                 </a:path>
               </a:pathLst>
@@ -9104,18 +9104,18 @@
           </p:nvSpPr>
           <p:spPr>
             <a:xfrm>
-              <a:off x="7374226" y="1991140"/>
-              <a:ext cx="28468" cy="0"/>
+              <a:off x="7535542" y="1960770"/>
+              <a:ext cx="31631" cy="0"/>
             </a:xfrm>
             <a:custGeom>
               <a:avLst/>
               <a:pathLst>
-                <a:path w="28468" h="0">
+                <a:path w="31631" h="0">
                   <a:moveTo>
                     <a:pt x="0" y="0"/>
                   </a:moveTo>
                   <a:lnTo>
-                    <a:pt x="28468" y="0"/>
+                    <a:pt x="31631" y="0"/>
                   </a:lnTo>
                 </a:path>
               </a:pathLst>
@@ -9144,18 +9144,18 @@
           </p:nvSpPr>
           <p:spPr>
             <a:xfrm>
-              <a:off x="7374226" y="1805922"/>
-              <a:ext cx="28468" cy="0"/>
+              <a:off x="7535542" y="1787736"/>
+              <a:ext cx="31631" cy="0"/>
             </a:xfrm>
             <a:custGeom>
               <a:avLst/>
               <a:pathLst>
-                <a:path w="28468" h="0">
+                <a:path w="31631" h="0">
                   <a:moveTo>
                     <a:pt x="0" y="0"/>
                   </a:moveTo>
                   <a:lnTo>
-                    <a:pt x="28468" y="0"/>
+                    <a:pt x="31631" y="0"/>
                   </a:lnTo>
                 </a:path>
               </a:pathLst>
@@ -9184,18 +9184,18 @@
           </p:nvSpPr>
           <p:spPr>
             <a:xfrm>
-              <a:off x="7374226" y="1620703"/>
-              <a:ext cx="28468" cy="0"/>
+              <a:off x="7535542" y="1614703"/>
+              <a:ext cx="31631" cy="0"/>
             </a:xfrm>
             <a:custGeom>
               <a:avLst/>
               <a:pathLst>
-                <a:path w="28468" h="0">
+                <a:path w="31631" h="0">
                   <a:moveTo>
                     <a:pt x="0" y="0"/>
                   </a:moveTo>
                   <a:lnTo>
-                    <a:pt x="28468" y="0"/>
+                    <a:pt x="31631" y="0"/>
                   </a:lnTo>
                 </a:path>
               </a:pathLst>
@@ -9224,18 +9224,18 @@
           </p:nvSpPr>
           <p:spPr>
             <a:xfrm>
-              <a:off x="7374226" y="1435485"/>
-              <a:ext cx="28468" cy="0"/>
+              <a:off x="7535542" y="1441669"/>
+              <a:ext cx="31631" cy="0"/>
             </a:xfrm>
             <a:custGeom>
               <a:avLst/>
               <a:pathLst>
-                <a:path w="28468" h="0">
+                <a:path w="31631" h="0">
                   <a:moveTo>
                     <a:pt x="0" y="0"/>
                   </a:moveTo>
                   <a:lnTo>
-                    <a:pt x="28468" y="0"/>
+                    <a:pt x="31631" y="0"/>
                   </a:lnTo>
                 </a:path>
               </a:pathLst>
@@ -9264,18 +9264,18 @@
           </p:nvSpPr>
           <p:spPr>
             <a:xfrm>
-              <a:off x="7374226" y="1250266"/>
-              <a:ext cx="28468" cy="0"/>
+              <a:off x="7535542" y="1268636"/>
+              <a:ext cx="31631" cy="0"/>
             </a:xfrm>
             <a:custGeom>
               <a:avLst/>
               <a:pathLst>
-                <a:path w="28468" h="0">
+                <a:path w="31631" h="0">
                   <a:moveTo>
                     <a:pt x="0" y="0"/>
                   </a:moveTo>
                   <a:lnTo>
-                    <a:pt x="28468" y="0"/>
+                    <a:pt x="31631" y="0"/>
                   </a:lnTo>
                 </a:path>
               </a:pathLst>
@@ -9304,18 +9304,18 @@
           </p:nvSpPr>
           <p:spPr>
             <a:xfrm>
-              <a:off x="7374226" y="1065047"/>
-              <a:ext cx="28468" cy="0"/>
+              <a:off x="7535542" y="1095603"/>
+              <a:ext cx="31631" cy="0"/>
             </a:xfrm>
             <a:custGeom>
               <a:avLst/>
               <a:pathLst>
-                <a:path w="28468" h="0">
+                <a:path w="31631" h="0">
                   <a:moveTo>
                     <a:pt x="0" y="0"/>
                   </a:moveTo>
                   <a:lnTo>
-                    <a:pt x="28468" y="0"/>
+                    <a:pt x="31631" y="0"/>
                   </a:lnTo>
                 </a:path>
               </a:pathLst>
@@ -9344,18 +9344,18 @@
           </p:nvSpPr>
           <p:spPr>
             <a:xfrm>
-              <a:off x="7374226" y="879829"/>
-              <a:ext cx="28468" cy="0"/>
+              <a:off x="7535542" y="922569"/>
+              <a:ext cx="31631" cy="0"/>
             </a:xfrm>
             <a:custGeom>
               <a:avLst/>
               <a:pathLst>
-                <a:path w="28468" h="0">
+                <a:path w="31631" h="0">
                   <a:moveTo>
                     <a:pt x="0" y="0"/>
                   </a:moveTo>
                   <a:lnTo>
-                    <a:pt x="28468" y="0"/>
+                    <a:pt x="31631" y="0"/>
                   </a:lnTo>
                 </a:path>
               </a:pathLst>
@@ -9384,18 +9384,18 @@
           </p:nvSpPr>
           <p:spPr>
             <a:xfrm>
-              <a:off x="7402695" y="3213583"/>
-              <a:ext cx="3947935" cy="0"/>
+              <a:off x="7567174" y="3102790"/>
+              <a:ext cx="3783456" cy="0"/>
             </a:xfrm>
             <a:custGeom>
               <a:avLst/>
               <a:pathLst>
-                <a:path w="3947935" h="0">
+                <a:path w="3783456" h="0">
                   <a:moveTo>
                     <a:pt x="0" y="0"/>
                   </a:moveTo>
                   <a:lnTo>
-                    <a:pt x="3947935" y="0"/>
+                    <a:pt x="3783456" y="0"/>
                   </a:lnTo>
                 </a:path>
               </a:pathLst>
@@ -9424,15 +9424,15 @@
           </p:nvSpPr>
           <p:spPr>
             <a:xfrm>
-              <a:off x="7588752" y="3213583"/>
-              <a:ext cx="0" cy="28468"/>
+              <a:off x="7745480" y="3102790"/>
+              <a:ext cx="0" cy="31631"/>
             </a:xfrm>
             <a:custGeom>
               <a:avLst/>
               <a:pathLst>
-                <a:path w="0" h="28468">
+                <a:path w="0" h="31631">
                   <a:moveTo>
-                    <a:pt x="0" y="28468"/>
+                    <a:pt x="0" y="31631"/>
                   </a:moveTo>
                   <a:lnTo>
                     <a:pt x="0" y="0"/>
@@ -9464,15 +9464,15 @@
           </p:nvSpPr>
           <p:spPr>
             <a:xfrm>
-              <a:off x="9300620" y="3213583"/>
-              <a:ext cx="0" cy="28468"/>
+              <a:off x="9386028" y="3102790"/>
+              <a:ext cx="0" cy="31631"/>
             </a:xfrm>
             <a:custGeom>
               <a:avLst/>
               <a:pathLst>
-                <a:path w="0" h="28468">
+                <a:path w="0" h="31631">
                   <a:moveTo>
-                    <a:pt x="0" y="28468"/>
+                    <a:pt x="0" y="31631"/>
                   </a:moveTo>
                   <a:lnTo>
                     <a:pt x="0" y="0"/>
@@ -9504,15 +9504,15 @@
           </p:nvSpPr>
           <p:spPr>
             <a:xfrm>
-              <a:off x="10862681" y="3213583"/>
-              <a:ext cx="0" cy="28468"/>
+              <a:off x="10883010" y="3102790"/>
+              <a:ext cx="0" cy="31631"/>
             </a:xfrm>
             <a:custGeom>
               <a:avLst/>
               <a:pathLst>
-                <a:path w="0" h="28468">
+                <a:path w="0" h="31631">
                   <a:moveTo>
-                    <a:pt x="0" y="28468"/>
+                    <a:pt x="0" y="31631"/>
                   </a:moveTo>
                   <a:lnTo>
                     <a:pt x="0" y="0"/>
@@ -9544,8 +9544,8 @@
           </p:nvSpPr>
           <p:spPr>
             <a:xfrm>
-              <a:off x="7525339" y="3264826"/>
-              <a:ext cx="126827" cy="65379"/>
+              <a:off x="7674843" y="3159727"/>
+              <a:ext cx="141274" cy="72786"/>
             </a:xfrm>
             <a:prstGeom prst="rect">
               <a:avLst/>
@@ -9565,7 +9565,7 @@
                 </a:spcAft>
               </a:pPr>
               <a:r>
-                <a:rPr sz="720" i="0" b="0">
+                <a:rPr sz="800" i="0" b="0">
                   <a:solidFill>
                     <a:srgbClr val="262626">
                       <a:alpha val="100000"/>
@@ -9587,8 +9587,8 @@
           </p:nvSpPr>
           <p:spPr>
             <a:xfrm>
-              <a:off x="9237207" y="3264826"/>
-              <a:ext cx="126827" cy="65379"/>
+              <a:off x="9315391" y="3159727"/>
+              <a:ext cx="141274" cy="72786"/>
             </a:xfrm>
             <a:prstGeom prst="rect">
               <a:avLst/>
@@ -9608,7 +9608,7 @@
                 </a:spcAft>
               </a:pPr>
               <a:r>
-                <a:rPr sz="720" i="0" b="0">
+                <a:rPr sz="800" i="0" b="0">
                   <a:solidFill>
                     <a:srgbClr val="262626">
                       <a:alpha val="100000"/>
@@ -9630,8 +9630,8 @@
           </p:nvSpPr>
           <p:spPr>
             <a:xfrm>
-              <a:off x="10799268" y="3264826"/>
-              <a:ext cx="126827" cy="65379"/>
+              <a:off x="10812373" y="3159727"/>
+              <a:ext cx="141274" cy="72786"/>
             </a:xfrm>
             <a:prstGeom prst="rect">
               <a:avLst/>
@@ -9651,7 +9651,7 @@
                 </a:spcAft>
               </a:pPr>
               <a:r>
-                <a:rPr sz="720" i="0" b="0">
+                <a:rPr sz="800" i="0" b="0">
                   <a:solidFill>
                     <a:srgbClr val="262626">
                       <a:alpha val="100000"/>
@@ -9673,8 +9673,8 @@
           </p:nvSpPr>
           <p:spPr>
             <a:xfrm>
-              <a:off x="8408176" y="3377785"/>
-              <a:ext cx="1936973" cy="81838"/>
+              <a:off x="8381830" y="3285541"/>
+              <a:ext cx="2154143" cy="90982"/>
             </a:xfrm>
             <a:prstGeom prst="rect">
               <a:avLst/>
@@ -9694,7 +9694,7 @@
                 </a:spcAft>
               </a:pPr>
               <a:r>
-                <a:rPr sz="900" i="0" b="0">
+                <a:rPr sz="1000" i="0" b="0">
                   <a:solidFill>
                     <a:srgbClr val="0D0D0D">
                       <a:alpha val="100000"/>
@@ -9716,8 +9716,8 @@
           </p:nvSpPr>
           <p:spPr>
             <a:xfrm>
-              <a:off x="7402695" y="503004"/>
-              <a:ext cx="3571372" cy="74432"/>
+              <a:off x="7567174" y="521126"/>
+              <a:ext cx="1712671" cy="83576"/>
             </a:xfrm>
             <a:prstGeom prst="rect">
               <a:avLst/>
@@ -9737,7 +9737,7 @@
                 </a:spcAft>
               </a:pPr>
               <a:r>
-                <a:rPr sz="819" i="0" b="0">
+                <a:rPr sz="919" i="0" b="0">
                   <a:solidFill>
                     <a:srgbClr val="4D4D4D">
                       <a:alpha val="100000"/>
@@ -9746,7 +9746,7 @@
                   <a:latin typeface="Arial"/>
                   <a:cs typeface="Arial"/>
                 </a:rPr>
-                <a:t>References: resident, invertivore, dense habitat, Least Concern, non-endemic</a:t>
+                <a:t>References: resident, invertivore,</a:t>
               </a:r>
             </a:p>
           </p:txBody>
@@ -9759,8 +9759,8 @@
           </p:nvSpPr>
           <p:spPr>
             <a:xfrm>
-              <a:off x="7402695" y="328384"/>
-              <a:ext cx="1567007" cy="90982"/>
+              <a:off x="7567174" y="647313"/>
+              <a:ext cx="2297155" cy="83576"/>
             </a:xfrm>
             <a:prstGeom prst="rect">
               <a:avLst/>
@@ -9780,7 +9780,50 @@
                 </a:spcAft>
               </a:pPr>
               <a:r>
-                <a:rPr sz="1000" i="0" b="1">
+                <a:rPr sz="919" i="0" b="0">
+                  <a:solidFill>
+                    <a:srgbClr val="4D4D4D">
+                      <a:alpha val="100000"/>
+                    </a:srgbClr>
+                  </a:solidFill>
+                  <a:latin typeface="Arial"/>
+                  <a:cs typeface="Arial"/>
+                </a:rPr>
+                <a:t> dense habitat, Least Concern, non-endemic</a:t>
+              </a:r>
+            </a:p>
+          </p:txBody>
+        </p:sp>
+        <p:sp>
+          <p:nvSpPr>
+            <p:cNvPr id="208" name="tx208"/>
+            <p:cNvSpPr/>
+            <p:nvPr/>
+          </p:nvSpPr>
+          <p:spPr>
+            <a:xfrm>
+              <a:off x="7567174" y="328384"/>
+              <a:ext cx="1723826" cy="100035"/>
+            </a:xfrm>
+            <a:prstGeom prst="rect">
+              <a:avLst/>
+            </a:prstGeom>
+            <a:noFill/>
+          </p:spPr>
+          <p:txBody>
+            <a:bodyPr lIns="0" rIns="0" tIns="0" bIns="0" anchorCtr="1" anchor="ctr" wrap="none"/>
+            <a:lstStyle/>
+            <a:p>
+              <a:pPr algn="l" marL="0" marR="0" indent="0">
+                <a:spcBef>
+                  <a:spcPts val="0"/>
+                </a:spcBef>
+                <a:spcAft>
+                  <a:spcPts val="0"/>
+                </a:spcAft>
+              </a:pPr>
+              <a:r>
+                <a:rPr sz="1100" i="0" b="1">
                   <a:solidFill>
                     <a:srgbClr val="000000">
                       <a:alpha val="100000"/>
@@ -9796,14 +9839,14 @@
         </p:sp>
         <p:sp>
           <p:nvSpPr>
-            <p:cNvPr id="208" name="tx208"/>
-            <p:cNvSpPr/>
-            <p:nvPr/>
-          </p:nvSpPr>
-          <p:spPr>
-            <a:xfrm>
-              <a:off x="5859900" y="326246"/>
-              <a:ext cx="93085" cy="109179"/>
+            <p:cNvPr id="209" name="tx209"/>
+            <p:cNvSpPr/>
+            <p:nvPr/>
+          </p:nvSpPr>
+          <p:spPr>
+            <a:xfrm>
+              <a:off x="5847325" y="320894"/>
+              <a:ext cx="100858" cy="118231"/>
             </a:xfrm>
             <a:prstGeom prst="rect">
               <a:avLst/>
@@ -9823,7 +9866,7 @@
                 </a:spcAft>
               </a:pPr>
               <a:r>
-                <a:rPr sz="1200" i="0" b="1">
+                <a:rPr sz="1300" i="0" b="1">
                   <a:solidFill>
                     <a:srgbClr val="000000">
                       <a:alpha val="100000"/>
@@ -9839,14 +9882,14 @@
         </p:sp>
         <p:sp>
           <p:nvSpPr>
-            <p:cNvPr id="209" name="rc209"/>
-            <p:cNvSpPr/>
-            <p:nvPr/>
-          </p:nvSpPr>
-          <p:spPr>
-            <a:xfrm>
-              <a:off x="252469" y="3901115"/>
-              <a:ext cx="5606366" cy="3893135"/>
+            <p:cNvPr id="210" name="rc210"/>
+            <p:cNvSpPr/>
+            <p:nvPr/>
+          </p:nvSpPr>
+          <p:spPr>
+            <a:xfrm>
+              <a:off x="252469" y="3846064"/>
+              <a:ext cx="5681392" cy="3948186"/>
             </a:xfrm>
             <a:prstGeom prst="rect">
               <a:avLst/>
@@ -9856,7 +9899,7 @@
                 <a:alpha val="100000"/>
               </a:srgbClr>
             </a:solidFill>
-            <a:ln w="11086" cap="rnd">
+            <a:ln w="12318" cap="rnd">
               <a:solidFill>
                 <a:srgbClr val="FFFFFF">
                   <a:alpha val="100000"/>
@@ -9874,14 +9917,14 @@
         </p:sp>
         <p:sp>
           <p:nvSpPr>
-            <p:cNvPr id="210" name="rc210"/>
-            <p:cNvSpPr/>
-            <p:nvPr/>
-          </p:nvSpPr>
-          <p:spPr>
-            <a:xfrm>
-              <a:off x="5858835" y="3901115"/>
-              <a:ext cx="5593015" cy="3893135"/>
+            <p:cNvPr id="211" name="rc211"/>
+            <p:cNvSpPr/>
+            <p:nvPr/>
+          </p:nvSpPr>
+          <p:spPr>
+            <a:xfrm>
+              <a:off x="5933861" y="3846064"/>
+              <a:ext cx="5517989" cy="3948186"/>
             </a:xfrm>
             <a:prstGeom prst="rect">
               <a:avLst/>
@@ -9891,7 +9934,7 @@
                 <a:alpha val="100000"/>
               </a:srgbClr>
             </a:solidFill>
-            <a:ln w="11086" cap="rnd">
+            <a:ln w="12318" cap="rnd">
               <a:solidFill>
                 <a:srgbClr val="FFFFFF">
                   <a:alpha val="100000"/>
@@ -9909,14 +9952,14 @@
         </p:sp>
         <p:sp>
           <p:nvSpPr>
-            <p:cNvPr id="211" name="rc211"/>
-            <p:cNvSpPr/>
-            <p:nvPr/>
-          </p:nvSpPr>
-          <p:spPr>
-            <a:xfrm>
-              <a:off x="1728709" y="4417344"/>
-              <a:ext cx="4028905" cy="2689374"/>
+            <p:cNvPr id="212" name="rc212"/>
+            <p:cNvSpPr/>
+            <p:nvPr/>
+          </p:nvSpPr>
+          <p:spPr>
+            <a:xfrm>
+              <a:off x="1884455" y="4538532"/>
+              <a:ext cx="3948185" cy="2512445"/>
             </a:xfrm>
             <a:prstGeom prst="rect">
               <a:avLst/>
@@ -9935,21 +9978,21 @@
         </p:sp>
         <p:sp>
           <p:nvSpPr>
-            <p:cNvPr id="212" name="pl212"/>
-            <p:cNvSpPr/>
-            <p:nvPr/>
-          </p:nvSpPr>
-          <p:spPr>
-            <a:xfrm>
-              <a:off x="3056416" y="4417344"/>
-              <a:ext cx="0" cy="2689374"/>
+            <p:cNvPr id="213" name="pl213"/>
+            <p:cNvSpPr/>
+            <p:nvPr/>
+          </p:nvSpPr>
+          <p:spPr>
+            <a:xfrm>
+              <a:off x="3185562" y="4538532"/>
+              <a:ext cx="0" cy="2512445"/>
             </a:xfrm>
             <a:custGeom>
               <a:avLst/>
               <a:pathLst>
-                <a:path w="0" h="2689374">
+                <a:path w="0" h="2512445">
                   <a:moveTo>
-                    <a:pt x="0" y="2689374"/>
+                    <a:pt x="0" y="2512445"/>
                   </a:moveTo>
                   <a:lnTo>
                     <a:pt x="0" y="0"/>
@@ -9978,14 +10021,14 @@
         </p:sp>
         <p:sp>
           <p:nvSpPr>
-            <p:cNvPr id="213" name="rc213"/>
-            <p:cNvSpPr/>
-            <p:nvPr/>
-          </p:nvSpPr>
-          <p:spPr>
-            <a:xfrm>
-              <a:off x="1911841" y="4845199"/>
-              <a:ext cx="1100427" cy="611221"/>
+            <p:cNvPr id="214" name="rc214"/>
+            <p:cNvSpPr/>
+            <p:nvPr/>
+          </p:nvSpPr>
+          <p:spPr>
+            <a:xfrm>
+              <a:off x="2063918" y="4938239"/>
+              <a:ext cx="1078379" cy="571010"/>
             </a:xfrm>
             <a:prstGeom prst="rect">
               <a:avLst/>
@@ -10004,14 +10047,14 @@
         </p:sp>
         <p:sp>
           <p:nvSpPr>
-            <p:cNvPr id="214" name="rc214"/>
-            <p:cNvSpPr/>
-            <p:nvPr/>
-          </p:nvSpPr>
-          <p:spPr>
-            <a:xfrm>
-              <a:off x="1911841" y="6067642"/>
-              <a:ext cx="2387258" cy="611221"/>
+            <p:cNvPr id="215" name="rc215"/>
+            <p:cNvSpPr/>
+            <p:nvPr/>
+          </p:nvSpPr>
+          <p:spPr>
+            <a:xfrm>
+              <a:off x="2063918" y="6080259"/>
+              <a:ext cx="2339428" cy="571010"/>
             </a:xfrm>
             <a:prstGeom prst="rect">
               <a:avLst/>
@@ -10030,13 +10073,13 @@
         </p:sp>
         <p:sp>
           <p:nvSpPr>
-            <p:cNvPr id="215" name="tx215"/>
-            <p:cNvSpPr/>
-            <p:nvPr/>
-          </p:nvSpPr>
-          <p:spPr>
-            <a:xfrm>
-              <a:off x="3057311" y="5118486"/>
+            <p:cNvPr id="216" name="tx216"/>
+            <p:cNvSpPr/>
+            <p:nvPr/>
+          </p:nvSpPr>
+          <p:spPr>
+            <a:xfrm>
+              <a:off x="3187342" y="5191420"/>
               <a:ext cx="750722" cy="64648"/>
             </a:xfrm>
             <a:prstGeom prst="rect">
@@ -10073,13 +10116,13 @@
         </p:sp>
         <p:sp>
           <p:nvSpPr>
-            <p:cNvPr id="216" name="tx216"/>
-            <p:cNvSpPr/>
-            <p:nvPr/>
-          </p:nvSpPr>
-          <p:spPr>
-            <a:xfrm>
-              <a:off x="4350468" y="6340929"/>
+            <p:cNvPr id="217" name="tx217"/>
+            <p:cNvSpPr/>
+            <p:nvPr/>
+          </p:nvSpPr>
+          <p:spPr>
+            <a:xfrm>
+              <a:off x="4454716" y="6333440"/>
               <a:ext cx="856152" cy="64648"/>
             </a:xfrm>
             <a:prstGeom prst="rect">
@@ -10116,21 +10159,21 @@
         </p:sp>
         <p:sp>
           <p:nvSpPr>
-            <p:cNvPr id="217" name="pl217"/>
-            <p:cNvSpPr/>
-            <p:nvPr/>
-          </p:nvSpPr>
-          <p:spPr>
-            <a:xfrm>
-              <a:off x="1728709" y="4417344"/>
-              <a:ext cx="0" cy="2689374"/>
+            <p:cNvPr id="218" name="pl218"/>
+            <p:cNvSpPr/>
+            <p:nvPr/>
+          </p:nvSpPr>
+          <p:spPr>
+            <a:xfrm>
+              <a:off x="1884455" y="4538532"/>
+              <a:ext cx="0" cy="2512445"/>
             </a:xfrm>
             <a:custGeom>
               <a:avLst/>
               <a:pathLst>
-                <a:path w="0" h="2689374">
+                <a:path w="0" h="2512445">
                   <a:moveTo>
-                    <a:pt x="0" y="2689374"/>
+                    <a:pt x="0" y="2512445"/>
                   </a:moveTo>
                   <a:lnTo>
                     <a:pt x="0" y="0"/>
@@ -10156,14 +10199,14 @@
         </p:sp>
         <p:sp>
           <p:nvSpPr>
-            <p:cNvPr id="218" name="tx218"/>
-            <p:cNvSpPr/>
-            <p:nvPr/>
-          </p:nvSpPr>
-          <p:spPr>
-            <a:xfrm>
-              <a:off x="536112" y="6291185"/>
-              <a:ext cx="1141354" cy="65379"/>
+            <p:cNvPr id="219" name="tx219"/>
+            <p:cNvSpPr/>
+            <p:nvPr/>
+          </p:nvSpPr>
+          <p:spPr>
+            <a:xfrm>
+              <a:off x="556411" y="6274507"/>
+              <a:ext cx="1271107" cy="72786"/>
             </a:xfrm>
             <a:prstGeom prst="rect">
               <a:avLst/>
@@ -10183,7 +10226,7 @@
                 </a:spcAft>
               </a:pPr>
               <a:r>
-                <a:rPr sz="720" i="0" b="0">
+                <a:rPr sz="800" i="0" b="0">
                   <a:solidFill>
                     <a:srgbClr val="262626">
                       <a:alpha val="100000"/>
@@ -10199,14 +10242,14 @@
         </p:sp>
         <p:sp>
           <p:nvSpPr>
-            <p:cNvPr id="219" name="tx219"/>
-            <p:cNvSpPr/>
-            <p:nvPr/>
-          </p:nvSpPr>
-          <p:spPr>
-            <a:xfrm>
-              <a:off x="724021" y="6389941"/>
-              <a:ext cx="953444" cy="65379"/>
+            <p:cNvPr id="220" name="tx220"/>
+            <p:cNvSpPr/>
+            <p:nvPr/>
+          </p:nvSpPr>
+          <p:spPr>
+            <a:xfrm>
+              <a:off x="765443" y="6384235"/>
+              <a:ext cx="1062075" cy="72786"/>
             </a:xfrm>
             <a:prstGeom prst="rect">
               <a:avLst/>
@@ -10226,7 +10269,7 @@
                 </a:spcAft>
               </a:pPr>
               <a:r>
-                <a:rPr sz="720" i="0" b="0">
+                <a:rPr sz="800" i="0" b="0">
                   <a:solidFill>
                     <a:srgbClr val="262626">
                       <a:alpha val="100000"/>
@@ -10242,14 +10285,14 @@
         </p:sp>
         <p:sp>
           <p:nvSpPr>
-            <p:cNvPr id="220" name="tx220"/>
-            <p:cNvSpPr/>
-            <p:nvPr/>
-          </p:nvSpPr>
-          <p:spPr>
-            <a:xfrm>
-              <a:off x="967343" y="5068743"/>
-              <a:ext cx="710123" cy="65379"/>
+            <p:cNvPr id="221" name="tx221"/>
+            <p:cNvSpPr/>
+            <p:nvPr/>
+          </p:nvSpPr>
+          <p:spPr>
+            <a:xfrm>
+              <a:off x="1036654" y="5132487"/>
+              <a:ext cx="790864" cy="72786"/>
             </a:xfrm>
             <a:prstGeom prst="rect">
               <a:avLst/>
@@ -10269,7 +10312,7 @@
                 </a:spcAft>
               </a:pPr>
               <a:r>
-                <a:rPr sz="720" i="0" b="0">
+                <a:rPr sz="800" i="0" b="0">
                   <a:solidFill>
                     <a:srgbClr val="262626">
                       <a:alpha val="100000"/>
@@ -10285,14 +10328,14 @@
         </p:sp>
         <p:sp>
           <p:nvSpPr>
-            <p:cNvPr id="221" name="tx221"/>
-            <p:cNvSpPr/>
-            <p:nvPr/>
-          </p:nvSpPr>
-          <p:spPr>
-            <a:xfrm>
-              <a:off x="460125" y="5167498"/>
-              <a:ext cx="1217340" cy="65379"/>
+            <p:cNvPr id="222" name="tx222"/>
+            <p:cNvSpPr/>
+            <p:nvPr/>
+          </p:nvSpPr>
+          <p:spPr>
+            <a:xfrm>
+              <a:off x="471555" y="5242215"/>
+              <a:ext cx="1355963" cy="72786"/>
             </a:xfrm>
             <a:prstGeom prst="rect">
               <a:avLst/>
@@ -10312,7 +10355,7 @@
                 </a:spcAft>
               </a:pPr>
               <a:r>
-                <a:rPr sz="720" i="0" b="0">
+                <a:rPr sz="800" i="0" b="0">
                   <a:solidFill>
                     <a:srgbClr val="262626">
                       <a:alpha val="100000"/>
@@ -10328,24 +10371,24 @@
         </p:sp>
         <p:sp>
           <p:nvSpPr>
-            <p:cNvPr id="222" name="pl222"/>
-            <p:cNvSpPr/>
-            <p:nvPr/>
-          </p:nvSpPr>
-          <p:spPr>
-            <a:xfrm>
-              <a:off x="1700240" y="6373253"/>
-              <a:ext cx="28468" cy="0"/>
+            <p:cNvPr id="223" name="pl223"/>
+            <p:cNvSpPr/>
+            <p:nvPr/>
+          </p:nvSpPr>
+          <p:spPr>
+            <a:xfrm>
+              <a:off x="1852824" y="6365764"/>
+              <a:ext cx="31631" cy="0"/>
             </a:xfrm>
             <a:custGeom>
               <a:avLst/>
               <a:pathLst>
-                <a:path w="28468" h="0">
+                <a:path w="31631" h="0">
                   <a:moveTo>
                     <a:pt x="0" y="0"/>
                   </a:moveTo>
                   <a:lnTo>
-                    <a:pt x="28468" y="0"/>
+                    <a:pt x="31631" y="0"/>
                   </a:lnTo>
                 </a:path>
               </a:pathLst>
@@ -10368,24 +10411,24 @@
         </p:sp>
         <p:sp>
           <p:nvSpPr>
-            <p:cNvPr id="223" name="pl223"/>
-            <p:cNvSpPr/>
-            <p:nvPr/>
-          </p:nvSpPr>
-          <p:spPr>
-            <a:xfrm>
-              <a:off x="1700240" y="5150810"/>
-              <a:ext cx="28468" cy="0"/>
+            <p:cNvPr id="224" name="pl224"/>
+            <p:cNvSpPr/>
+            <p:nvPr/>
+          </p:nvSpPr>
+          <p:spPr>
+            <a:xfrm>
+              <a:off x="1852824" y="5223744"/>
+              <a:ext cx="31631" cy="0"/>
             </a:xfrm>
             <a:custGeom>
               <a:avLst/>
               <a:pathLst>
-                <a:path w="28468" h="0">
+                <a:path w="31631" h="0">
                   <a:moveTo>
                     <a:pt x="0" y="0"/>
                   </a:moveTo>
                   <a:lnTo>
-                    <a:pt x="28468" y="0"/>
+                    <a:pt x="31631" y="0"/>
                   </a:lnTo>
                 </a:path>
               </a:pathLst>
@@ -10408,24 +10451,24 @@
         </p:sp>
         <p:sp>
           <p:nvSpPr>
-            <p:cNvPr id="224" name="pl224"/>
-            <p:cNvSpPr/>
-            <p:nvPr/>
-          </p:nvSpPr>
-          <p:spPr>
-            <a:xfrm>
-              <a:off x="1728709" y="7106718"/>
-              <a:ext cx="4028905" cy="0"/>
+            <p:cNvPr id="225" name="pl225"/>
+            <p:cNvSpPr/>
+            <p:nvPr/>
+          </p:nvSpPr>
+          <p:spPr>
+            <a:xfrm>
+              <a:off x="1884455" y="7050977"/>
+              <a:ext cx="3948185" cy="0"/>
             </a:xfrm>
             <a:custGeom>
               <a:avLst/>
               <a:pathLst>
-                <a:path w="4028905" h="0">
+                <a:path w="3948185" h="0">
                   <a:moveTo>
                     <a:pt x="0" y="0"/>
                   </a:moveTo>
                   <a:lnTo>
-                    <a:pt x="4028905" y="0"/>
+                    <a:pt x="3948185" y="0"/>
                   </a:lnTo>
                 </a:path>
               </a:pathLst>
@@ -10448,21 +10491,21 @@
         </p:sp>
         <p:sp>
           <p:nvSpPr>
-            <p:cNvPr id="225" name="pl225"/>
-            <p:cNvSpPr/>
-            <p:nvPr/>
-          </p:nvSpPr>
-          <p:spPr>
-            <a:xfrm>
-              <a:off x="1911841" y="7106718"/>
-              <a:ext cx="0" cy="28468"/>
+            <p:cNvPr id="226" name="pl226"/>
+            <p:cNvSpPr/>
+            <p:nvPr/>
+          </p:nvSpPr>
+          <p:spPr>
+            <a:xfrm>
+              <a:off x="2063918" y="7050977"/>
+              <a:ext cx="0" cy="31631"/>
             </a:xfrm>
             <a:custGeom>
               <a:avLst/>
               <a:pathLst>
-                <a:path w="0" h="28468">
+                <a:path w="0" h="31631">
                   <a:moveTo>
-                    <a:pt x="0" y="28468"/>
+                    <a:pt x="0" y="31631"/>
                   </a:moveTo>
                   <a:lnTo>
                     <a:pt x="0" y="0"/>
@@ -10488,21 +10531,21 @@
         </p:sp>
         <p:sp>
           <p:nvSpPr>
-            <p:cNvPr id="226" name="pl226"/>
-            <p:cNvSpPr/>
-            <p:nvPr/>
-          </p:nvSpPr>
-          <p:spPr>
-            <a:xfrm>
-              <a:off x="3056416" y="7106718"/>
-              <a:ext cx="0" cy="28468"/>
+            <p:cNvPr id="227" name="pl227"/>
+            <p:cNvSpPr/>
+            <p:nvPr/>
+          </p:nvSpPr>
+          <p:spPr>
+            <a:xfrm>
+              <a:off x="3185562" y="7050977"/>
+              <a:ext cx="0" cy="31631"/>
             </a:xfrm>
             <a:custGeom>
               <a:avLst/>
               <a:pathLst>
-                <a:path w="0" h="28468">
+                <a:path w="0" h="31631">
                   <a:moveTo>
-                    <a:pt x="0" y="28468"/>
+                    <a:pt x="0" y="31631"/>
                   </a:moveTo>
                   <a:lnTo>
                     <a:pt x="0" y="0"/>
@@ -10528,21 +10571,21 @@
         </p:sp>
         <p:sp>
           <p:nvSpPr>
-            <p:cNvPr id="227" name="pl227"/>
-            <p:cNvSpPr/>
-            <p:nvPr/>
-          </p:nvSpPr>
-          <p:spPr>
-            <a:xfrm>
-              <a:off x="4200992" y="7106718"/>
-              <a:ext cx="0" cy="28468"/>
+            <p:cNvPr id="228" name="pl228"/>
+            <p:cNvSpPr/>
+            <p:nvPr/>
+          </p:nvSpPr>
+          <p:spPr>
+            <a:xfrm>
+              <a:off x="4307205" y="7050977"/>
+              <a:ext cx="0" cy="31631"/>
             </a:xfrm>
             <a:custGeom>
               <a:avLst/>
               <a:pathLst>
-                <a:path w="0" h="28468">
+                <a:path w="0" h="31631">
                   <a:moveTo>
-                    <a:pt x="0" y="28468"/>
+                    <a:pt x="0" y="31631"/>
                   </a:moveTo>
                   <a:lnTo>
                     <a:pt x="0" y="0"/>
@@ -10568,21 +10611,21 @@
         </p:sp>
         <p:sp>
           <p:nvSpPr>
-            <p:cNvPr id="228" name="pl228"/>
-            <p:cNvSpPr/>
-            <p:nvPr/>
-          </p:nvSpPr>
-          <p:spPr>
-            <a:xfrm>
-              <a:off x="5345567" y="7106718"/>
-              <a:ext cx="0" cy="28468"/>
+            <p:cNvPr id="229" name="pl229"/>
+            <p:cNvSpPr/>
+            <p:nvPr/>
+          </p:nvSpPr>
+          <p:spPr>
+            <a:xfrm>
+              <a:off x="5428849" y="7050977"/>
+              <a:ext cx="0" cy="31631"/>
             </a:xfrm>
             <a:custGeom>
               <a:avLst/>
               <a:pathLst>
-                <a:path w="0" h="28468">
+                <a:path w="0" h="31631">
                   <a:moveTo>
-                    <a:pt x="0" y="28468"/>
+                    <a:pt x="0" y="31631"/>
                   </a:moveTo>
                   <a:lnTo>
                     <a:pt x="0" y="0"/>
@@ -10608,14 +10651,14 @@
         </p:sp>
         <p:sp>
           <p:nvSpPr>
-            <p:cNvPr id="229" name="tx229"/>
-            <p:cNvSpPr/>
-            <p:nvPr/>
-          </p:nvSpPr>
-          <p:spPr>
-            <a:xfrm>
-              <a:off x="1886466" y="7157961"/>
-              <a:ext cx="50749" cy="65379"/>
+            <p:cNvPr id="230" name="tx230"/>
+            <p:cNvSpPr/>
+            <p:nvPr/>
+          </p:nvSpPr>
+          <p:spPr>
+            <a:xfrm>
+              <a:off x="2035663" y="7107913"/>
+              <a:ext cx="56509" cy="72786"/>
             </a:xfrm>
             <a:prstGeom prst="rect">
               <a:avLst/>
@@ -10635,7 +10678,7 @@
                 </a:spcAft>
               </a:pPr>
               <a:r>
-                <a:rPr sz="720" i="0" b="0">
+                <a:rPr sz="800" i="0" b="0">
                   <a:solidFill>
                     <a:srgbClr val="262626">
                       <a:alpha val="100000"/>
@@ -10651,14 +10694,14 @@
         </p:sp>
         <p:sp>
           <p:nvSpPr>
-            <p:cNvPr id="230" name="tx230"/>
-            <p:cNvSpPr/>
-            <p:nvPr/>
-          </p:nvSpPr>
-          <p:spPr>
-            <a:xfrm>
-              <a:off x="3031042" y="7157961"/>
-              <a:ext cx="50749" cy="65379"/>
+            <p:cNvPr id="231" name="tx231"/>
+            <p:cNvSpPr/>
+            <p:nvPr/>
+          </p:nvSpPr>
+          <p:spPr>
+            <a:xfrm>
+              <a:off x="3157307" y="7107913"/>
+              <a:ext cx="56509" cy="72786"/>
             </a:xfrm>
             <a:prstGeom prst="rect">
               <a:avLst/>
@@ -10678,7 +10721,7 @@
                 </a:spcAft>
               </a:pPr>
               <a:r>
-                <a:rPr sz="720" i="0" b="0">
+                <a:rPr sz="800" i="0" b="0">
                   <a:solidFill>
                     <a:srgbClr val="262626">
                       <a:alpha val="100000"/>
@@ -10694,14 +10737,14 @@
         </p:sp>
         <p:sp>
           <p:nvSpPr>
-            <p:cNvPr id="231" name="tx231"/>
-            <p:cNvSpPr/>
-            <p:nvPr/>
-          </p:nvSpPr>
-          <p:spPr>
-            <a:xfrm>
-              <a:off x="4175617" y="7157961"/>
-              <a:ext cx="50749" cy="65379"/>
+            <p:cNvPr id="232" name="tx232"/>
+            <p:cNvSpPr/>
+            <p:nvPr/>
+          </p:nvSpPr>
+          <p:spPr>
+            <a:xfrm>
+              <a:off x="4278951" y="7107913"/>
+              <a:ext cx="56509" cy="72786"/>
             </a:xfrm>
             <a:prstGeom prst="rect">
               <a:avLst/>
@@ -10721,7 +10764,7 @@
                 </a:spcAft>
               </a:pPr>
               <a:r>
-                <a:rPr sz="720" i="0" b="0">
+                <a:rPr sz="800" i="0" b="0">
                   <a:solidFill>
                     <a:srgbClr val="262626">
                       <a:alpha val="100000"/>
@@ -10737,14 +10780,14 @@
         </p:sp>
         <p:sp>
           <p:nvSpPr>
-            <p:cNvPr id="232" name="tx232"/>
-            <p:cNvSpPr/>
-            <p:nvPr/>
-          </p:nvSpPr>
-          <p:spPr>
-            <a:xfrm>
-              <a:off x="5320192" y="7157961"/>
-              <a:ext cx="50749" cy="65379"/>
+            <p:cNvPr id="233" name="tx233"/>
+            <p:cNvSpPr/>
+            <p:nvPr/>
+          </p:nvSpPr>
+          <p:spPr>
+            <a:xfrm>
+              <a:off x="5400594" y="7107913"/>
+              <a:ext cx="56509" cy="72786"/>
             </a:xfrm>
             <a:prstGeom prst="rect">
               <a:avLst/>
@@ -10764,7 +10807,7 @@
                 </a:spcAft>
               </a:pPr>
               <a:r>
-                <a:rPr sz="720" i="0" b="0">
+                <a:rPr sz="800" i="0" b="0">
                   <a:solidFill>
                     <a:srgbClr val="262626">
                       <a:alpha val="100000"/>
@@ -10780,14 +10823,14 @@
         </p:sp>
         <p:sp>
           <p:nvSpPr>
-            <p:cNvPr id="233" name="tx233"/>
-            <p:cNvSpPr/>
-            <p:nvPr/>
-          </p:nvSpPr>
-          <p:spPr>
-            <a:xfrm>
-              <a:off x="3238230" y="7270920"/>
-              <a:ext cx="1009863" cy="81838"/>
+            <p:cNvPr id="234" name="tx234"/>
+            <p:cNvSpPr/>
+            <p:nvPr/>
+          </p:nvSpPr>
+          <p:spPr>
+            <a:xfrm>
+              <a:off x="3297106" y="7233728"/>
+              <a:ext cx="1122883" cy="90982"/>
             </a:xfrm>
             <a:prstGeom prst="rect">
               <a:avLst/>
@@ -10807,7 +10850,7 @@
                 </a:spcAft>
               </a:pPr>
               <a:r>
-                <a:rPr sz="900" i="0" b="0">
+                <a:rPr sz="1000" i="0" b="0">
                   <a:solidFill>
                     <a:srgbClr val="0D0D0D">
                       <a:alpha val="100000"/>
@@ -10823,14 +10866,14 @@
         </p:sp>
         <p:sp>
           <p:nvSpPr>
-            <p:cNvPr id="234" name="tx234"/>
-            <p:cNvSpPr/>
-            <p:nvPr/>
-          </p:nvSpPr>
-          <p:spPr>
-            <a:xfrm>
-              <a:off x="1728709" y="4151650"/>
-              <a:ext cx="3935760" cy="74432"/>
+            <p:cNvPr id="235" name="tx235"/>
+            <p:cNvSpPr/>
+            <p:nvPr/>
+          </p:nvSpPr>
+          <p:spPr>
+            <a:xfrm>
+              <a:off x="1884455" y="4114721"/>
+              <a:ext cx="4418655" cy="83576"/>
             </a:xfrm>
             <a:prstGeom prst="rect">
               <a:avLst/>
@@ -10850,7 +10893,7 @@
                 </a:spcAft>
               </a:pPr>
               <a:r>
-                <a:rPr sz="819" i="0" b="0">
+                <a:rPr sz="919" i="0" b="0">
                   <a:solidFill>
                     <a:srgbClr val="4D4D4D">
                       <a:alpha val="100000"/>
@@ -10866,14 +10909,14 @@
         </p:sp>
         <p:sp>
           <p:nvSpPr>
-            <p:cNvPr id="235" name="tx235"/>
-            <p:cNvSpPr/>
-            <p:nvPr/>
-          </p:nvSpPr>
-          <p:spPr>
-            <a:xfrm>
-              <a:off x="1728709" y="4264122"/>
-              <a:ext cx="4259092" cy="74432"/>
+            <p:cNvPr id="236" name="tx236"/>
+            <p:cNvSpPr/>
+            <p:nvPr/>
+          </p:nvSpPr>
+          <p:spPr>
+            <a:xfrm>
+              <a:off x="1884455" y="4240908"/>
+              <a:ext cx="4782769" cy="83576"/>
             </a:xfrm>
             <a:prstGeom prst="rect">
               <a:avLst/>
@@ -10893,7 +10936,7 @@
                 </a:spcAft>
               </a:pPr>
               <a:r>
-                <a:rPr sz="819" i="0" b="0">
+                <a:rPr sz="919" i="0" b="0">
                   <a:solidFill>
                     <a:srgbClr val="4D4D4D">
                       <a:alpha val="100000"/>
@@ -10909,14 +10952,14 @@
         </p:sp>
         <p:sp>
           <p:nvSpPr>
-            <p:cNvPr id="236" name="tx236"/>
-            <p:cNvSpPr/>
-            <p:nvPr/>
-          </p:nvSpPr>
-          <p:spPr>
-            <a:xfrm>
-              <a:off x="1728709" y="3977031"/>
-              <a:ext cx="2597810" cy="90982"/>
+            <p:cNvPr id="237" name="tx237"/>
+            <p:cNvSpPr/>
+            <p:nvPr/>
+          </p:nvSpPr>
+          <p:spPr>
+            <a:xfrm>
+              <a:off x="1884455" y="3921979"/>
+              <a:ext cx="2857774" cy="100035"/>
             </a:xfrm>
             <a:prstGeom prst="rect">
               <a:avLst/>
@@ -10936,7 +10979,7 @@
                 </a:spcAft>
               </a:pPr>
               <a:r>
-                <a:rPr sz="1000" i="0" b="1">
+                <a:rPr sz="1100" i="0" b="1">
                   <a:solidFill>
                     <a:srgbClr val="000000">
                       <a:alpha val="100000"/>
@@ -10952,14 +10995,14 @@
         </p:sp>
         <p:sp>
           <p:nvSpPr>
-            <p:cNvPr id="237" name="tx237"/>
-            <p:cNvSpPr/>
-            <p:nvPr/>
-          </p:nvSpPr>
-          <p:spPr>
-            <a:xfrm>
-              <a:off x="338326" y="3978560"/>
-              <a:ext cx="84764" cy="109179"/>
+            <p:cNvPr id="238" name="tx238"/>
+            <p:cNvSpPr/>
+            <p:nvPr/>
+          </p:nvSpPr>
+          <p:spPr>
+            <a:xfrm>
+              <a:off x="335181" y="3919809"/>
+              <a:ext cx="91805" cy="118231"/>
             </a:xfrm>
             <a:prstGeom prst="rect">
               <a:avLst/>
@@ -10979,7 +11022,7 @@
                 </a:spcAft>
               </a:pPr>
               <a:r>
-                <a:rPr sz="1200" i="0" b="1">
+                <a:rPr sz="1300" i="0" b="1">
                   <a:solidFill>
                     <a:srgbClr val="000000">
                       <a:alpha val="100000"/>
@@ -10995,14 +11038,14 @@
         </p:sp>
         <p:sp>
           <p:nvSpPr>
-            <p:cNvPr id="238" name="rc238"/>
-            <p:cNvSpPr/>
-            <p:nvPr/>
-          </p:nvSpPr>
-          <p:spPr>
-            <a:xfrm>
-              <a:off x="7321725" y="4417344"/>
-              <a:ext cx="4028905" cy="2689374"/>
+            <p:cNvPr id="239" name="rc239"/>
+            <p:cNvSpPr/>
+            <p:nvPr/>
+          </p:nvSpPr>
+          <p:spPr>
+            <a:xfrm>
+              <a:off x="7402445" y="4538532"/>
+              <a:ext cx="3948185" cy="2512445"/>
             </a:xfrm>
             <a:prstGeom prst="rect">
               <a:avLst/>
@@ -11021,14 +11064,14 @@
         </p:sp>
         <p:sp>
           <p:nvSpPr>
-            <p:cNvPr id="239" name="rc239"/>
-            <p:cNvSpPr/>
-            <p:nvPr/>
-          </p:nvSpPr>
-          <p:spPr>
-            <a:xfrm>
-              <a:off x="7504857" y="4455954"/>
-              <a:ext cx="2388679" cy="82545"/>
+            <p:cNvPr id="240" name="rc240"/>
+            <p:cNvSpPr/>
+            <p:nvPr/>
+          </p:nvSpPr>
+          <p:spPr>
+            <a:xfrm>
+              <a:off x="7581908" y="4574601"/>
+              <a:ext cx="2340821" cy="77114"/>
             </a:xfrm>
             <a:prstGeom prst="rect">
               <a:avLst/>
@@ -11047,14 +11090,14 @@
         </p:sp>
         <p:sp>
           <p:nvSpPr>
-            <p:cNvPr id="240" name="rc240"/>
-            <p:cNvSpPr/>
-            <p:nvPr/>
-          </p:nvSpPr>
-          <p:spPr>
-            <a:xfrm>
-              <a:off x="7504857" y="4589091"/>
-              <a:ext cx="2388679" cy="82545"/>
+            <p:cNvPr id="241" name="rc241"/>
+            <p:cNvSpPr/>
+            <p:nvPr/>
+          </p:nvSpPr>
+          <p:spPr>
+            <a:xfrm>
+              <a:off x="7581908" y="4698980"/>
+              <a:ext cx="2340821" cy="77114"/>
             </a:xfrm>
             <a:prstGeom prst="rect">
               <a:avLst/>
@@ -11073,14 +11116,14 @@
         </p:sp>
         <p:sp>
           <p:nvSpPr>
-            <p:cNvPr id="241" name="rc241"/>
-            <p:cNvSpPr/>
-            <p:nvPr/>
-          </p:nvSpPr>
-          <p:spPr>
-            <a:xfrm>
-              <a:off x="7504857" y="4722229"/>
-              <a:ext cx="796226" cy="82545"/>
+            <p:cNvPr id="242" name="rc242"/>
+            <p:cNvSpPr/>
+            <p:nvPr/>
+          </p:nvSpPr>
+          <p:spPr>
+            <a:xfrm>
+              <a:off x="7581908" y="4823358"/>
+              <a:ext cx="780273" cy="77114"/>
             </a:xfrm>
             <a:prstGeom prst="rect">
               <a:avLst/>
@@ -11099,14 +11142,14 @@
         </p:sp>
         <p:sp>
           <p:nvSpPr>
-            <p:cNvPr id="242" name="rc242"/>
-            <p:cNvSpPr/>
-            <p:nvPr/>
-          </p:nvSpPr>
-          <p:spPr>
-            <a:xfrm>
-              <a:off x="7504857" y="4855366"/>
-              <a:ext cx="796226" cy="82545"/>
+            <p:cNvPr id="243" name="rc243"/>
+            <p:cNvSpPr/>
+            <p:nvPr/>
+          </p:nvSpPr>
+          <p:spPr>
+            <a:xfrm>
+              <a:off x="7581908" y="4947737"/>
+              <a:ext cx="780273" cy="77114"/>
             </a:xfrm>
             <a:prstGeom prst="rect">
               <a:avLst/>
@@ -11125,14 +11168,14 @@
         </p:sp>
         <p:sp>
           <p:nvSpPr>
-            <p:cNvPr id="243" name="rc243"/>
-            <p:cNvSpPr/>
-            <p:nvPr/>
-          </p:nvSpPr>
-          <p:spPr>
-            <a:xfrm>
-              <a:off x="7504857" y="4988503"/>
-              <a:ext cx="0" cy="82545"/>
+            <p:cNvPr id="244" name="rc244"/>
+            <p:cNvSpPr/>
+            <p:nvPr/>
+          </p:nvSpPr>
+          <p:spPr>
+            <a:xfrm>
+              <a:off x="7581908" y="5072115"/>
+              <a:ext cx="0" cy="77114"/>
             </a:xfrm>
             <a:prstGeom prst="rect">
               <a:avLst/>
@@ -11151,14 +11194,14 @@
         </p:sp>
         <p:sp>
           <p:nvSpPr>
-            <p:cNvPr id="244" name="rc244"/>
-            <p:cNvSpPr/>
-            <p:nvPr/>
-          </p:nvSpPr>
-          <p:spPr>
-            <a:xfrm>
-              <a:off x="7504857" y="5121641"/>
-              <a:ext cx="0" cy="82545"/>
+            <p:cNvPr id="245" name="rc245"/>
+            <p:cNvSpPr/>
+            <p:nvPr/>
+          </p:nvSpPr>
+          <p:spPr>
+            <a:xfrm>
+              <a:off x="7581908" y="5196494"/>
+              <a:ext cx="0" cy="77114"/>
             </a:xfrm>
             <a:prstGeom prst="rect">
               <a:avLst/>
@@ -11177,14 +11220,14 @@
         </p:sp>
         <p:sp>
           <p:nvSpPr>
-            <p:cNvPr id="245" name="rc245"/>
-            <p:cNvSpPr/>
-            <p:nvPr/>
-          </p:nvSpPr>
-          <p:spPr>
-            <a:xfrm>
-              <a:off x="7504857" y="5254778"/>
-              <a:ext cx="0" cy="82545"/>
+            <p:cNvPr id="246" name="rc246"/>
+            <p:cNvSpPr/>
+            <p:nvPr/>
+          </p:nvSpPr>
+          <p:spPr>
+            <a:xfrm>
+              <a:off x="7581908" y="5320872"/>
+              <a:ext cx="0" cy="77114"/>
             </a:xfrm>
             <a:prstGeom prst="rect">
               <a:avLst/>
@@ -11203,14 +11246,14 @@
         </p:sp>
         <p:sp>
           <p:nvSpPr>
-            <p:cNvPr id="246" name="rc246"/>
-            <p:cNvSpPr/>
-            <p:nvPr/>
-          </p:nvSpPr>
-          <p:spPr>
-            <a:xfrm>
-              <a:off x="7504857" y="5387915"/>
-              <a:ext cx="0" cy="82545"/>
+            <p:cNvPr id="247" name="rc247"/>
+            <p:cNvSpPr/>
+            <p:nvPr/>
+          </p:nvSpPr>
+          <p:spPr>
+            <a:xfrm>
+              <a:off x="7581908" y="5445251"/>
+              <a:ext cx="0" cy="77114"/>
             </a:xfrm>
             <a:prstGeom prst="rect">
               <a:avLst/>
@@ -11229,14 +11272,14 @@
         </p:sp>
         <p:sp>
           <p:nvSpPr>
-            <p:cNvPr id="247" name="rc247"/>
-            <p:cNvSpPr/>
-            <p:nvPr/>
-          </p:nvSpPr>
-          <p:spPr>
-            <a:xfrm>
-              <a:off x="7504857" y="5521053"/>
-              <a:ext cx="0" cy="82545"/>
+            <p:cNvPr id="248" name="rc248"/>
+            <p:cNvSpPr/>
+            <p:nvPr/>
+          </p:nvSpPr>
+          <p:spPr>
+            <a:xfrm>
+              <a:off x="7581908" y="5569629"/>
+              <a:ext cx="0" cy="77114"/>
             </a:xfrm>
             <a:prstGeom prst="rect">
               <a:avLst/>
@@ -11255,14 +11298,14 @@
         </p:sp>
         <p:sp>
           <p:nvSpPr>
-            <p:cNvPr id="248" name="rc248"/>
-            <p:cNvSpPr/>
-            <p:nvPr/>
-          </p:nvSpPr>
-          <p:spPr>
-            <a:xfrm>
-              <a:off x="7504857" y="5654190"/>
-              <a:ext cx="0" cy="82545"/>
+            <p:cNvPr id="249" name="rc249"/>
+            <p:cNvSpPr/>
+            <p:nvPr/>
+          </p:nvSpPr>
+          <p:spPr>
+            <a:xfrm>
+              <a:off x="7581908" y="5694008"/>
+              <a:ext cx="0" cy="77114"/>
             </a:xfrm>
             <a:prstGeom prst="rect">
               <a:avLst/>
@@ -11281,14 +11324,14 @@
         </p:sp>
         <p:sp>
           <p:nvSpPr>
-            <p:cNvPr id="249" name="rc249"/>
-            <p:cNvSpPr/>
-            <p:nvPr/>
-          </p:nvSpPr>
-          <p:spPr>
-            <a:xfrm>
-              <a:off x="7504857" y="5787327"/>
-              <a:ext cx="0" cy="82545"/>
+            <p:cNvPr id="250" name="rc250"/>
+            <p:cNvSpPr/>
+            <p:nvPr/>
+          </p:nvSpPr>
+          <p:spPr>
+            <a:xfrm>
+              <a:off x="7581908" y="5818386"/>
+              <a:ext cx="0" cy="77114"/>
             </a:xfrm>
             <a:prstGeom prst="rect">
               <a:avLst/>
@@ -11307,14 +11350,14 @@
         </p:sp>
         <p:sp>
           <p:nvSpPr>
-            <p:cNvPr id="250" name="rc250"/>
-            <p:cNvSpPr/>
-            <p:nvPr/>
-          </p:nvSpPr>
-          <p:spPr>
-            <a:xfrm>
-              <a:off x="7504857" y="5920465"/>
-              <a:ext cx="0" cy="82545"/>
+            <p:cNvPr id="251" name="rc251"/>
+            <p:cNvSpPr/>
+            <p:nvPr/>
+          </p:nvSpPr>
+          <p:spPr>
+            <a:xfrm>
+              <a:off x="7581908" y="5942765"/>
+              <a:ext cx="0" cy="77114"/>
             </a:xfrm>
             <a:prstGeom prst="rect">
               <a:avLst/>
@@ -11333,14 +11376,14 @@
         </p:sp>
         <p:sp>
           <p:nvSpPr>
-            <p:cNvPr id="251" name="rc251"/>
-            <p:cNvSpPr/>
-            <p:nvPr/>
-          </p:nvSpPr>
-          <p:spPr>
-            <a:xfrm>
-              <a:off x="7504857" y="6053602"/>
-              <a:ext cx="0" cy="82545"/>
+            <p:cNvPr id="252" name="rc252"/>
+            <p:cNvSpPr/>
+            <p:nvPr/>
+          </p:nvSpPr>
+          <p:spPr>
+            <a:xfrm>
+              <a:off x="7581908" y="6067143"/>
+              <a:ext cx="0" cy="77114"/>
             </a:xfrm>
             <a:prstGeom prst="rect">
               <a:avLst/>
@@ -11359,14 +11402,14 @@
         </p:sp>
         <p:sp>
           <p:nvSpPr>
-            <p:cNvPr id="252" name="rc252"/>
-            <p:cNvSpPr/>
-            <p:nvPr/>
-          </p:nvSpPr>
-          <p:spPr>
-            <a:xfrm>
-              <a:off x="7504857" y="6186740"/>
-              <a:ext cx="0" cy="82545"/>
+            <p:cNvPr id="253" name="rc253"/>
+            <p:cNvSpPr/>
+            <p:nvPr/>
+          </p:nvSpPr>
+          <p:spPr>
+            <a:xfrm>
+              <a:off x="7581908" y="6191522"/>
+              <a:ext cx="0" cy="77114"/>
             </a:xfrm>
             <a:prstGeom prst="rect">
               <a:avLst/>
@@ -11385,14 +11428,14 @@
         </p:sp>
         <p:sp>
           <p:nvSpPr>
-            <p:cNvPr id="253" name="rc253"/>
-            <p:cNvSpPr/>
-            <p:nvPr/>
-          </p:nvSpPr>
-          <p:spPr>
-            <a:xfrm>
-              <a:off x="7504857" y="6319877"/>
-              <a:ext cx="0" cy="82545"/>
+            <p:cNvPr id="254" name="rc254"/>
+            <p:cNvSpPr/>
+            <p:nvPr/>
+          </p:nvSpPr>
+          <p:spPr>
+            <a:xfrm>
+              <a:off x="7581908" y="6315900"/>
+              <a:ext cx="0" cy="77114"/>
             </a:xfrm>
             <a:prstGeom prst="rect">
               <a:avLst/>
@@ -11411,14 +11454,14 @@
         </p:sp>
         <p:sp>
           <p:nvSpPr>
-            <p:cNvPr id="254" name="rc254"/>
-            <p:cNvSpPr/>
-            <p:nvPr/>
-          </p:nvSpPr>
-          <p:spPr>
-            <a:xfrm>
-              <a:off x="7504857" y="6453014"/>
-              <a:ext cx="0" cy="82545"/>
+            <p:cNvPr id="255" name="rc255"/>
+            <p:cNvSpPr/>
+            <p:nvPr/>
+          </p:nvSpPr>
+          <p:spPr>
+            <a:xfrm>
+              <a:off x="7581908" y="6440278"/>
+              <a:ext cx="0" cy="77114"/>
             </a:xfrm>
             <a:prstGeom prst="rect">
               <a:avLst/>
@@ -11437,14 +11480,14 @@
         </p:sp>
         <p:sp>
           <p:nvSpPr>
-            <p:cNvPr id="255" name="rc255"/>
-            <p:cNvSpPr/>
-            <p:nvPr/>
-          </p:nvSpPr>
-          <p:spPr>
-            <a:xfrm>
-              <a:off x="7504857" y="6586152"/>
-              <a:ext cx="0" cy="82545"/>
+            <p:cNvPr id="256" name="rc256"/>
+            <p:cNvSpPr/>
+            <p:nvPr/>
+          </p:nvSpPr>
+          <p:spPr>
+            <a:xfrm>
+              <a:off x="7581908" y="6564657"/>
+              <a:ext cx="0" cy="77114"/>
             </a:xfrm>
             <a:prstGeom prst="rect">
               <a:avLst/>
@@ -11463,14 +11506,14 @@
         </p:sp>
         <p:sp>
           <p:nvSpPr>
-            <p:cNvPr id="256" name="rc256"/>
-            <p:cNvSpPr/>
-            <p:nvPr/>
-          </p:nvSpPr>
-          <p:spPr>
-            <a:xfrm>
-              <a:off x="7504857" y="6719289"/>
-              <a:ext cx="0" cy="82545"/>
+            <p:cNvPr id="257" name="rc257"/>
+            <p:cNvSpPr/>
+            <p:nvPr/>
+          </p:nvSpPr>
+          <p:spPr>
+            <a:xfrm>
+              <a:off x="7581908" y="6689035"/>
+              <a:ext cx="0" cy="77114"/>
             </a:xfrm>
             <a:prstGeom prst="rect">
               <a:avLst/>
@@ -11489,14 +11532,14 @@
         </p:sp>
         <p:sp>
           <p:nvSpPr>
-            <p:cNvPr id="257" name="rc257"/>
-            <p:cNvSpPr/>
-            <p:nvPr/>
-          </p:nvSpPr>
-          <p:spPr>
-            <a:xfrm>
-              <a:off x="7504857" y="6852426"/>
-              <a:ext cx="0" cy="82545"/>
+            <p:cNvPr id="258" name="rc258"/>
+            <p:cNvSpPr/>
+            <p:nvPr/>
+          </p:nvSpPr>
+          <p:spPr>
+            <a:xfrm>
+              <a:off x="7581908" y="6813414"/>
+              <a:ext cx="0" cy="77114"/>
             </a:xfrm>
             <a:prstGeom prst="rect">
               <a:avLst/>
@@ -11515,14 +11558,14 @@
         </p:sp>
         <p:sp>
           <p:nvSpPr>
-            <p:cNvPr id="258" name="rc258"/>
-            <p:cNvSpPr/>
-            <p:nvPr/>
-          </p:nvSpPr>
-          <p:spPr>
-            <a:xfrm>
-              <a:off x="7504857" y="6985564"/>
-              <a:ext cx="0" cy="82545"/>
+            <p:cNvPr id="259" name="rc259"/>
+            <p:cNvSpPr/>
+            <p:nvPr/>
+          </p:nvSpPr>
+          <p:spPr>
+            <a:xfrm>
+              <a:off x="7581908" y="6937792"/>
+              <a:ext cx="0" cy="77114"/>
             </a:xfrm>
             <a:prstGeom prst="rect">
               <a:avLst/>
@@ -11541,13 +11584,13 @@
         </p:sp>
         <p:sp>
           <p:nvSpPr>
-            <p:cNvPr id="259" name="tx259"/>
-            <p:cNvSpPr/>
-            <p:nvPr/>
-          </p:nvSpPr>
-          <p:spPr>
-            <a:xfrm>
-              <a:off x="9927085" y="4468789"/>
+            <p:cNvPr id="260" name="tx260"/>
+            <p:cNvSpPr/>
+            <p:nvPr/>
+          </p:nvSpPr>
+          <p:spPr>
+            <a:xfrm>
+              <a:off x="9956278" y="4584721"/>
               <a:ext cx="335493" cy="56875"/>
             </a:xfrm>
             <a:prstGeom prst="rect">
@@ -11584,13 +11627,13 @@
         </p:sp>
         <p:sp>
           <p:nvSpPr>
-            <p:cNvPr id="260" name="tx260"/>
-            <p:cNvSpPr/>
-            <p:nvPr/>
-          </p:nvSpPr>
-          <p:spPr>
-            <a:xfrm>
-              <a:off x="9927085" y="4601926"/>
+            <p:cNvPr id="261" name="tx261"/>
+            <p:cNvSpPr/>
+            <p:nvPr/>
+          </p:nvSpPr>
+          <p:spPr>
+            <a:xfrm>
+              <a:off x="9956278" y="4709099"/>
               <a:ext cx="335493" cy="56875"/>
             </a:xfrm>
             <a:prstGeom prst="rect">
@@ -11627,13 +11670,13 @@
         </p:sp>
         <p:sp>
           <p:nvSpPr>
-            <p:cNvPr id="261" name="tx261"/>
-            <p:cNvSpPr/>
-            <p:nvPr/>
-          </p:nvSpPr>
-          <p:spPr>
-            <a:xfrm>
-              <a:off x="8334632" y="4735064"/>
+            <p:cNvPr id="262" name="tx262"/>
+            <p:cNvSpPr/>
+            <p:nvPr/>
+          </p:nvSpPr>
+          <p:spPr>
+            <a:xfrm>
+              <a:off x="8395731" y="4833478"/>
               <a:ext cx="335493" cy="56875"/>
             </a:xfrm>
             <a:prstGeom prst="rect">
@@ -11670,13 +11713,13 @@
         </p:sp>
         <p:sp>
           <p:nvSpPr>
-            <p:cNvPr id="262" name="tx262"/>
-            <p:cNvSpPr/>
-            <p:nvPr/>
-          </p:nvSpPr>
-          <p:spPr>
-            <a:xfrm>
-              <a:off x="8334632" y="4868201"/>
+            <p:cNvPr id="263" name="tx263"/>
+            <p:cNvSpPr/>
+            <p:nvPr/>
+          </p:nvSpPr>
+          <p:spPr>
+            <a:xfrm>
+              <a:off x="8395731" y="4957856"/>
               <a:ext cx="335493" cy="56875"/>
             </a:xfrm>
             <a:prstGeom prst="rect">
@@ -11713,13 +11756,13 @@
         </p:sp>
         <p:sp>
           <p:nvSpPr>
-            <p:cNvPr id="263" name="tx263"/>
-            <p:cNvSpPr/>
-            <p:nvPr/>
-          </p:nvSpPr>
-          <p:spPr>
-            <a:xfrm>
-              <a:off x="7538406" y="5001338"/>
+            <p:cNvPr id="264" name="tx264"/>
+            <p:cNvSpPr/>
+            <p:nvPr/>
+          </p:nvSpPr>
+          <p:spPr>
+            <a:xfrm>
+              <a:off x="7615457" y="5082235"/>
               <a:ext cx="335493" cy="56875"/>
             </a:xfrm>
             <a:prstGeom prst="rect">
@@ -11756,13 +11799,13 @@
         </p:sp>
         <p:sp>
           <p:nvSpPr>
-            <p:cNvPr id="264" name="tx264"/>
-            <p:cNvSpPr/>
-            <p:nvPr/>
-          </p:nvSpPr>
-          <p:spPr>
-            <a:xfrm>
-              <a:off x="7538406" y="5134476"/>
+            <p:cNvPr id="265" name="tx265"/>
+            <p:cNvSpPr/>
+            <p:nvPr/>
+          </p:nvSpPr>
+          <p:spPr>
+            <a:xfrm>
+              <a:off x="7615457" y="5206613"/>
               <a:ext cx="335493" cy="56875"/>
             </a:xfrm>
             <a:prstGeom prst="rect">
@@ -11799,13 +11842,13 @@
         </p:sp>
         <p:sp>
           <p:nvSpPr>
-            <p:cNvPr id="265" name="tx265"/>
-            <p:cNvSpPr/>
-            <p:nvPr/>
-          </p:nvSpPr>
-          <p:spPr>
-            <a:xfrm>
-              <a:off x="7538406" y="5267613"/>
+            <p:cNvPr id="266" name="tx266"/>
+            <p:cNvSpPr/>
+            <p:nvPr/>
+          </p:nvSpPr>
+          <p:spPr>
+            <a:xfrm>
+              <a:off x="7615457" y="5330992"/>
               <a:ext cx="335493" cy="56875"/>
             </a:xfrm>
             <a:prstGeom prst="rect">
@@ -11842,13 +11885,13 @@
         </p:sp>
         <p:sp>
           <p:nvSpPr>
-            <p:cNvPr id="266" name="tx266"/>
-            <p:cNvSpPr/>
-            <p:nvPr/>
-          </p:nvSpPr>
-          <p:spPr>
-            <a:xfrm>
-              <a:off x="7538406" y="5400750"/>
+            <p:cNvPr id="267" name="tx267"/>
+            <p:cNvSpPr/>
+            <p:nvPr/>
+          </p:nvSpPr>
+          <p:spPr>
+            <a:xfrm>
+              <a:off x="7615457" y="5455370"/>
               <a:ext cx="335493" cy="56875"/>
             </a:xfrm>
             <a:prstGeom prst="rect">
@@ -11885,13 +11928,13 @@
         </p:sp>
         <p:sp>
           <p:nvSpPr>
-            <p:cNvPr id="267" name="tx267"/>
-            <p:cNvSpPr/>
-            <p:nvPr/>
-          </p:nvSpPr>
-          <p:spPr>
-            <a:xfrm>
-              <a:off x="7538406" y="5533888"/>
+            <p:cNvPr id="268" name="tx268"/>
+            <p:cNvSpPr/>
+            <p:nvPr/>
+          </p:nvSpPr>
+          <p:spPr>
+            <a:xfrm>
+              <a:off x="7615457" y="5579749"/>
               <a:ext cx="335493" cy="56875"/>
             </a:xfrm>
             <a:prstGeom prst="rect">
@@ -11928,13 +11971,13 @@
         </p:sp>
         <p:sp>
           <p:nvSpPr>
-            <p:cNvPr id="268" name="tx268"/>
-            <p:cNvSpPr/>
-            <p:nvPr/>
-          </p:nvSpPr>
-          <p:spPr>
-            <a:xfrm>
-              <a:off x="7538406" y="5667025"/>
+            <p:cNvPr id="269" name="tx269"/>
+            <p:cNvSpPr/>
+            <p:nvPr/>
+          </p:nvSpPr>
+          <p:spPr>
+            <a:xfrm>
+              <a:off x="7615457" y="5704127"/>
               <a:ext cx="335493" cy="56875"/>
             </a:xfrm>
             <a:prstGeom prst="rect">
@@ -11971,13 +12014,13 @@
         </p:sp>
         <p:sp>
           <p:nvSpPr>
-            <p:cNvPr id="269" name="tx269"/>
-            <p:cNvSpPr/>
-            <p:nvPr/>
-          </p:nvSpPr>
-          <p:spPr>
-            <a:xfrm>
-              <a:off x="7538406" y="5800162"/>
+            <p:cNvPr id="270" name="tx270"/>
+            <p:cNvSpPr/>
+            <p:nvPr/>
+          </p:nvSpPr>
+          <p:spPr>
+            <a:xfrm>
+              <a:off x="7615457" y="5828506"/>
               <a:ext cx="335493" cy="56875"/>
             </a:xfrm>
             <a:prstGeom prst="rect">
@@ -12014,13 +12057,13 @@
         </p:sp>
         <p:sp>
           <p:nvSpPr>
-            <p:cNvPr id="270" name="tx270"/>
-            <p:cNvSpPr/>
-            <p:nvPr/>
-          </p:nvSpPr>
-          <p:spPr>
-            <a:xfrm>
-              <a:off x="7538406" y="5933300"/>
+            <p:cNvPr id="271" name="tx271"/>
+            <p:cNvSpPr/>
+            <p:nvPr/>
+          </p:nvSpPr>
+          <p:spPr>
+            <a:xfrm>
+              <a:off x="7615457" y="5952884"/>
               <a:ext cx="335493" cy="56875"/>
             </a:xfrm>
             <a:prstGeom prst="rect">
@@ -12057,13 +12100,13 @@
         </p:sp>
         <p:sp>
           <p:nvSpPr>
-            <p:cNvPr id="271" name="tx271"/>
-            <p:cNvSpPr/>
-            <p:nvPr/>
-          </p:nvSpPr>
-          <p:spPr>
-            <a:xfrm>
-              <a:off x="7538406" y="6066437"/>
+            <p:cNvPr id="272" name="tx272"/>
+            <p:cNvSpPr/>
+            <p:nvPr/>
+          </p:nvSpPr>
+          <p:spPr>
+            <a:xfrm>
+              <a:off x="7615457" y="6077263"/>
               <a:ext cx="335493" cy="56875"/>
             </a:xfrm>
             <a:prstGeom prst="rect">
@@ -12100,13 +12143,13 @@
         </p:sp>
         <p:sp>
           <p:nvSpPr>
-            <p:cNvPr id="272" name="tx272"/>
-            <p:cNvSpPr/>
-            <p:nvPr/>
-          </p:nvSpPr>
-          <p:spPr>
-            <a:xfrm>
-              <a:off x="7538406" y="6199574"/>
+            <p:cNvPr id="273" name="tx273"/>
+            <p:cNvSpPr/>
+            <p:nvPr/>
+          </p:nvSpPr>
+          <p:spPr>
+            <a:xfrm>
+              <a:off x="7615457" y="6201641"/>
               <a:ext cx="335493" cy="56875"/>
             </a:xfrm>
             <a:prstGeom prst="rect">
@@ -12143,13 +12186,13 @@
         </p:sp>
         <p:sp>
           <p:nvSpPr>
-            <p:cNvPr id="273" name="tx273"/>
-            <p:cNvSpPr/>
-            <p:nvPr/>
-          </p:nvSpPr>
-          <p:spPr>
-            <a:xfrm>
-              <a:off x="7538406" y="6332712"/>
+            <p:cNvPr id="274" name="tx274"/>
+            <p:cNvSpPr/>
+            <p:nvPr/>
+          </p:nvSpPr>
+          <p:spPr>
+            <a:xfrm>
+              <a:off x="7615457" y="6326019"/>
               <a:ext cx="335493" cy="56875"/>
             </a:xfrm>
             <a:prstGeom prst="rect">
@@ -12186,13 +12229,13 @@
         </p:sp>
         <p:sp>
           <p:nvSpPr>
-            <p:cNvPr id="274" name="tx274"/>
-            <p:cNvSpPr/>
-            <p:nvPr/>
-          </p:nvSpPr>
-          <p:spPr>
-            <a:xfrm>
-              <a:off x="7538406" y="6465849"/>
+            <p:cNvPr id="275" name="tx275"/>
+            <p:cNvSpPr/>
+            <p:nvPr/>
+          </p:nvSpPr>
+          <p:spPr>
+            <a:xfrm>
+              <a:off x="7615457" y="6450398"/>
               <a:ext cx="335493" cy="56875"/>
             </a:xfrm>
             <a:prstGeom prst="rect">
@@ -12229,13 +12272,13 @@
         </p:sp>
         <p:sp>
           <p:nvSpPr>
-            <p:cNvPr id="275" name="tx275"/>
-            <p:cNvSpPr/>
-            <p:nvPr/>
-          </p:nvSpPr>
-          <p:spPr>
-            <a:xfrm>
-              <a:off x="7538406" y="6598986"/>
+            <p:cNvPr id="276" name="tx276"/>
+            <p:cNvSpPr/>
+            <p:nvPr/>
+          </p:nvSpPr>
+          <p:spPr>
+            <a:xfrm>
+              <a:off x="7615457" y="6574776"/>
               <a:ext cx="335493" cy="56875"/>
             </a:xfrm>
             <a:prstGeom prst="rect">
@@ -12272,13 +12315,13 @@
         </p:sp>
         <p:sp>
           <p:nvSpPr>
-            <p:cNvPr id="276" name="tx276"/>
-            <p:cNvSpPr/>
-            <p:nvPr/>
-          </p:nvSpPr>
-          <p:spPr>
-            <a:xfrm>
-              <a:off x="7538406" y="6732124"/>
+            <p:cNvPr id="277" name="tx277"/>
+            <p:cNvSpPr/>
+            <p:nvPr/>
+          </p:nvSpPr>
+          <p:spPr>
+            <a:xfrm>
+              <a:off x="7615457" y="6699155"/>
               <a:ext cx="335493" cy="56875"/>
             </a:xfrm>
             <a:prstGeom prst="rect">
@@ -12315,13 +12358,13 @@
         </p:sp>
         <p:sp>
           <p:nvSpPr>
-            <p:cNvPr id="277" name="tx277"/>
-            <p:cNvSpPr/>
-            <p:nvPr/>
-          </p:nvSpPr>
-          <p:spPr>
-            <a:xfrm>
-              <a:off x="7538406" y="6865261"/>
+            <p:cNvPr id="278" name="tx278"/>
+            <p:cNvSpPr/>
+            <p:nvPr/>
+          </p:nvSpPr>
+          <p:spPr>
+            <a:xfrm>
+              <a:off x="7615457" y="6823533"/>
               <a:ext cx="335493" cy="56875"/>
             </a:xfrm>
             <a:prstGeom prst="rect">
@@ -12358,13 +12401,13 @@
         </p:sp>
         <p:sp>
           <p:nvSpPr>
-            <p:cNvPr id="278" name="tx278"/>
-            <p:cNvSpPr/>
-            <p:nvPr/>
-          </p:nvSpPr>
-          <p:spPr>
-            <a:xfrm>
-              <a:off x="7538406" y="6998398"/>
+            <p:cNvPr id="279" name="tx279"/>
+            <p:cNvSpPr/>
+            <p:nvPr/>
+          </p:nvSpPr>
+          <p:spPr>
+            <a:xfrm>
+              <a:off x="7615457" y="6947912"/>
               <a:ext cx="335493" cy="56875"/>
             </a:xfrm>
             <a:prstGeom prst="rect">
@@ -12401,21 +12444,21 @@
         </p:sp>
         <p:sp>
           <p:nvSpPr>
-            <p:cNvPr id="279" name="pl279"/>
-            <p:cNvSpPr/>
-            <p:nvPr/>
-          </p:nvSpPr>
-          <p:spPr>
-            <a:xfrm>
-              <a:off x="7321725" y="4417344"/>
-              <a:ext cx="0" cy="2689374"/>
+            <p:cNvPr id="280" name="pl280"/>
+            <p:cNvSpPr/>
+            <p:nvPr/>
+          </p:nvSpPr>
+          <p:spPr>
+            <a:xfrm>
+              <a:off x="7402445" y="4538532"/>
+              <a:ext cx="0" cy="2512445"/>
             </a:xfrm>
             <a:custGeom>
               <a:avLst/>
               <a:pathLst>
-                <a:path w="0" h="2689374">
+                <a:path w="0" h="2512445">
                   <a:moveTo>
-                    <a:pt x="0" y="2689374"/>
+                    <a:pt x="0" y="2512445"/>
                   </a:moveTo>
                   <a:lnTo>
                     <a:pt x="0" y="0"/>
@@ -12441,13 +12484,13 @@
         </p:sp>
         <p:sp>
           <p:nvSpPr>
-            <p:cNvPr id="280" name="tx280"/>
-            <p:cNvSpPr/>
-            <p:nvPr/>
-          </p:nvSpPr>
-          <p:spPr>
-            <a:xfrm>
-              <a:off x="6489401" y="6997758"/>
+            <p:cNvPr id="281" name="tx281"/>
+            <p:cNvSpPr/>
+            <p:nvPr/>
+          </p:nvSpPr>
+          <p:spPr>
+            <a:xfrm>
+              <a:off x="6564428" y="6947272"/>
               <a:ext cx="781080" cy="58155"/>
             </a:xfrm>
             <a:prstGeom prst="rect">
@@ -12484,13 +12527,13 @@
         </p:sp>
         <p:sp>
           <p:nvSpPr>
-            <p:cNvPr id="281" name="tx281"/>
-            <p:cNvSpPr/>
-            <p:nvPr/>
-          </p:nvSpPr>
-          <p:spPr>
-            <a:xfrm>
-              <a:off x="6009524" y="6864621"/>
+            <p:cNvPr id="282" name="tx282"/>
+            <p:cNvSpPr/>
+            <p:nvPr/>
+          </p:nvSpPr>
+          <p:spPr>
+            <a:xfrm>
+              <a:off x="6084551" y="6822893"/>
               <a:ext cx="1260957" cy="58155"/>
             </a:xfrm>
             <a:prstGeom prst="rect">
@@ -12527,13 +12570,13 @@
         </p:sp>
         <p:sp>
           <p:nvSpPr>
-            <p:cNvPr id="282" name="tx282"/>
-            <p:cNvSpPr/>
-            <p:nvPr/>
-          </p:nvSpPr>
-          <p:spPr>
-            <a:xfrm>
-              <a:off x="6388817" y="6731483"/>
+            <p:cNvPr id="283" name="tx283"/>
+            <p:cNvSpPr/>
+            <p:nvPr/>
+          </p:nvSpPr>
+          <p:spPr>
+            <a:xfrm>
+              <a:off x="6463844" y="6698515"/>
               <a:ext cx="881664" cy="58155"/>
             </a:xfrm>
             <a:prstGeom prst="rect">
@@ -12570,13 +12613,13 @@
         </p:sp>
         <p:sp>
           <p:nvSpPr>
-            <p:cNvPr id="283" name="tx283"/>
-            <p:cNvSpPr/>
-            <p:nvPr/>
-          </p:nvSpPr>
-          <p:spPr>
-            <a:xfrm>
-              <a:off x="6388817" y="6598346"/>
+            <p:cNvPr id="284" name="tx284"/>
+            <p:cNvSpPr/>
+            <p:nvPr/>
+          </p:nvSpPr>
+          <p:spPr>
+            <a:xfrm>
+              <a:off x="6463844" y="6574136"/>
               <a:ext cx="881664" cy="58155"/>
             </a:xfrm>
             <a:prstGeom prst="rect">
@@ -12613,13 +12656,13 @@
         </p:sp>
         <p:sp>
           <p:nvSpPr>
-            <p:cNvPr id="284" name="tx284"/>
-            <p:cNvSpPr/>
-            <p:nvPr/>
-          </p:nvSpPr>
-          <p:spPr>
-            <a:xfrm>
-              <a:off x="6149336" y="6465209"/>
+            <p:cNvPr id="285" name="tx285"/>
+            <p:cNvSpPr/>
+            <p:nvPr/>
+          </p:nvSpPr>
+          <p:spPr>
+            <a:xfrm>
+              <a:off x="6224362" y="6449758"/>
               <a:ext cx="1121145" cy="58155"/>
             </a:xfrm>
             <a:prstGeom prst="rect">
@@ -12656,13 +12699,13 @@
         </p:sp>
         <p:sp>
           <p:nvSpPr>
-            <p:cNvPr id="285" name="tx285"/>
-            <p:cNvSpPr/>
-            <p:nvPr/>
-          </p:nvSpPr>
-          <p:spPr>
-            <a:xfrm>
-              <a:off x="6295366" y="6332071"/>
+            <p:cNvPr id="286" name="tx286"/>
+            <p:cNvSpPr/>
+            <p:nvPr/>
+          </p:nvSpPr>
+          <p:spPr>
+            <a:xfrm>
+              <a:off x="6370392" y="6325379"/>
               <a:ext cx="975116" cy="58155"/>
             </a:xfrm>
             <a:prstGeom prst="rect">
@@ -12699,13 +12742,13 @@
         </p:sp>
         <p:sp>
           <p:nvSpPr>
-            <p:cNvPr id="286" name="tx286"/>
-            <p:cNvSpPr/>
-            <p:nvPr/>
-          </p:nvSpPr>
-          <p:spPr>
-            <a:xfrm>
-              <a:off x="6525794" y="6198934"/>
+            <p:cNvPr id="287" name="tx287"/>
+            <p:cNvSpPr/>
+            <p:nvPr/>
+          </p:nvSpPr>
+          <p:spPr>
+            <a:xfrm>
+              <a:off x="6600821" y="6201001"/>
               <a:ext cx="744687" cy="58155"/>
             </a:xfrm>
             <a:prstGeom prst="rect">
@@ -12742,13 +12785,13 @@
         </p:sp>
         <p:sp>
           <p:nvSpPr>
-            <p:cNvPr id="287" name="tx287"/>
-            <p:cNvSpPr/>
-            <p:nvPr/>
-          </p:nvSpPr>
-          <p:spPr>
-            <a:xfrm>
-              <a:off x="6868786" y="6065797"/>
+            <p:cNvPr id="288" name="tx288"/>
+            <p:cNvSpPr/>
+            <p:nvPr/>
+          </p:nvSpPr>
+          <p:spPr>
+            <a:xfrm>
+              <a:off x="6943812" y="6076622"/>
               <a:ext cx="401695" cy="58155"/>
             </a:xfrm>
             <a:prstGeom prst="rect">
@@ -12785,13 +12828,13 @@
         </p:sp>
         <p:sp>
           <p:nvSpPr>
-            <p:cNvPr id="288" name="tx288"/>
-            <p:cNvSpPr/>
-            <p:nvPr/>
-          </p:nvSpPr>
-          <p:spPr>
-            <a:xfrm>
-              <a:off x="6263910" y="5932659"/>
+            <p:cNvPr id="289" name="tx289"/>
+            <p:cNvSpPr/>
+            <p:nvPr/>
+          </p:nvSpPr>
+          <p:spPr>
+            <a:xfrm>
+              <a:off x="6338937" y="5952244"/>
               <a:ext cx="1006571" cy="58155"/>
             </a:xfrm>
             <a:prstGeom prst="rect">
@@ -12828,13 +12871,13 @@
         </p:sp>
         <p:sp>
           <p:nvSpPr>
-            <p:cNvPr id="289" name="tx289"/>
-            <p:cNvSpPr/>
-            <p:nvPr/>
-          </p:nvSpPr>
-          <p:spPr>
-            <a:xfrm>
-              <a:off x="6092552" y="5799522"/>
+            <p:cNvPr id="290" name="tx290"/>
+            <p:cNvSpPr/>
+            <p:nvPr/>
+          </p:nvSpPr>
+          <p:spPr>
+            <a:xfrm>
+              <a:off x="6167578" y="5827866"/>
               <a:ext cx="1177930" cy="58155"/>
             </a:xfrm>
             <a:prstGeom prst="rect">
@@ -12871,13 +12914,13 @@
         </p:sp>
         <p:sp>
           <p:nvSpPr>
-            <p:cNvPr id="290" name="tx290"/>
-            <p:cNvSpPr/>
-            <p:nvPr/>
-          </p:nvSpPr>
-          <p:spPr>
-            <a:xfrm>
-              <a:off x="6205480" y="5666385"/>
+            <p:cNvPr id="291" name="tx291"/>
+            <p:cNvSpPr/>
+            <p:nvPr/>
+          </p:nvSpPr>
+          <p:spPr>
+            <a:xfrm>
+              <a:off x="6280507" y="5703487"/>
               <a:ext cx="1065001" cy="58155"/>
             </a:xfrm>
             <a:prstGeom prst="rect">
@@ -12914,13 +12957,13 @@
         </p:sp>
         <p:sp>
           <p:nvSpPr>
-            <p:cNvPr id="291" name="tx291"/>
-            <p:cNvSpPr/>
-            <p:nvPr/>
-          </p:nvSpPr>
-          <p:spPr>
-            <a:xfrm>
-              <a:off x="6873358" y="5533247"/>
+            <p:cNvPr id="292" name="tx292"/>
+            <p:cNvSpPr/>
+            <p:nvPr/>
+          </p:nvSpPr>
+          <p:spPr>
+            <a:xfrm>
+              <a:off x="6948384" y="5579109"/>
               <a:ext cx="397123" cy="58155"/>
             </a:xfrm>
             <a:prstGeom prst="rect">
@@ -12957,13 +13000,13 @@
         </p:sp>
         <p:sp>
           <p:nvSpPr>
-            <p:cNvPr id="292" name="tx292"/>
-            <p:cNvSpPr/>
-            <p:nvPr/>
-          </p:nvSpPr>
-          <p:spPr>
-            <a:xfrm>
-              <a:off x="6384245" y="5400110"/>
+            <p:cNvPr id="293" name="tx293"/>
+            <p:cNvSpPr/>
+            <p:nvPr/>
+          </p:nvSpPr>
+          <p:spPr>
+            <a:xfrm>
+              <a:off x="6459272" y="5454730"/>
               <a:ext cx="886236" cy="58155"/>
             </a:xfrm>
             <a:prstGeom prst="rect">
@@ -13000,13 +13043,13 @@
         </p:sp>
         <p:sp>
           <p:nvSpPr>
-            <p:cNvPr id="293" name="tx293"/>
-            <p:cNvSpPr/>
-            <p:nvPr/>
-          </p:nvSpPr>
-          <p:spPr>
-            <a:xfrm>
-              <a:off x="5960055" y="5266973"/>
+            <p:cNvPr id="294" name="tx294"/>
+            <p:cNvSpPr/>
+            <p:nvPr/>
+          </p:nvSpPr>
+          <p:spPr>
+            <a:xfrm>
+              <a:off x="6035082" y="5330352"/>
               <a:ext cx="1310426" cy="58155"/>
             </a:xfrm>
             <a:prstGeom prst="rect">
@@ -13043,13 +13086,13 @@
         </p:sp>
         <p:sp>
           <p:nvSpPr>
-            <p:cNvPr id="294" name="tx294"/>
-            <p:cNvSpPr/>
-            <p:nvPr/>
-          </p:nvSpPr>
-          <p:spPr>
-            <a:xfrm>
-              <a:off x="6373638" y="5133835"/>
+            <p:cNvPr id="295" name="tx295"/>
+            <p:cNvSpPr/>
+            <p:nvPr/>
+          </p:nvSpPr>
+          <p:spPr>
+            <a:xfrm>
+              <a:off x="6448665" y="5205973"/>
               <a:ext cx="896843" cy="58155"/>
             </a:xfrm>
             <a:prstGeom prst="rect">
@@ -13086,13 +13129,13 @@
         </p:sp>
         <p:sp>
           <p:nvSpPr>
-            <p:cNvPr id="295" name="tx295"/>
-            <p:cNvSpPr/>
-            <p:nvPr/>
-          </p:nvSpPr>
-          <p:spPr>
-            <a:xfrm>
-              <a:off x="6175030" y="5000698"/>
+            <p:cNvPr id="296" name="tx296"/>
+            <p:cNvSpPr/>
+            <p:nvPr/>
+          </p:nvSpPr>
+          <p:spPr>
+            <a:xfrm>
+              <a:off x="6250057" y="5081595"/>
               <a:ext cx="1095451" cy="58155"/>
             </a:xfrm>
             <a:prstGeom prst="rect">
@@ -13129,13 +13172,13 @@
         </p:sp>
         <p:sp>
           <p:nvSpPr>
-            <p:cNvPr id="296" name="tx296"/>
-            <p:cNvSpPr/>
-            <p:nvPr/>
-          </p:nvSpPr>
-          <p:spPr>
-            <a:xfrm>
-              <a:off x="6552769" y="4867561"/>
+            <p:cNvPr id="297" name="tx297"/>
+            <p:cNvSpPr/>
+            <p:nvPr/>
+          </p:nvSpPr>
+          <p:spPr>
+            <a:xfrm>
+              <a:off x="6627796" y="4957216"/>
               <a:ext cx="717712" cy="58155"/>
             </a:xfrm>
             <a:prstGeom prst="rect">
@@ -13172,13 +13215,13 @@
         </p:sp>
         <p:sp>
           <p:nvSpPr>
-            <p:cNvPr id="297" name="tx297"/>
-            <p:cNvSpPr/>
-            <p:nvPr/>
-          </p:nvSpPr>
-          <p:spPr>
-            <a:xfrm>
-              <a:off x="6489401" y="4734423"/>
+            <p:cNvPr id="298" name="tx298"/>
+            <p:cNvSpPr/>
+            <p:nvPr/>
+          </p:nvSpPr>
+          <p:spPr>
+            <a:xfrm>
+              <a:off x="6564428" y="4832838"/>
               <a:ext cx="781080" cy="58155"/>
             </a:xfrm>
             <a:prstGeom prst="rect">
@@ -13215,13 +13258,13 @@
         </p:sp>
         <p:sp>
           <p:nvSpPr>
-            <p:cNvPr id="298" name="tx298"/>
-            <p:cNvSpPr/>
-            <p:nvPr/>
-          </p:nvSpPr>
-          <p:spPr>
-            <a:xfrm>
-              <a:off x="6638448" y="4601286"/>
+            <p:cNvPr id="299" name="tx299"/>
+            <p:cNvSpPr/>
+            <p:nvPr/>
+          </p:nvSpPr>
+          <p:spPr>
+            <a:xfrm>
+              <a:off x="6713475" y="4708459"/>
               <a:ext cx="632033" cy="58155"/>
             </a:xfrm>
             <a:prstGeom prst="rect">
@@ -13258,13 +13301,13 @@
         </p:sp>
         <p:sp>
           <p:nvSpPr>
-            <p:cNvPr id="299" name="tx299"/>
-            <p:cNvSpPr/>
-            <p:nvPr/>
-          </p:nvSpPr>
-          <p:spPr>
-            <a:xfrm>
-              <a:off x="6367695" y="4468149"/>
+            <p:cNvPr id="300" name="tx300"/>
+            <p:cNvSpPr/>
+            <p:nvPr/>
+          </p:nvSpPr>
+          <p:spPr>
+            <a:xfrm>
+              <a:off x="6442721" y="4584081"/>
               <a:ext cx="902787" cy="58155"/>
             </a:xfrm>
             <a:prstGeom prst="rect">
@@ -13301,24 +13344,24 @@
         </p:sp>
         <p:sp>
           <p:nvSpPr>
-            <p:cNvPr id="300" name="pl300"/>
-            <p:cNvSpPr/>
-            <p:nvPr/>
-          </p:nvSpPr>
-          <p:spPr>
-            <a:xfrm>
-              <a:off x="7293256" y="7026836"/>
-              <a:ext cx="28468" cy="0"/>
+            <p:cNvPr id="301" name="pl301"/>
+            <p:cNvSpPr/>
+            <p:nvPr/>
+          </p:nvSpPr>
+          <p:spPr>
+            <a:xfrm>
+              <a:off x="7370813" y="6976350"/>
+              <a:ext cx="31631" cy="0"/>
             </a:xfrm>
             <a:custGeom>
               <a:avLst/>
               <a:pathLst>
-                <a:path w="28468" h="0">
+                <a:path w="31631" h="0">
                   <a:moveTo>
                     <a:pt x="0" y="0"/>
                   </a:moveTo>
                   <a:lnTo>
-                    <a:pt x="28468" y="0"/>
+                    <a:pt x="31631" y="0"/>
                   </a:lnTo>
                 </a:path>
               </a:pathLst>
@@ -13341,24 +13384,24 @@
         </p:sp>
         <p:sp>
           <p:nvSpPr>
-            <p:cNvPr id="301" name="pl301"/>
-            <p:cNvSpPr/>
-            <p:nvPr/>
-          </p:nvSpPr>
-          <p:spPr>
-            <a:xfrm>
-              <a:off x="7293256" y="6893699"/>
-              <a:ext cx="28468" cy="0"/>
+            <p:cNvPr id="302" name="pl302"/>
+            <p:cNvSpPr/>
+            <p:nvPr/>
+          </p:nvSpPr>
+          <p:spPr>
+            <a:xfrm>
+              <a:off x="7370813" y="6851971"/>
+              <a:ext cx="31631" cy="0"/>
             </a:xfrm>
             <a:custGeom>
               <a:avLst/>
               <a:pathLst>
-                <a:path w="28468" h="0">
+                <a:path w="31631" h="0">
                   <a:moveTo>
                     <a:pt x="0" y="0"/>
                   </a:moveTo>
                   <a:lnTo>
-                    <a:pt x="28468" y="0"/>
+                    <a:pt x="31631" y="0"/>
                   </a:lnTo>
                 </a:path>
               </a:pathLst>
@@ -13381,24 +13424,24 @@
         </p:sp>
         <p:sp>
           <p:nvSpPr>
-            <p:cNvPr id="302" name="pl302"/>
-            <p:cNvSpPr/>
-            <p:nvPr/>
-          </p:nvSpPr>
-          <p:spPr>
-            <a:xfrm>
-              <a:off x="7293256" y="6760561"/>
-              <a:ext cx="28468" cy="0"/>
+            <p:cNvPr id="303" name="pl303"/>
+            <p:cNvSpPr/>
+            <p:nvPr/>
+          </p:nvSpPr>
+          <p:spPr>
+            <a:xfrm>
+              <a:off x="7370813" y="6727593"/>
+              <a:ext cx="31631" cy="0"/>
             </a:xfrm>
             <a:custGeom>
               <a:avLst/>
               <a:pathLst>
-                <a:path w="28468" h="0">
+                <a:path w="31631" h="0">
                   <a:moveTo>
                     <a:pt x="0" y="0"/>
                   </a:moveTo>
                   <a:lnTo>
-                    <a:pt x="28468" y="0"/>
+                    <a:pt x="31631" y="0"/>
                   </a:lnTo>
                 </a:path>
               </a:pathLst>
@@ -13421,24 +13464,24 @@
         </p:sp>
         <p:sp>
           <p:nvSpPr>
-            <p:cNvPr id="303" name="pl303"/>
-            <p:cNvSpPr/>
-            <p:nvPr/>
-          </p:nvSpPr>
-          <p:spPr>
-            <a:xfrm>
-              <a:off x="7293256" y="6627424"/>
-              <a:ext cx="28468" cy="0"/>
+            <p:cNvPr id="304" name="pl304"/>
+            <p:cNvSpPr/>
+            <p:nvPr/>
+          </p:nvSpPr>
+          <p:spPr>
+            <a:xfrm>
+              <a:off x="7370813" y="6603214"/>
+              <a:ext cx="31631" cy="0"/>
             </a:xfrm>
             <a:custGeom>
               <a:avLst/>
               <a:pathLst>
-                <a:path w="28468" h="0">
+                <a:path w="31631" h="0">
                   <a:moveTo>
                     <a:pt x="0" y="0"/>
                   </a:moveTo>
                   <a:lnTo>
-                    <a:pt x="28468" y="0"/>
+                    <a:pt x="31631" y="0"/>
                   </a:lnTo>
                 </a:path>
               </a:pathLst>
@@ -13461,24 +13504,24 @@
         </p:sp>
         <p:sp>
           <p:nvSpPr>
-            <p:cNvPr id="304" name="pl304"/>
-            <p:cNvSpPr/>
-            <p:nvPr/>
-          </p:nvSpPr>
-          <p:spPr>
-            <a:xfrm>
-              <a:off x="7293256" y="6494287"/>
-              <a:ext cx="28468" cy="0"/>
+            <p:cNvPr id="305" name="pl305"/>
+            <p:cNvSpPr/>
+            <p:nvPr/>
+          </p:nvSpPr>
+          <p:spPr>
+            <a:xfrm>
+              <a:off x="7370813" y="6478836"/>
+              <a:ext cx="31631" cy="0"/>
             </a:xfrm>
             <a:custGeom>
               <a:avLst/>
               <a:pathLst>
-                <a:path w="28468" h="0">
+                <a:path w="31631" h="0">
                   <a:moveTo>
                     <a:pt x="0" y="0"/>
                   </a:moveTo>
                   <a:lnTo>
-                    <a:pt x="28468" y="0"/>
+                    <a:pt x="31631" y="0"/>
                   </a:lnTo>
                 </a:path>
               </a:pathLst>
@@ -13501,24 +13544,24 @@
         </p:sp>
         <p:sp>
           <p:nvSpPr>
-            <p:cNvPr id="305" name="pl305"/>
-            <p:cNvSpPr/>
-            <p:nvPr/>
-          </p:nvSpPr>
-          <p:spPr>
-            <a:xfrm>
-              <a:off x="7293256" y="6361149"/>
-              <a:ext cx="28468" cy="0"/>
+            <p:cNvPr id="306" name="pl306"/>
+            <p:cNvSpPr/>
+            <p:nvPr/>
+          </p:nvSpPr>
+          <p:spPr>
+            <a:xfrm>
+              <a:off x="7370813" y="6354457"/>
+              <a:ext cx="31631" cy="0"/>
             </a:xfrm>
             <a:custGeom>
               <a:avLst/>
               <a:pathLst>
-                <a:path w="28468" h="0">
+                <a:path w="31631" h="0">
                   <a:moveTo>
                     <a:pt x="0" y="0"/>
                   </a:moveTo>
                   <a:lnTo>
-                    <a:pt x="28468" y="0"/>
+                    <a:pt x="31631" y="0"/>
                   </a:lnTo>
                 </a:path>
               </a:pathLst>
@@ -13541,24 +13584,24 @@
         </p:sp>
         <p:sp>
           <p:nvSpPr>
-            <p:cNvPr id="306" name="pl306"/>
-            <p:cNvSpPr/>
-            <p:nvPr/>
-          </p:nvSpPr>
-          <p:spPr>
-            <a:xfrm>
-              <a:off x="7293256" y="6228012"/>
-              <a:ext cx="28468" cy="0"/>
+            <p:cNvPr id="307" name="pl307"/>
+            <p:cNvSpPr/>
+            <p:nvPr/>
+          </p:nvSpPr>
+          <p:spPr>
+            <a:xfrm>
+              <a:off x="7370813" y="6230079"/>
+              <a:ext cx="31631" cy="0"/>
             </a:xfrm>
             <a:custGeom>
               <a:avLst/>
               <a:pathLst>
-                <a:path w="28468" h="0">
+                <a:path w="31631" h="0">
                   <a:moveTo>
                     <a:pt x="0" y="0"/>
                   </a:moveTo>
                   <a:lnTo>
-                    <a:pt x="28468" y="0"/>
+                    <a:pt x="31631" y="0"/>
                   </a:lnTo>
                 </a:path>
               </a:pathLst>
@@ -13581,24 +13624,24 @@
         </p:sp>
         <p:sp>
           <p:nvSpPr>
-            <p:cNvPr id="307" name="pl307"/>
-            <p:cNvSpPr/>
-            <p:nvPr/>
-          </p:nvSpPr>
-          <p:spPr>
-            <a:xfrm>
-              <a:off x="7293256" y="6094875"/>
-              <a:ext cx="28468" cy="0"/>
+            <p:cNvPr id="308" name="pl308"/>
+            <p:cNvSpPr/>
+            <p:nvPr/>
+          </p:nvSpPr>
+          <p:spPr>
+            <a:xfrm>
+              <a:off x="7370813" y="6105700"/>
+              <a:ext cx="31631" cy="0"/>
             </a:xfrm>
             <a:custGeom>
               <a:avLst/>
               <a:pathLst>
-                <a:path w="28468" h="0">
+                <a:path w="31631" h="0">
                   <a:moveTo>
                     <a:pt x="0" y="0"/>
                   </a:moveTo>
                   <a:lnTo>
-                    <a:pt x="28468" y="0"/>
+                    <a:pt x="31631" y="0"/>
                   </a:lnTo>
                 </a:path>
               </a:pathLst>
@@ -13621,24 +13664,24 @@
         </p:sp>
         <p:sp>
           <p:nvSpPr>
-            <p:cNvPr id="308" name="pl308"/>
-            <p:cNvSpPr/>
-            <p:nvPr/>
-          </p:nvSpPr>
-          <p:spPr>
-            <a:xfrm>
-              <a:off x="7293256" y="5961737"/>
-              <a:ext cx="28468" cy="0"/>
+            <p:cNvPr id="309" name="pl309"/>
+            <p:cNvSpPr/>
+            <p:nvPr/>
+          </p:nvSpPr>
+          <p:spPr>
+            <a:xfrm>
+              <a:off x="7370813" y="5981322"/>
+              <a:ext cx="31631" cy="0"/>
             </a:xfrm>
             <a:custGeom>
               <a:avLst/>
               <a:pathLst>
-                <a:path w="28468" h="0">
+                <a:path w="31631" h="0">
                   <a:moveTo>
                     <a:pt x="0" y="0"/>
                   </a:moveTo>
                   <a:lnTo>
-                    <a:pt x="28468" y="0"/>
+                    <a:pt x="31631" y="0"/>
                   </a:lnTo>
                 </a:path>
               </a:pathLst>
@@ -13661,24 +13704,24 @@
         </p:sp>
         <p:sp>
           <p:nvSpPr>
-            <p:cNvPr id="309" name="pl309"/>
-            <p:cNvSpPr/>
-            <p:nvPr/>
-          </p:nvSpPr>
-          <p:spPr>
-            <a:xfrm>
-              <a:off x="7293256" y="5828600"/>
-              <a:ext cx="28468" cy="0"/>
+            <p:cNvPr id="310" name="pl310"/>
+            <p:cNvSpPr/>
+            <p:nvPr/>
+          </p:nvSpPr>
+          <p:spPr>
+            <a:xfrm>
+              <a:off x="7370813" y="5856943"/>
+              <a:ext cx="31631" cy="0"/>
             </a:xfrm>
             <a:custGeom>
               <a:avLst/>
               <a:pathLst>
-                <a:path w="28468" h="0">
+                <a:path w="31631" h="0">
                   <a:moveTo>
                     <a:pt x="0" y="0"/>
                   </a:moveTo>
                   <a:lnTo>
-                    <a:pt x="28468" y="0"/>
+                    <a:pt x="31631" y="0"/>
                   </a:lnTo>
                 </a:path>
               </a:pathLst>
@@ -13701,24 +13744,24 @@
         </p:sp>
         <p:sp>
           <p:nvSpPr>
-            <p:cNvPr id="310" name="pl310"/>
-            <p:cNvSpPr/>
-            <p:nvPr/>
-          </p:nvSpPr>
-          <p:spPr>
-            <a:xfrm>
-              <a:off x="7293256" y="5695463"/>
-              <a:ext cx="28468" cy="0"/>
+            <p:cNvPr id="311" name="pl311"/>
+            <p:cNvSpPr/>
+            <p:nvPr/>
+          </p:nvSpPr>
+          <p:spPr>
+            <a:xfrm>
+              <a:off x="7370813" y="5732565"/>
+              <a:ext cx="31631" cy="0"/>
             </a:xfrm>
             <a:custGeom>
               <a:avLst/>
               <a:pathLst>
-                <a:path w="28468" h="0">
+                <a:path w="31631" h="0">
                   <a:moveTo>
                     <a:pt x="0" y="0"/>
                   </a:moveTo>
                   <a:lnTo>
-                    <a:pt x="28468" y="0"/>
+                    <a:pt x="31631" y="0"/>
                   </a:lnTo>
                 </a:path>
               </a:pathLst>
@@ -13741,24 +13784,24 @@
         </p:sp>
         <p:sp>
           <p:nvSpPr>
-            <p:cNvPr id="311" name="pl311"/>
-            <p:cNvSpPr/>
-            <p:nvPr/>
-          </p:nvSpPr>
-          <p:spPr>
-            <a:xfrm>
-              <a:off x="7293256" y="5562325"/>
-              <a:ext cx="28468" cy="0"/>
+            <p:cNvPr id="312" name="pl312"/>
+            <p:cNvSpPr/>
+            <p:nvPr/>
+          </p:nvSpPr>
+          <p:spPr>
+            <a:xfrm>
+              <a:off x="7370813" y="5608187"/>
+              <a:ext cx="31631" cy="0"/>
             </a:xfrm>
             <a:custGeom>
               <a:avLst/>
               <a:pathLst>
-                <a:path w="28468" h="0">
+                <a:path w="31631" h="0">
                   <a:moveTo>
                     <a:pt x="0" y="0"/>
                   </a:moveTo>
                   <a:lnTo>
-                    <a:pt x="28468" y="0"/>
+                    <a:pt x="31631" y="0"/>
                   </a:lnTo>
                 </a:path>
               </a:pathLst>
@@ -13781,24 +13824,24 @@
         </p:sp>
         <p:sp>
           <p:nvSpPr>
-            <p:cNvPr id="312" name="pl312"/>
-            <p:cNvSpPr/>
-            <p:nvPr/>
-          </p:nvSpPr>
-          <p:spPr>
-            <a:xfrm>
-              <a:off x="7293256" y="5429188"/>
-              <a:ext cx="28468" cy="0"/>
+            <p:cNvPr id="313" name="pl313"/>
+            <p:cNvSpPr/>
+            <p:nvPr/>
+          </p:nvSpPr>
+          <p:spPr>
+            <a:xfrm>
+              <a:off x="7370813" y="5483808"/>
+              <a:ext cx="31631" cy="0"/>
             </a:xfrm>
             <a:custGeom>
               <a:avLst/>
               <a:pathLst>
-                <a:path w="28468" h="0">
+                <a:path w="31631" h="0">
                   <a:moveTo>
                     <a:pt x="0" y="0"/>
                   </a:moveTo>
                   <a:lnTo>
-                    <a:pt x="28468" y="0"/>
+                    <a:pt x="31631" y="0"/>
                   </a:lnTo>
                 </a:path>
               </a:pathLst>
@@ -13821,24 +13864,24 @@
         </p:sp>
         <p:sp>
           <p:nvSpPr>
-            <p:cNvPr id="313" name="pl313"/>
-            <p:cNvSpPr/>
-            <p:nvPr/>
-          </p:nvSpPr>
-          <p:spPr>
-            <a:xfrm>
-              <a:off x="7293256" y="5296051"/>
-              <a:ext cx="28468" cy="0"/>
+            <p:cNvPr id="314" name="pl314"/>
+            <p:cNvSpPr/>
+            <p:nvPr/>
+          </p:nvSpPr>
+          <p:spPr>
+            <a:xfrm>
+              <a:off x="7370813" y="5359430"/>
+              <a:ext cx="31631" cy="0"/>
             </a:xfrm>
             <a:custGeom>
               <a:avLst/>
               <a:pathLst>
-                <a:path w="28468" h="0">
+                <a:path w="31631" h="0">
                   <a:moveTo>
                     <a:pt x="0" y="0"/>
                   </a:moveTo>
                   <a:lnTo>
-                    <a:pt x="28468" y="0"/>
+                    <a:pt x="31631" y="0"/>
                   </a:lnTo>
                 </a:path>
               </a:pathLst>
@@ -13861,24 +13904,24 @@
         </p:sp>
         <p:sp>
           <p:nvSpPr>
-            <p:cNvPr id="314" name="pl314"/>
-            <p:cNvSpPr/>
-            <p:nvPr/>
-          </p:nvSpPr>
-          <p:spPr>
-            <a:xfrm>
-              <a:off x="7293256" y="5162913"/>
-              <a:ext cx="28468" cy="0"/>
+            <p:cNvPr id="315" name="pl315"/>
+            <p:cNvSpPr/>
+            <p:nvPr/>
+          </p:nvSpPr>
+          <p:spPr>
+            <a:xfrm>
+              <a:off x="7370813" y="5235051"/>
+              <a:ext cx="31631" cy="0"/>
             </a:xfrm>
             <a:custGeom>
               <a:avLst/>
               <a:pathLst>
-                <a:path w="28468" h="0">
+                <a:path w="31631" h="0">
                   <a:moveTo>
                     <a:pt x="0" y="0"/>
                   </a:moveTo>
                   <a:lnTo>
-                    <a:pt x="28468" y="0"/>
+                    <a:pt x="31631" y="0"/>
                   </a:lnTo>
                 </a:path>
               </a:pathLst>
@@ -13901,24 +13944,24 @@
         </p:sp>
         <p:sp>
           <p:nvSpPr>
-            <p:cNvPr id="315" name="pl315"/>
-            <p:cNvSpPr/>
-            <p:nvPr/>
-          </p:nvSpPr>
-          <p:spPr>
-            <a:xfrm>
-              <a:off x="7293256" y="5029776"/>
-              <a:ext cx="28468" cy="0"/>
+            <p:cNvPr id="316" name="pl316"/>
+            <p:cNvSpPr/>
+            <p:nvPr/>
+          </p:nvSpPr>
+          <p:spPr>
+            <a:xfrm>
+              <a:off x="7370813" y="5110673"/>
+              <a:ext cx="31631" cy="0"/>
             </a:xfrm>
             <a:custGeom>
               <a:avLst/>
               <a:pathLst>
-                <a:path w="28468" h="0">
+                <a:path w="31631" h="0">
                   <a:moveTo>
                     <a:pt x="0" y="0"/>
                   </a:moveTo>
                   <a:lnTo>
-                    <a:pt x="28468" y="0"/>
+                    <a:pt x="31631" y="0"/>
                   </a:lnTo>
                 </a:path>
               </a:pathLst>
@@ -13941,24 +13984,24 @@
         </p:sp>
         <p:sp>
           <p:nvSpPr>
-            <p:cNvPr id="316" name="pl316"/>
-            <p:cNvSpPr/>
-            <p:nvPr/>
-          </p:nvSpPr>
-          <p:spPr>
-            <a:xfrm>
-              <a:off x="7293256" y="4896639"/>
-              <a:ext cx="28468" cy="0"/>
+            <p:cNvPr id="317" name="pl317"/>
+            <p:cNvSpPr/>
+            <p:nvPr/>
+          </p:nvSpPr>
+          <p:spPr>
+            <a:xfrm>
+              <a:off x="7370813" y="4986294"/>
+              <a:ext cx="31631" cy="0"/>
             </a:xfrm>
             <a:custGeom>
               <a:avLst/>
               <a:pathLst>
-                <a:path w="28468" h="0">
+                <a:path w="31631" h="0">
                   <a:moveTo>
                     <a:pt x="0" y="0"/>
                   </a:moveTo>
                   <a:lnTo>
-                    <a:pt x="28468" y="0"/>
+                    <a:pt x="31631" y="0"/>
                   </a:lnTo>
                 </a:path>
               </a:pathLst>
@@ -13981,24 +14024,24 @@
         </p:sp>
         <p:sp>
           <p:nvSpPr>
-            <p:cNvPr id="317" name="pl317"/>
-            <p:cNvSpPr/>
-            <p:nvPr/>
-          </p:nvSpPr>
-          <p:spPr>
-            <a:xfrm>
-              <a:off x="7293256" y="4763501"/>
-              <a:ext cx="28468" cy="0"/>
+            <p:cNvPr id="318" name="pl318"/>
+            <p:cNvSpPr/>
+            <p:nvPr/>
+          </p:nvSpPr>
+          <p:spPr>
+            <a:xfrm>
+              <a:off x="7370813" y="4861916"/>
+              <a:ext cx="31631" cy="0"/>
             </a:xfrm>
             <a:custGeom>
               <a:avLst/>
               <a:pathLst>
-                <a:path w="28468" h="0">
+                <a:path w="31631" h="0">
                   <a:moveTo>
                     <a:pt x="0" y="0"/>
                   </a:moveTo>
                   <a:lnTo>
-                    <a:pt x="28468" y="0"/>
+                    <a:pt x="31631" y="0"/>
                   </a:lnTo>
                 </a:path>
               </a:pathLst>
@@ -14021,24 +14064,24 @@
         </p:sp>
         <p:sp>
           <p:nvSpPr>
-            <p:cNvPr id="318" name="pl318"/>
-            <p:cNvSpPr/>
-            <p:nvPr/>
-          </p:nvSpPr>
-          <p:spPr>
-            <a:xfrm>
-              <a:off x="7293256" y="4630364"/>
-              <a:ext cx="28468" cy="0"/>
+            <p:cNvPr id="319" name="pl319"/>
+            <p:cNvSpPr/>
+            <p:nvPr/>
+          </p:nvSpPr>
+          <p:spPr>
+            <a:xfrm>
+              <a:off x="7370813" y="4737537"/>
+              <a:ext cx="31631" cy="0"/>
             </a:xfrm>
             <a:custGeom>
               <a:avLst/>
               <a:pathLst>
-                <a:path w="28468" h="0">
+                <a:path w="31631" h="0">
                   <a:moveTo>
                     <a:pt x="0" y="0"/>
                   </a:moveTo>
                   <a:lnTo>
-                    <a:pt x="28468" y="0"/>
+                    <a:pt x="31631" y="0"/>
                   </a:lnTo>
                 </a:path>
               </a:pathLst>
@@ -14061,24 +14104,24 @@
         </p:sp>
         <p:sp>
           <p:nvSpPr>
-            <p:cNvPr id="319" name="pl319"/>
-            <p:cNvSpPr/>
-            <p:nvPr/>
-          </p:nvSpPr>
-          <p:spPr>
-            <a:xfrm>
-              <a:off x="7293256" y="4497227"/>
-              <a:ext cx="28468" cy="0"/>
+            <p:cNvPr id="320" name="pl320"/>
+            <p:cNvSpPr/>
+            <p:nvPr/>
+          </p:nvSpPr>
+          <p:spPr>
+            <a:xfrm>
+              <a:off x="7370813" y="4613159"/>
+              <a:ext cx="31631" cy="0"/>
             </a:xfrm>
             <a:custGeom>
               <a:avLst/>
               <a:pathLst>
-                <a:path w="28468" h="0">
+                <a:path w="31631" h="0">
                   <a:moveTo>
                     <a:pt x="0" y="0"/>
                   </a:moveTo>
                   <a:lnTo>
-                    <a:pt x="28468" y="0"/>
+                    <a:pt x="31631" y="0"/>
                   </a:lnTo>
                 </a:path>
               </a:pathLst>
@@ -14101,24 +14144,24 @@
         </p:sp>
         <p:sp>
           <p:nvSpPr>
-            <p:cNvPr id="320" name="pl320"/>
-            <p:cNvSpPr/>
-            <p:nvPr/>
-          </p:nvSpPr>
-          <p:spPr>
-            <a:xfrm>
-              <a:off x="7321725" y="7106718"/>
-              <a:ext cx="4028905" cy="0"/>
+            <p:cNvPr id="321" name="pl321"/>
+            <p:cNvSpPr/>
+            <p:nvPr/>
+          </p:nvSpPr>
+          <p:spPr>
+            <a:xfrm>
+              <a:off x="7402445" y="7050977"/>
+              <a:ext cx="3948185" cy="0"/>
             </a:xfrm>
             <a:custGeom>
               <a:avLst/>
               <a:pathLst>
-                <a:path w="4028905" h="0">
+                <a:path w="3948185" h="0">
                   <a:moveTo>
                     <a:pt x="0" y="0"/>
                   </a:moveTo>
                   <a:lnTo>
-                    <a:pt x="4028905" y="0"/>
+                    <a:pt x="3948185" y="0"/>
                   </a:lnTo>
                 </a:path>
               </a:pathLst>
@@ -14141,21 +14184,21 @@
         </p:sp>
         <p:sp>
           <p:nvSpPr>
-            <p:cNvPr id="321" name="pl321"/>
-            <p:cNvSpPr/>
-            <p:nvPr/>
-          </p:nvSpPr>
-          <p:spPr>
-            <a:xfrm>
-              <a:off x="7504857" y="7106718"/>
-              <a:ext cx="0" cy="28468"/>
+            <p:cNvPr id="322" name="pl322"/>
+            <p:cNvSpPr/>
+            <p:nvPr/>
+          </p:nvSpPr>
+          <p:spPr>
+            <a:xfrm>
+              <a:off x="7581908" y="7050977"/>
+              <a:ext cx="0" cy="31631"/>
             </a:xfrm>
             <a:custGeom>
               <a:avLst/>
               <a:pathLst>
-                <a:path w="0" h="28468">
+                <a:path w="0" h="31631">
                   <a:moveTo>
-                    <a:pt x="0" y="28468"/>
+                    <a:pt x="0" y="31631"/>
                   </a:moveTo>
                   <a:lnTo>
                     <a:pt x="0" y="0"/>
@@ -14181,21 +14224,21 @@
         </p:sp>
         <p:sp>
           <p:nvSpPr>
-            <p:cNvPr id="322" name="pl322"/>
-            <p:cNvSpPr/>
-            <p:nvPr/>
-          </p:nvSpPr>
-          <p:spPr>
-            <a:xfrm>
-              <a:off x="8301083" y="7106718"/>
-              <a:ext cx="0" cy="28468"/>
+            <p:cNvPr id="323" name="pl323"/>
+            <p:cNvSpPr/>
+            <p:nvPr/>
+          </p:nvSpPr>
+          <p:spPr>
+            <a:xfrm>
+              <a:off x="8362181" y="7050977"/>
+              <a:ext cx="0" cy="31631"/>
             </a:xfrm>
             <a:custGeom>
               <a:avLst/>
               <a:pathLst>
-                <a:path w="0" h="28468">
+                <a:path w="0" h="31631">
                   <a:moveTo>
-                    <a:pt x="0" y="28468"/>
+                    <a:pt x="0" y="31631"/>
                   </a:moveTo>
                   <a:lnTo>
                     <a:pt x="0" y="0"/>
@@ -14221,21 +14264,21 @@
         </p:sp>
         <p:sp>
           <p:nvSpPr>
-            <p:cNvPr id="323" name="pl323"/>
-            <p:cNvSpPr/>
-            <p:nvPr/>
-          </p:nvSpPr>
-          <p:spPr>
-            <a:xfrm>
-              <a:off x="9097309" y="7106718"/>
-              <a:ext cx="0" cy="28468"/>
+            <p:cNvPr id="324" name="pl324"/>
+            <p:cNvSpPr/>
+            <p:nvPr/>
+          </p:nvSpPr>
+          <p:spPr>
+            <a:xfrm>
+              <a:off x="9142455" y="7050977"/>
+              <a:ext cx="0" cy="31631"/>
             </a:xfrm>
             <a:custGeom>
               <a:avLst/>
               <a:pathLst>
-                <a:path w="0" h="28468">
+                <a:path w="0" h="31631">
                   <a:moveTo>
-                    <a:pt x="0" y="28468"/>
+                    <a:pt x="0" y="31631"/>
                   </a:moveTo>
                   <a:lnTo>
                     <a:pt x="0" y="0"/>
@@ -14261,21 +14304,21 @@
         </p:sp>
         <p:sp>
           <p:nvSpPr>
-            <p:cNvPr id="324" name="pl324"/>
-            <p:cNvSpPr/>
-            <p:nvPr/>
-          </p:nvSpPr>
-          <p:spPr>
-            <a:xfrm>
-              <a:off x="9893536" y="7106718"/>
-              <a:ext cx="0" cy="28468"/>
+            <p:cNvPr id="325" name="pl325"/>
+            <p:cNvSpPr/>
+            <p:nvPr/>
+          </p:nvSpPr>
+          <p:spPr>
+            <a:xfrm>
+              <a:off x="9922729" y="7050977"/>
+              <a:ext cx="0" cy="31631"/>
             </a:xfrm>
             <a:custGeom>
               <a:avLst/>
               <a:pathLst>
-                <a:path w="0" h="28468">
+                <a:path w="0" h="31631">
                   <a:moveTo>
-                    <a:pt x="0" y="28468"/>
+                    <a:pt x="0" y="31631"/>
                   </a:moveTo>
                   <a:lnTo>
                     <a:pt x="0" y="0"/>
@@ -14301,14 +14344,14 @@
         </p:sp>
         <p:sp>
           <p:nvSpPr>
-            <p:cNvPr id="325" name="tx325"/>
-            <p:cNvSpPr/>
-            <p:nvPr/>
-          </p:nvSpPr>
-          <p:spPr>
-            <a:xfrm>
-              <a:off x="7479482" y="7157961"/>
-              <a:ext cx="50749" cy="65379"/>
+            <p:cNvPr id="326" name="tx326"/>
+            <p:cNvSpPr/>
+            <p:nvPr/>
+          </p:nvSpPr>
+          <p:spPr>
+            <a:xfrm>
+              <a:off x="7553653" y="7107913"/>
+              <a:ext cx="56509" cy="72786"/>
             </a:xfrm>
             <a:prstGeom prst="rect">
               <a:avLst/>
@@ -14328,7 +14371,7 @@
                 </a:spcAft>
               </a:pPr>
               <a:r>
-                <a:rPr sz="720" i="0" b="0">
+                <a:rPr sz="800" i="0" b="0">
                   <a:solidFill>
                     <a:srgbClr val="262626">
                       <a:alpha val="100000"/>
@@ -14344,14 +14387,14 @@
         </p:sp>
         <p:sp>
           <p:nvSpPr>
-            <p:cNvPr id="326" name="tx326"/>
-            <p:cNvSpPr/>
-            <p:nvPr/>
-          </p:nvSpPr>
-          <p:spPr>
-            <a:xfrm>
-              <a:off x="8275708" y="7157961"/>
-              <a:ext cx="50749" cy="65379"/>
+            <p:cNvPr id="327" name="tx327"/>
+            <p:cNvSpPr/>
+            <p:nvPr/>
+          </p:nvSpPr>
+          <p:spPr>
+            <a:xfrm>
+              <a:off x="8333926" y="7107913"/>
+              <a:ext cx="56509" cy="72786"/>
             </a:xfrm>
             <a:prstGeom prst="rect">
               <a:avLst/>
@@ -14371,7 +14414,7 @@
                 </a:spcAft>
               </a:pPr>
               <a:r>
-                <a:rPr sz="720" i="0" b="0">
+                <a:rPr sz="800" i="0" b="0">
                   <a:solidFill>
                     <a:srgbClr val="262626">
                       <a:alpha val="100000"/>
@@ -14387,14 +14430,14 @@
         </p:sp>
         <p:sp>
           <p:nvSpPr>
-            <p:cNvPr id="327" name="tx327"/>
-            <p:cNvSpPr/>
-            <p:nvPr/>
-          </p:nvSpPr>
-          <p:spPr>
-            <a:xfrm>
-              <a:off x="9071935" y="7157961"/>
-              <a:ext cx="50749" cy="65379"/>
+            <p:cNvPr id="328" name="tx328"/>
+            <p:cNvSpPr/>
+            <p:nvPr/>
+          </p:nvSpPr>
+          <p:spPr>
+            <a:xfrm>
+              <a:off x="9114200" y="7107913"/>
+              <a:ext cx="56509" cy="72786"/>
             </a:xfrm>
             <a:prstGeom prst="rect">
               <a:avLst/>
@@ -14414,7 +14457,7 @@
                 </a:spcAft>
               </a:pPr>
               <a:r>
-                <a:rPr sz="720" i="0" b="0">
+                <a:rPr sz="800" i="0" b="0">
                   <a:solidFill>
                     <a:srgbClr val="262626">
                       <a:alpha val="100000"/>
@@ -14430,14 +14473,14 @@
         </p:sp>
         <p:sp>
           <p:nvSpPr>
-            <p:cNvPr id="328" name="tx328"/>
-            <p:cNvSpPr/>
-            <p:nvPr/>
-          </p:nvSpPr>
-          <p:spPr>
-            <a:xfrm>
-              <a:off x="9868161" y="7157961"/>
-              <a:ext cx="50749" cy="65379"/>
+            <p:cNvPr id="329" name="tx329"/>
+            <p:cNvSpPr/>
+            <p:nvPr/>
+          </p:nvSpPr>
+          <p:spPr>
+            <a:xfrm>
+              <a:off x="9894474" y="7107913"/>
+              <a:ext cx="56509" cy="72786"/>
             </a:xfrm>
             <a:prstGeom prst="rect">
               <a:avLst/>
@@ -14457,7 +14500,7 @@
                 </a:spcAft>
               </a:pPr>
               <a:r>
-                <a:rPr sz="720" i="0" b="0">
+                <a:rPr sz="800" i="0" b="0">
                   <a:solidFill>
                     <a:srgbClr val="262626">
                       <a:alpha val="100000"/>
@@ -14473,14 +14516,14 @@
         </p:sp>
         <p:sp>
           <p:nvSpPr>
-            <p:cNvPr id="329" name="tx329"/>
-            <p:cNvSpPr/>
-            <p:nvPr/>
-          </p:nvSpPr>
-          <p:spPr>
-            <a:xfrm>
-              <a:off x="7672106" y="7270920"/>
-              <a:ext cx="3328141" cy="81838"/>
+            <p:cNvPr id="330" name="tx330"/>
+            <p:cNvSpPr/>
+            <p:nvPr/>
+          </p:nvSpPr>
+          <p:spPr>
+            <a:xfrm>
+              <a:off x="7525975" y="7233728"/>
+              <a:ext cx="3701125" cy="90982"/>
             </a:xfrm>
             <a:prstGeom prst="rect">
               <a:avLst/>
@@ -14500,7 +14543,7 @@
                 </a:spcAft>
               </a:pPr>
               <a:r>
-                <a:rPr sz="900" i="0" b="0">
+                <a:rPr sz="1000" i="0" b="0">
                   <a:solidFill>
                     <a:srgbClr val="0D0D0D">
                       <a:alpha val="100000"/>
@@ -14516,14 +14559,14 @@
         </p:sp>
         <p:sp>
           <p:nvSpPr>
-            <p:cNvPr id="330" name="rc330"/>
-            <p:cNvSpPr/>
-            <p:nvPr/>
-          </p:nvSpPr>
-          <p:spPr>
-            <a:xfrm>
-              <a:off x="7762740" y="7490589"/>
-              <a:ext cx="3146875" cy="227745"/>
+            <p:cNvPr id="331" name="rc331"/>
+            <p:cNvSpPr/>
+            <p:nvPr/>
+          </p:nvSpPr>
+          <p:spPr>
+            <a:xfrm>
+              <a:off x="7631271" y="7477937"/>
+              <a:ext cx="3490533" cy="240398"/>
             </a:xfrm>
             <a:prstGeom prst="rect">
               <a:avLst/>
@@ -14542,13 +14585,13 @@
         </p:sp>
         <p:sp>
           <p:nvSpPr>
-            <p:cNvPr id="331" name="rc331"/>
-            <p:cNvSpPr/>
-            <p:nvPr/>
-          </p:nvSpPr>
-          <p:spPr>
-            <a:xfrm>
-              <a:off x="7819676" y="7547526"/>
+            <p:cNvPr id="332" name="rc332"/>
+            <p:cNvSpPr/>
+            <p:nvPr/>
+          </p:nvSpPr>
+          <p:spPr>
+            <a:xfrm>
+              <a:off x="7694533" y="7541199"/>
               <a:ext cx="113872" cy="113872"/>
             </a:xfrm>
             <a:prstGeom prst="rect">
@@ -14568,14 +14611,14 @@
         </p:sp>
         <p:sp>
           <p:nvSpPr>
-            <p:cNvPr id="332" name="rc332"/>
-            <p:cNvSpPr/>
-            <p:nvPr/>
-          </p:nvSpPr>
-          <p:spPr>
-            <a:xfrm>
-              <a:off x="7827040" y="7554889"/>
-              <a:ext cx="99145" cy="99145"/>
+            <p:cNvPr id="333" name="rc333"/>
+            <p:cNvSpPr/>
+            <p:nvPr/>
+          </p:nvSpPr>
+          <p:spPr>
+            <a:xfrm>
+              <a:off x="7702715" y="7549381"/>
+              <a:ext cx="97509" cy="97509"/>
             </a:xfrm>
             <a:prstGeom prst="rect">
               <a:avLst/>
@@ -14594,13 +14637,13 @@
         </p:sp>
         <p:sp>
           <p:nvSpPr>
-            <p:cNvPr id="333" name="rc333"/>
-            <p:cNvSpPr/>
-            <p:nvPr/>
-          </p:nvSpPr>
-          <p:spPr>
-            <a:xfrm>
-              <a:off x="8996569" y="7547526"/>
+            <p:cNvPr id="334" name="rc334"/>
+            <p:cNvSpPr/>
+            <p:nvPr/>
+          </p:nvSpPr>
+          <p:spPr>
+            <a:xfrm>
+              <a:off x="9002128" y="7541199"/>
               <a:ext cx="113872" cy="113872"/>
             </a:xfrm>
             <a:prstGeom prst="rect">
@@ -14620,14 +14663,14 @@
         </p:sp>
         <p:sp>
           <p:nvSpPr>
-            <p:cNvPr id="334" name="rc334"/>
-            <p:cNvSpPr/>
-            <p:nvPr/>
-          </p:nvSpPr>
-          <p:spPr>
-            <a:xfrm>
-              <a:off x="9003933" y="7554889"/>
-              <a:ext cx="99145" cy="99145"/>
+            <p:cNvPr id="335" name="rc335"/>
+            <p:cNvSpPr/>
+            <p:nvPr/>
+          </p:nvSpPr>
+          <p:spPr>
+            <a:xfrm>
+              <a:off x="9010310" y="7549381"/>
+              <a:ext cx="97509" cy="97509"/>
             </a:xfrm>
             <a:prstGeom prst="rect">
               <a:avLst/>
@@ -14646,13 +14689,13 @@
         </p:sp>
         <p:sp>
           <p:nvSpPr>
-            <p:cNvPr id="335" name="rc335"/>
-            <p:cNvSpPr/>
-            <p:nvPr/>
-          </p:nvSpPr>
-          <p:spPr>
-            <a:xfrm>
-              <a:off x="10060351" y="7547526"/>
+            <p:cNvPr id="336" name="rc336"/>
+            <p:cNvSpPr/>
+            <p:nvPr/>
+          </p:nvSpPr>
+          <p:spPr>
+            <a:xfrm>
+              <a:off x="10182621" y="7541199"/>
               <a:ext cx="113872" cy="113872"/>
             </a:xfrm>
             <a:prstGeom prst="rect">
@@ -14672,14 +14715,14 @@
         </p:sp>
         <p:sp>
           <p:nvSpPr>
-            <p:cNvPr id="336" name="rc336"/>
-            <p:cNvSpPr/>
-            <p:nvPr/>
-          </p:nvSpPr>
-          <p:spPr>
-            <a:xfrm>
-              <a:off x="10067715" y="7554889"/>
-              <a:ext cx="99145" cy="99145"/>
+            <p:cNvPr id="337" name="rc337"/>
+            <p:cNvSpPr/>
+            <p:nvPr/>
+          </p:nvSpPr>
+          <p:spPr>
+            <a:xfrm>
+              <a:off x="10190803" y="7549381"/>
+              <a:ext cx="97509" cy="97509"/>
             </a:xfrm>
             <a:prstGeom prst="rect">
               <a:avLst/>
@@ -14698,14 +14741,14 @@
         </p:sp>
         <p:sp>
           <p:nvSpPr>
-            <p:cNvPr id="337" name="tx337"/>
-            <p:cNvSpPr/>
-            <p:nvPr/>
-          </p:nvSpPr>
-          <p:spPr>
-            <a:xfrm>
-              <a:off x="7990486" y="7568069"/>
-              <a:ext cx="949147" cy="72786"/>
+            <p:cNvPr id="338" name="tx338"/>
+            <p:cNvSpPr/>
+            <p:nvPr/>
+          </p:nvSpPr>
+          <p:spPr>
+            <a:xfrm>
+              <a:off x="7871669" y="7557216"/>
+              <a:ext cx="1067196" cy="81838"/>
             </a:xfrm>
             <a:prstGeom prst="rect">
               <a:avLst/>
@@ -14725,7 +14768,7 @@
                 </a:spcAft>
               </a:pPr>
               <a:r>
-                <a:rPr sz="800" i="0" b="0">
+                <a:rPr sz="900" i="0" b="0">
                   <a:solidFill>
                     <a:srgbClr val="000000">
                       <a:alpha val="100000"/>
@@ -14741,14 +14784,14 @@
         </p:sp>
         <p:sp>
           <p:nvSpPr>
-            <p:cNvPr id="338" name="tx338"/>
-            <p:cNvSpPr/>
-            <p:nvPr/>
-          </p:nvSpPr>
-          <p:spPr>
-            <a:xfrm>
-              <a:off x="9167379" y="7568069"/>
-              <a:ext cx="836035" cy="72786"/>
+            <p:cNvPr id="339" name="tx339"/>
+            <p:cNvSpPr/>
+            <p:nvPr/>
+          </p:nvSpPr>
+          <p:spPr>
+            <a:xfrm>
+              <a:off x="9179264" y="7557216"/>
+              <a:ext cx="940094" cy="81838"/>
             </a:xfrm>
             <a:prstGeom prst="rect">
               <a:avLst/>
@@ -14768,7 +14811,7 @@
                 </a:spcAft>
               </a:pPr>
               <a:r>
-                <a:rPr sz="800" i="0" b="0">
+                <a:rPr sz="900" i="0" b="0">
                   <a:solidFill>
                     <a:srgbClr val="000000">
                       <a:alpha val="100000"/>
@@ -14784,14 +14827,14 @@
         </p:sp>
         <p:sp>
           <p:nvSpPr>
-            <p:cNvPr id="339" name="tx339"/>
-            <p:cNvSpPr/>
-            <p:nvPr/>
-          </p:nvSpPr>
-          <p:spPr>
-            <a:xfrm>
-              <a:off x="10231161" y="7568069"/>
-              <a:ext cx="621517" cy="72786"/>
+            <p:cNvPr id="340" name="tx340"/>
+            <p:cNvSpPr/>
+            <p:nvPr/>
+          </p:nvSpPr>
+          <p:spPr>
+            <a:xfrm>
+              <a:off x="10359757" y="7557216"/>
+              <a:ext cx="698784" cy="81838"/>
             </a:xfrm>
             <a:prstGeom prst="rect">
               <a:avLst/>
@@ -14811,7 +14854,7 @@
                 </a:spcAft>
               </a:pPr>
               <a:r>
-                <a:rPr sz="800" i="0" b="0">
+                <a:rPr sz="900" i="0" b="0">
                   <a:solidFill>
                     <a:srgbClr val="000000">
                       <a:alpha val="100000"/>
@@ -14827,14 +14870,14 @@
         </p:sp>
         <p:sp>
           <p:nvSpPr>
-            <p:cNvPr id="340" name="tx340"/>
-            <p:cNvSpPr/>
-            <p:nvPr/>
-          </p:nvSpPr>
-          <p:spPr>
-            <a:xfrm>
-              <a:off x="7321725" y="4151650"/>
-              <a:ext cx="3652662" cy="74432"/>
+            <p:cNvPr id="341" name="tx341"/>
+            <p:cNvSpPr/>
+            <p:nvPr/>
+          </p:nvSpPr>
+          <p:spPr>
+            <a:xfrm>
+              <a:off x="7402445" y="4114721"/>
+              <a:ext cx="2413558" cy="83576"/>
             </a:xfrm>
             <a:prstGeom prst="rect">
               <a:avLst/>
@@ -14854,7 +14897,7 @@
                 </a:spcAft>
               </a:pPr>
               <a:r>
-                <a:rPr sz="819" i="0" b="0">
+                <a:rPr sz="919" i="0" b="0">
                   <a:solidFill>
                     <a:srgbClr val="4D4D4D">
                       <a:alpha val="100000"/>
@@ -14863,21 +14906,21 @@
                   <a:latin typeface="Arial"/>
                   <a:cs typeface="Arial"/>
                 </a:rPr>
-                <a:t>Taxonomic nesting, phylogenetic eigenvectors, phylogenetic logistic regression;</a:t>
+                <a:t>Taxonomic nesting, phylogenetic eigenvectors,</a:t>
               </a:r>
             </a:p>
           </p:txBody>
         </p:sp>
         <p:sp>
           <p:nvSpPr>
-            <p:cNvPr id="341" name="tx341"/>
-            <p:cNvSpPr/>
-            <p:nvPr/>
-          </p:nvSpPr>
-          <p:spPr>
-            <a:xfrm>
-              <a:off x="7321725" y="4264122"/>
-              <a:ext cx="2334828" cy="74432"/>
+            <p:cNvPr id="342" name="tx342"/>
+            <p:cNvSpPr/>
+            <p:nvPr/>
+          </p:nvSpPr>
+          <p:spPr>
+            <a:xfrm>
+              <a:off x="7402445" y="4240908"/>
+              <a:ext cx="2737987" cy="83576"/>
             </a:xfrm>
             <a:prstGeom prst="rect">
               <a:avLst/>
@@ -14897,7 +14940,7 @@
                 </a:spcAft>
               </a:pPr>
               <a:r>
-                <a:rPr sz="819" i="0" b="0">
+                <a:rPr sz="919" i="0" b="0">
                   <a:solidFill>
                     <a:srgbClr val="4D4D4D">
                       <a:alpha val="100000"/>
@@ -14906,21 +14949,21 @@
                   <a:latin typeface="Arial"/>
                   <a:cs typeface="Arial"/>
                 </a:rPr>
-                <a:t>text gives the range of odds ratios across the three</a:t>
+                <a:t> phylogenetic logistic regression; text gives the range</a:t>
               </a:r>
             </a:p>
           </p:txBody>
         </p:sp>
         <p:sp>
           <p:nvSpPr>
-            <p:cNvPr id="342" name="tx342"/>
-            <p:cNvSpPr/>
-            <p:nvPr/>
-          </p:nvSpPr>
-          <p:spPr>
-            <a:xfrm>
-              <a:off x="7321725" y="3977031"/>
-              <a:ext cx="2504998" cy="90982"/>
+            <p:cNvPr id="343" name="tx343"/>
+            <p:cNvSpPr/>
+            <p:nvPr/>
+          </p:nvSpPr>
+          <p:spPr>
+            <a:xfrm>
+              <a:off x="7402445" y="4367095"/>
+              <a:ext cx="1602760" cy="83576"/>
             </a:xfrm>
             <a:prstGeom prst="rect">
               <a:avLst/>
@@ -14940,7 +14983,50 @@
                 </a:spcAft>
               </a:pPr>
               <a:r>
-                <a:rPr sz="1000" i="0" b="1">
+                <a:rPr sz="919" i="0" b="0">
+                  <a:solidFill>
+                    <a:srgbClr val="4D4D4D">
+                      <a:alpha val="100000"/>
+                    </a:srgbClr>
+                  </a:solidFill>
+                  <a:latin typeface="Arial"/>
+                  <a:cs typeface="Arial"/>
+                </a:rPr>
+                <a:t> of odds ratios across the three</a:t>
+              </a:r>
+            </a:p>
+          </p:txBody>
+        </p:sp>
+        <p:sp>
+          <p:nvSpPr>
+            <p:cNvPr id="344" name="tx344"/>
+            <p:cNvSpPr/>
+            <p:nvPr/>
+          </p:nvSpPr>
+          <p:spPr>
+            <a:xfrm>
+              <a:off x="7402445" y="3921979"/>
+              <a:ext cx="2755818" cy="100035"/>
+            </a:xfrm>
+            <a:prstGeom prst="rect">
+              <a:avLst/>
+            </a:prstGeom>
+            <a:noFill/>
+          </p:spPr>
+          <p:txBody>
+            <a:bodyPr lIns="0" rIns="0" tIns="0" bIns="0" anchorCtr="1" anchor="ctr" wrap="none"/>
+            <a:lstStyle/>
+            <a:p>
+              <a:pPr algn="l" marL="0" marR="0" indent="0">
+                <a:spcBef>
+                  <a:spcPts val="0"/>
+                </a:spcBef>
+                <a:spcAft>
+                  <a:spcPts val="0"/>
+                </a:spcAft>
+              </a:pPr>
+              <a:r>
+                <a:rPr sz="1100" i="0" b="1">
                   <a:solidFill>
                     <a:srgbClr val="000000">
                       <a:alpha val="100000"/>
@@ -14956,14 +15042,14 @@
         </p:sp>
         <p:sp>
           <p:nvSpPr>
-            <p:cNvPr id="343" name="tx343"/>
-            <p:cNvSpPr/>
-            <p:nvPr/>
-          </p:nvSpPr>
-          <p:spPr>
-            <a:xfrm>
-              <a:off x="5940465" y="3978560"/>
-              <a:ext cx="93085" cy="109179"/>
+            <p:cNvPr id="345" name="tx345"/>
+            <p:cNvSpPr/>
+            <p:nvPr/>
+          </p:nvSpPr>
+          <p:spPr>
+            <a:xfrm>
+              <a:off x="6011230" y="3919809"/>
+              <a:ext cx="100858" cy="118231"/>
             </a:xfrm>
             <a:prstGeom prst="rect">
               <a:avLst/>
@@ -14983,7 +15069,7 @@
                 </a:spcAft>
               </a:pPr>
               <a:r>
-                <a:rPr sz="1200" i="0" b="1">
+                <a:rPr sz="1300" i="0" b="1">
                   <a:solidFill>
                     <a:srgbClr val="000000">
                       <a:alpha val="100000"/>
